--- a/IRM-Field-Demo-Walking-Deck.pptx
+++ b/IRM-Field-Demo-Walking-Deck.pptx
@@ -4,35 +4,38 @@
   <p:sldMasterIdLst>
     <p:sldMasterId id="2147483648" r:id="rId1"/>
   </p:sldMasterIdLst>
+  <p:notesMasterIdLst>
+    <p:notesMasterId r:id="rId28"/>
+  </p:notesMasterIdLst>
   <p:sldIdLst>
-    <p:sldId id="256" r:id="rId7"/>
-    <p:sldId id="257" r:id="rId9"/>
-    <p:sldId id="258" r:id="rId10"/>
-    <p:sldId id="259" r:id="rId11"/>
-    <p:sldId id="260" r:id="rId12"/>
-    <p:sldId id="261" r:id="rId13"/>
-    <p:sldId id="262" r:id="rId14"/>
-    <p:sldId id="263" r:id="rId15"/>
-    <p:sldId id="264" r:id="rId16"/>
-    <p:sldId id="265" r:id="rId17"/>
-    <p:sldId id="266" r:id="rId18"/>
-    <p:sldId id="267" r:id="rId19"/>
-    <p:sldId id="268" r:id="rId20"/>
-    <p:sldId id="269" r:id="rId21"/>
-    <p:sldId id="270" r:id="rId22"/>
-    <p:sldId id="271" r:id="rId23"/>
-    <p:sldId id="272" r:id="rId24"/>
-    <p:sldId id="273" r:id="rId25"/>
-    <p:sldId id="274" r:id="rId26"/>
-    <p:sldId id="275" r:id="rId27"/>
-    <p:sldId id="276" r:id="rId28"/>
-    <p:sldId id="277" r:id="rId29"/>
-    <p:sldId id="278" r:id="rId30"/>
-    <p:sldId id="279" r:id="rId31"/>
-    <p:sldId id="280" r:id="rId32"/>
-    <p:sldId id="281" r:id="rId33"/>
+    <p:sldId id="256" r:id="rId2"/>
+    <p:sldId id="257" r:id="rId3"/>
+    <p:sldId id="258" r:id="rId4"/>
+    <p:sldId id="259" r:id="rId5"/>
+    <p:sldId id="260" r:id="rId6"/>
+    <p:sldId id="261" r:id="rId7"/>
+    <p:sldId id="262" r:id="rId8"/>
+    <p:sldId id="263" r:id="rId9"/>
+    <p:sldId id="264" r:id="rId10"/>
+    <p:sldId id="265" r:id="rId11"/>
+    <p:sldId id="266" r:id="rId12"/>
+    <p:sldId id="267" r:id="rId13"/>
+    <p:sldId id="268" r:id="rId14"/>
+    <p:sldId id="269" r:id="rId15"/>
+    <p:sldId id="270" r:id="rId16"/>
+    <p:sldId id="271" r:id="rId17"/>
+    <p:sldId id="272" r:id="rId18"/>
+    <p:sldId id="273" r:id="rId19"/>
+    <p:sldId id="274" r:id="rId20"/>
+    <p:sldId id="275" r:id="rId21"/>
+    <p:sldId id="276" r:id="rId22"/>
+    <p:sldId id="277" r:id="rId23"/>
+    <p:sldId id="278" r:id="rId24"/>
+    <p:sldId id="279" r:id="rId25"/>
+    <p:sldId id="280" r:id="rId26"/>
+    <p:sldId id="281" r:id="rId27"/>
   </p:sldIdLst>
-  <p:sldSz cx="12191695" cy="6858000" type="screen4x3"/>
+  <p:sldSz cx="12192000" cy="6858000"/>
   <p:notesSz cx="6858000" cy="9144000"/>
   <p:defaultTextStyle>
     <a:defPPr>
@@ -129,11 +132,27 @@
       </a:defRPr>
     </a:lvl9pPr>
   </p:defaultTextStyle>
+  <p:extLst>
+    <p:ext uri="{EFAFB233-063F-42B5-8137-9DF3F51BA10A}">
+      <p15:sldGuideLst xmlns:p15="http://schemas.microsoft.com/office/powerpoint/2012/main">
+        <p15:guide id="1" orient="horz" pos="2160">
+          <p15:clr>
+            <a:srgbClr val="A4A3A4"/>
+          </p15:clr>
+        </p15:guide>
+        <p15:guide id="2" pos="2880">
+          <p15:clr>
+            <a:srgbClr val="A4A3A4"/>
+          </p15:clr>
+        </p15:guide>
+      </p15:sldGuideLst>
+    </p:ext>
+  </p:extLst>
 </p:presentation>
 </file>
 
 <file path=ppt/notesMasters/notesMaster1.xml><?xml version="1.0" encoding="utf-8"?>
-<p:notesMaster xmlns:a="http://schemas.openxmlformats.org/drawingml/2006/main" xmlns:p="http://schemas.openxmlformats.org/presentationml/2006/main" xmlns:r="http://schemas.openxmlformats.org/officeDocument/2006/relationships">
+<p:notesMaster xmlns:a="http://schemas.openxmlformats.org/drawingml/2006/main" xmlns:r="http://schemas.openxmlformats.org/officeDocument/2006/relationships" xmlns:p="http://schemas.openxmlformats.org/presentationml/2006/main">
   <p:cSld>
     <p:bg>
       <p:bgRef idx="1001">
@@ -154,241 +173,16 @@
           <a:chExt cx="0" cy="0"/>
         </a:xfrm>
       </p:grpSpPr>
-      <p:sp>
-        <p:nvSpPr>
-          <p:cNvPr id="2" name="Header Placeholder 1"/>
-          <p:cNvSpPr>
-            <a:spLocks noGrp="1"/>
-          </p:cNvSpPr>
-          <p:nvPr>
-            <p:ph type="hdr" sz="quarter"/>
-          </p:nvPr>
-        </p:nvSpPr>
-        <p:spPr>
-          <a:xfrm>
-            <a:off x="0" y="0"/>
-            <a:ext cx="2971800" cy="457200"/>
-          </a:xfrm>
-          <a:prstGeom prst="rect">
-            <a:avLst/>
-          </a:prstGeom>
-        </p:spPr>
-        <p:txBody>
-          <a:bodyPr vert="horz" lIns="91440" tIns="45720" rIns="91440" bIns="45720" rtlCol="0"/>
-          <a:lstStyle>
-            <a:lvl1pPr algn="l">
-              <a:defRPr sz="1200"/>
-            </a:lvl1pPr>
-          </a:lstStyle>
-          <a:p>
-            <a:endParaRPr lang="en-US"/>
-          </a:p>
-        </p:txBody>
-      </p:sp>
-      <p:sp>
-        <p:nvSpPr>
-          <p:cNvPr id="3" name="Date Placeholder 2"/>
-          <p:cNvSpPr>
-            <a:spLocks noGrp="1"/>
-          </p:cNvSpPr>
-          <p:nvPr>
-            <p:ph type="dt" idx="1"/>
-          </p:nvPr>
-        </p:nvSpPr>
-        <p:spPr>
-          <a:xfrm>
-            <a:off x="3884613" y="0"/>
-            <a:ext cx="2971800" cy="457200"/>
-          </a:xfrm>
-          <a:prstGeom prst="rect">
-            <a:avLst/>
-          </a:prstGeom>
-        </p:spPr>
-        <p:txBody>
-          <a:bodyPr vert="horz" lIns="91440" tIns="45720" rIns="91440" bIns="45720" rtlCol="0"/>
-          <a:lstStyle>
-            <a:lvl1pPr algn="r">
-              <a:defRPr sz="1200"/>
-            </a:lvl1pPr>
-          </a:lstStyle>
-          <a:p>
-            <a:fld id="{0F89C1C7-3DCD-1040-A9CF-14679D8B5DDD}" type="datetimeFigureOut">
-              <a:rPr lang="en-US" smtClean="0"/>
-              <a:t>10/17/16</a:t>
-            </a:fld>
-            <a:endParaRPr lang="en-US"/>
-          </a:p>
-        </p:txBody>
-      </p:sp>
-      <p:sp>
-        <p:nvSpPr>
-          <p:cNvPr id="4" name="Slide Image Placeholder 3"/>
-          <p:cNvSpPr>
-            <a:spLocks noGrp="1" noRot="1" noChangeAspect="1"/>
-          </p:cNvSpPr>
-          <p:nvPr>
-            <p:ph type="sldImg" idx="2"/>
-          </p:nvPr>
-        </p:nvSpPr>
-        <p:spPr>
-          <a:xfrm>
-            <a:off x="1143000" y="685800"/>
-            <a:ext cx="4572000" cy="3429000"/>
-          </a:xfrm>
-          <a:prstGeom prst="rect">
-            <a:avLst/>
-          </a:prstGeom>
-          <a:noFill/>
-          <a:ln w="12700">
-            <a:solidFill>
-              <a:prstClr val="black"/>
-            </a:solidFill>
-          </a:ln>
-        </p:spPr>
-        <p:txBody>
-          <a:bodyPr vert="horz" lIns="91440" tIns="45720" rIns="91440" bIns="45720" rtlCol="0" anchor="ctr"/>
-          <a:lstStyle/>
-          <a:p>
-            <a:endParaRPr lang="en-US"/>
-          </a:p>
-        </p:txBody>
-      </p:sp>
-      <p:sp>
-        <p:nvSpPr>
-          <p:cNvPr id="5" name="Notes Placeholder 4"/>
-          <p:cNvSpPr>
-            <a:spLocks noGrp="1"/>
-          </p:cNvSpPr>
-          <p:nvPr>
-            <p:ph type="body" sz="quarter" idx="3"/>
-          </p:nvPr>
-        </p:nvSpPr>
-        <p:spPr>
-          <a:xfrm>
-            <a:off x="685800" y="4343400"/>
-            <a:ext cx="5486400" cy="4114800"/>
-          </a:xfrm>
-          <a:prstGeom prst="rect">
-            <a:avLst/>
-          </a:prstGeom>
-        </p:spPr>
-        <p:txBody>
-          <a:bodyPr vert="horz" lIns="91440" tIns="45720" rIns="91440" bIns="45720" rtlCol="0"/>
-          <a:lstStyle/>
-          <a:p>
-            <a:pPr lvl="0"/>
-            <a:r>
-              <a:rPr lang="en-US" smtClean="0"/>
-              <a:t>Click to edit Master text styles</a:t>
-            </a:r>
-          </a:p>
-          <a:p>
-            <a:pPr lvl="1"/>
-            <a:r>
-              <a:rPr lang="en-US" smtClean="0"/>
-              <a:t>Second level</a:t>
-            </a:r>
-          </a:p>
-          <a:p>
-            <a:pPr lvl="2"/>
-            <a:r>
-              <a:rPr lang="en-US" smtClean="0"/>
-              <a:t>Third level</a:t>
-            </a:r>
-          </a:p>
-          <a:p>
-            <a:pPr lvl="3"/>
-            <a:r>
-              <a:rPr lang="en-US" smtClean="0"/>
-              <a:t>Fourth level</a:t>
-            </a:r>
-          </a:p>
-          <a:p>
-            <a:pPr lvl="4"/>
-            <a:r>
-              <a:rPr lang="en-US" smtClean="0"/>
-              <a:t>Fifth level</a:t>
-            </a:r>
-            <a:endParaRPr lang="en-US"/>
-          </a:p>
-        </p:txBody>
-      </p:sp>
-      <p:sp>
-        <p:nvSpPr>
-          <p:cNvPr id="6" name="Footer Placeholder 5"/>
-          <p:cNvSpPr>
-            <a:spLocks noGrp="1"/>
-          </p:cNvSpPr>
-          <p:nvPr>
-            <p:ph type="ftr" sz="quarter" idx="4"/>
-          </p:nvPr>
-        </p:nvSpPr>
-        <p:spPr>
-          <a:xfrm>
-            <a:off x="0" y="8685213"/>
-            <a:ext cx="2971800" cy="457200"/>
-          </a:xfrm>
-          <a:prstGeom prst="rect">
-            <a:avLst/>
-          </a:prstGeom>
-        </p:spPr>
-        <p:txBody>
-          <a:bodyPr vert="horz" lIns="91440" tIns="45720" rIns="91440" bIns="45720" rtlCol="0" anchor="b"/>
-          <a:lstStyle>
-            <a:lvl1pPr algn="l">
-              <a:defRPr sz="1200"/>
-            </a:lvl1pPr>
-          </a:lstStyle>
-          <a:p>
-            <a:endParaRPr lang="en-US"/>
-          </a:p>
-        </p:txBody>
-      </p:sp>
-      <p:sp>
-        <p:nvSpPr>
-          <p:cNvPr id="7" name="Slide Number Placeholder 6"/>
-          <p:cNvSpPr>
-            <a:spLocks noGrp="1"/>
-          </p:cNvSpPr>
-          <p:nvPr>
-            <p:ph type="sldNum" sz="quarter" idx="5"/>
-          </p:nvPr>
-        </p:nvSpPr>
-        <p:spPr>
-          <a:xfrm>
-            <a:off x="3884613" y="8685213"/>
-            <a:ext cx="2971800" cy="457200"/>
-          </a:xfrm>
-          <a:prstGeom prst="rect">
-            <a:avLst/>
-          </a:prstGeom>
-        </p:spPr>
-        <p:txBody>
-          <a:bodyPr vert="horz" lIns="91440" tIns="45720" rIns="91440" bIns="45720" rtlCol="0" anchor="b"/>
-          <a:lstStyle>
-            <a:lvl1pPr algn="r">
-              <a:defRPr sz="1200"/>
-            </a:lvl1pPr>
-          </a:lstStyle>
-          <a:p>
-            <a:fld id="{BB5E49A5-4136-284D-997B-48E1D791AD67}" type="slidenum">
-              <a:rPr lang="en-US" smtClean="0"/>
-              <a:t>‹#›</a:t>
-            </a:fld>
-            <a:endParaRPr lang="en-US"/>
-          </a:p>
-        </p:txBody>
-      </p:sp>
     </p:spTree>
     <p:extLst>
       <p:ext uri="{BB962C8B-B14F-4D97-AF65-F5344CB8AC3E}">
-        <p14:creationId xmlns:p14="http://schemas.microsoft.com/office/powerpoint/2010/main" val="2623252185"/>
+        <p14:creationId xmlns:p14="http://schemas.microsoft.com/office/powerpoint/2010/main" val="4026199065"/>
       </p:ext>
     </p:extLst>
   </p:cSld>
   <p:clrMap bg1="lt1" tx1="dk1" bg2="lt2" tx2="dk2" accent1="accent1" accent2="accent2" accent3="accent3" accent4="accent4" accent5="accent5" accent6="accent6" hlink="hlink" folHlink="folHlink"/>
   <p:notesStyle>
-    <a:lvl1pPr marL="0" algn="l" defTabSz="457200" rtl="0" eaLnBrk="1" latinLnBrk="0" hangingPunct="1">
+    <a:lvl1pPr marL="0" algn="l" defTabSz="914400" rtl="0" eaLnBrk="1" latinLnBrk="0" hangingPunct="1">
       <a:defRPr sz="1200" kern="1200">
         <a:solidFill>
           <a:schemeClr val="tx1"/>
@@ -398,7 +192,7 @@
         <a:cs typeface="+mn-cs"/>
       </a:defRPr>
     </a:lvl1pPr>
-    <a:lvl2pPr marL="457200" algn="l" defTabSz="457200" rtl="0" eaLnBrk="1" latinLnBrk="0" hangingPunct="1">
+    <a:lvl2pPr marL="457200" algn="l" defTabSz="914400" rtl="0" eaLnBrk="1" latinLnBrk="0" hangingPunct="1">
       <a:defRPr sz="1200" kern="1200">
         <a:solidFill>
           <a:schemeClr val="tx1"/>
@@ -408,7 +202,7 @@
         <a:cs typeface="+mn-cs"/>
       </a:defRPr>
     </a:lvl2pPr>
-    <a:lvl3pPr marL="914400" algn="l" defTabSz="457200" rtl="0" eaLnBrk="1" latinLnBrk="0" hangingPunct="1">
+    <a:lvl3pPr marL="914400" algn="l" defTabSz="914400" rtl="0" eaLnBrk="1" latinLnBrk="0" hangingPunct="1">
       <a:defRPr sz="1200" kern="1200">
         <a:solidFill>
           <a:schemeClr val="tx1"/>
@@ -418,7 +212,7 @@
         <a:cs typeface="+mn-cs"/>
       </a:defRPr>
     </a:lvl3pPr>
-    <a:lvl4pPr marL="1371600" algn="l" defTabSz="457200" rtl="0" eaLnBrk="1" latinLnBrk="0" hangingPunct="1">
+    <a:lvl4pPr marL="1371600" algn="l" defTabSz="914400" rtl="0" eaLnBrk="1" latinLnBrk="0" hangingPunct="1">
       <a:defRPr sz="1200" kern="1200">
         <a:solidFill>
           <a:schemeClr val="tx1"/>
@@ -428,7 +222,7 @@
         <a:cs typeface="+mn-cs"/>
       </a:defRPr>
     </a:lvl4pPr>
-    <a:lvl5pPr marL="1828800" algn="l" defTabSz="457200" rtl="0" eaLnBrk="1" latinLnBrk="0" hangingPunct="1">
+    <a:lvl5pPr marL="1828800" algn="l" defTabSz="914400" rtl="0" eaLnBrk="1" latinLnBrk="0" hangingPunct="1">
       <a:defRPr sz="1200" kern="1200">
         <a:solidFill>
           <a:schemeClr val="tx1"/>
@@ -438,7 +232,7 @@
         <a:cs typeface="+mn-cs"/>
       </a:defRPr>
     </a:lvl5pPr>
-    <a:lvl6pPr marL="2286000" algn="l" defTabSz="457200" rtl="0" eaLnBrk="1" latinLnBrk="0" hangingPunct="1">
+    <a:lvl6pPr marL="2286000" algn="l" defTabSz="914400" rtl="0" eaLnBrk="1" latinLnBrk="0" hangingPunct="1">
       <a:defRPr sz="1200" kern="1200">
         <a:solidFill>
           <a:schemeClr val="tx1"/>
@@ -448,7 +242,7 @@
         <a:cs typeface="+mn-cs"/>
       </a:defRPr>
     </a:lvl6pPr>
-    <a:lvl7pPr marL="2743200" algn="l" defTabSz="457200" rtl="0" eaLnBrk="1" latinLnBrk="0" hangingPunct="1">
+    <a:lvl7pPr marL="2743200" algn="l" defTabSz="914400" rtl="0" eaLnBrk="1" latinLnBrk="0" hangingPunct="1">
       <a:defRPr sz="1200" kern="1200">
         <a:solidFill>
           <a:schemeClr val="tx1"/>
@@ -458,7 +252,7 @@
         <a:cs typeface="+mn-cs"/>
       </a:defRPr>
     </a:lvl7pPr>
-    <a:lvl8pPr marL="3200400" algn="l" defTabSz="457200" rtl="0" eaLnBrk="1" latinLnBrk="0" hangingPunct="1">
+    <a:lvl8pPr marL="3200400" algn="l" defTabSz="914400" rtl="0" eaLnBrk="1" latinLnBrk="0" hangingPunct="1">
       <a:defRPr sz="1200" kern="1200">
         <a:solidFill>
           <a:schemeClr val="tx1"/>
@@ -468,7 +262,7 @@
         <a:cs typeface="+mn-cs"/>
       </a:defRPr>
     </a:lvl8pPr>
-    <a:lvl9pPr marL="3657600" algn="l" defTabSz="457200" rtl="0" eaLnBrk="1" latinLnBrk="0" hangingPunct="1">
+    <a:lvl9pPr marL="3657600" algn="l" defTabSz="914400" rtl="0" eaLnBrk="1" latinLnBrk="0" hangingPunct="1">
       <a:defRPr sz="1200" kern="1200">
         <a:solidFill>
           <a:schemeClr val="tx1"/>
@@ -483,7 +277,7 @@
 </file>
 
 <file path=ppt/notesSlides/notesSlide1.xml><?xml version="1.0" encoding="utf-8"?>
-<p:notes xmlns:a="http://schemas.openxmlformats.org/drawingml/2006/main" xmlns:p="http://schemas.openxmlformats.org/presentationml/2006/main" xmlns:r="http://schemas.openxmlformats.org/officeDocument/2006/relationships">
+<p:notes xmlns:a="http://schemas.openxmlformats.org/drawingml/2006/main" xmlns:r="http://schemas.openxmlformats.org/officeDocument/2006/relationships" xmlns:p="http://schemas.openxmlformats.org/presentationml/2006/main">
   <p:cSld>
     <p:spTree>
       <p:nvGrpSpPr>
@@ -503,54 +297,56 @@
         <p:nvSpPr>
           <p:cNvPr id="2" name="Slide Image Placeholder 1"/>
           <p:cNvSpPr>
+            <a:spLocks noGrp="1" noRot="1" noChangeAspect="1"/>
+          </p:cNvSpPr>
+          <p:nvPr>
+            <p:ph type="sldImg" idx="2"/>
+          </p:nvPr>
+        </p:nvSpPr>
+        <p:spPr/>
+      </p:sp>
+      <p:sp>
+        <p:nvSpPr>
+          <p:cNvPr id="3" name="Notes Placeholder 2"/>
+          <p:cNvSpPr>
             <a:spLocks noGrp="1"/>
           </p:cNvSpPr>
           <p:nvPr>
-            <p:ph type="sldImg" idx="2"/>
-          </p:nvPr>
-        </p:nvSpPr>
-        <p:spPr/>
-      </p:sp>
-      <p:sp>
-        <p:nvSpPr>
-          <p:cNvPr id="3" name="Notes Placeholder 2"/>
+            <p:ph type="body" sz="quarter" idx="3"/>
+          </p:nvPr>
+        </p:nvSpPr>
+        <p:spPr/>
+        <p:txBody>
+          <a:bodyPr/>
+          <a:lstStyle/>
+          <a:p>
+            <a:r>
+              <a:t>Welcome slide. Introduce yourself and set context:</a:t>
+            </a:r>
+          </a:p>
+          <a:p>
+            <a:r>
+              <a:t>- "Today I'm going to show you how Infrastructure Resiliency Manager helps you go from blind spots to validated zone resilience."</a:t>
+            </a:r>
+          </a:p>
+          <a:p>
+            <a:r>
+              <a:t>- "We have two live applications deployed in Azure — one on AKS, one on VMs — and we'll walk through assessment, remediation, and drills."</a:t>
+            </a:r>
+          </a:p>
+          <a:p>
+            <a:endParaRPr/>
+          </a:p>
+        </p:txBody>
+      </p:sp>
+      <p:sp>
+        <p:nvSpPr>
+          <p:cNvPr id="4" name="Slide Number Placeholder 3"/>
           <p:cNvSpPr>
             <a:spLocks noGrp="1"/>
           </p:cNvSpPr>
           <p:nvPr>
-            <p:ph type="body" idx="3" sz="quarter"/>
-          </p:nvPr>
-        </p:nvSpPr>
-        <p:spPr/>
-        <p:txBody>
-          <a:bodyPr/>
-          <a:lstStyle/>
-          <a:p>
-            <a:r>
-              <a:t>Welcome slide. Introduce yourself and set context:</a:t>
-            </a:r>
-          </a:p>
-          <a:p>
-            <a:r>
-              <a:t>- "Today I'm going to show you how Infrastructure Resiliency Manager helps you go from blind spots to validated zone resilience."</a:t>
-            </a:r>
-          </a:p>
-          <a:p>
-            <a:r>
-              <a:t>- "We have two live applications deployed in Azure — one on AKS, one on VMs — and we'll walk through assessment, remediation, and drills."</a:t>
-            </a:r>
-          </a:p>
-          <a:p/>
-        </p:txBody>
-      </p:sp>
-      <p:sp>
-        <p:nvSpPr>
-          <p:cNvPr id="4" name="Slide Number Placeholder 3"/>
-          <p:cNvSpPr>
-            <a:spLocks noGrp="1"/>
-          </p:cNvSpPr>
-          <p:nvPr>
-            <p:ph type="sldNum" idx="5" sz="quarter"/>
+            <p:ph type="sldNum" sz="quarter" idx="5"/>
           </p:nvPr>
         </p:nvSpPr>
         <p:spPr/>
@@ -564,7 +360,7 @@
 </file>
 
 <file path=ppt/notesSlides/notesSlide10.xml><?xml version="1.0" encoding="utf-8"?>
-<p:notes xmlns:a="http://schemas.openxmlformats.org/drawingml/2006/main" xmlns:p="http://schemas.openxmlformats.org/presentationml/2006/main" xmlns:r="http://schemas.openxmlformats.org/officeDocument/2006/relationships">
+<p:notes xmlns:a="http://schemas.openxmlformats.org/drawingml/2006/main" xmlns:r="http://schemas.openxmlformats.org/officeDocument/2006/relationships" xmlns:p="http://schemas.openxmlformats.org/presentationml/2006/main">
   <p:cSld>
     <p:spTree>
       <p:nvGrpSpPr>
@@ -584,53 +380,53 @@
         <p:nvSpPr>
           <p:cNvPr id="2" name="Slide Image Placeholder 1"/>
           <p:cNvSpPr>
+            <a:spLocks noGrp="1" noRot="1" noChangeAspect="1"/>
+          </p:cNvSpPr>
+          <p:nvPr>
+            <p:ph type="sldImg" idx="2"/>
+          </p:nvPr>
+        </p:nvSpPr>
+        <p:spPr/>
+      </p:sp>
+      <p:sp>
+        <p:nvSpPr>
+          <p:cNvPr id="3" name="Notes Placeholder 2"/>
+          <p:cNvSpPr>
             <a:spLocks noGrp="1"/>
           </p:cNvSpPr>
           <p:nvPr>
-            <p:ph type="sldImg" idx="2"/>
-          </p:nvPr>
-        </p:nvSpPr>
-        <p:spPr/>
-      </p:sp>
-      <p:sp>
-        <p:nvSpPr>
-          <p:cNvPr id="3" name="Notes Placeholder 2"/>
+            <p:ph type="body" sz="quarter" idx="3"/>
+          </p:nvPr>
+        </p:nvSpPr>
+        <p:spPr/>
+        <p:txBody>
+          <a:bodyPr/>
+          <a:lstStyle/>
+          <a:p>
+            <a:r>
+              <a:t>In the portal, click into IRMDemoSG2.</a:t>
+            </a:r>
+          </a:p>
+          <a:p>
+            <a:r>
+              <a:t>Walk through the resource list — point to green checkmarks and red X's.</a:t>
+            </a:r>
+          </a:p>
+          <a:p>
+            <a:r>
+              <a:t>Click into a recommendation to preview what IRM suggests.</a:t>
+            </a:r>
+          </a:p>
+        </p:txBody>
+      </p:sp>
+      <p:sp>
+        <p:nvSpPr>
+          <p:cNvPr id="4" name="Slide Number Placeholder 3"/>
           <p:cNvSpPr>
             <a:spLocks noGrp="1"/>
           </p:cNvSpPr>
           <p:nvPr>
-            <p:ph type="body" idx="3" sz="quarter"/>
-          </p:nvPr>
-        </p:nvSpPr>
-        <p:spPr/>
-        <p:txBody>
-          <a:bodyPr/>
-          <a:lstStyle/>
-          <a:p>
-            <a:r>
-              <a:t>In the portal, click into IRMDemoSG2.</a:t>
-            </a:r>
-          </a:p>
-          <a:p>
-            <a:r>
-              <a:t>Walk through the resource list — point to green checkmarks and red X's.</a:t>
-            </a:r>
-          </a:p>
-          <a:p>
-            <a:r>
-              <a:t>Click into a recommendation to preview what IRM suggests.</a:t>
-            </a:r>
-          </a:p>
-        </p:txBody>
-      </p:sp>
-      <p:sp>
-        <p:nvSpPr>
-          <p:cNvPr id="4" name="Slide Number Placeholder 3"/>
-          <p:cNvSpPr>
-            <a:spLocks noGrp="1"/>
-          </p:cNvSpPr>
-          <p:nvPr>
-            <p:ph type="sldNum" idx="5" sz="quarter"/>
+            <p:ph type="sldNum" sz="quarter" idx="5"/>
           </p:nvPr>
         </p:nvSpPr>
         <p:spPr/>
@@ -644,7 +440,7 @@
 </file>
 
 <file path=ppt/notesSlides/notesSlide11.xml><?xml version="1.0" encoding="utf-8"?>
-<p:notes xmlns:a="http://schemas.openxmlformats.org/drawingml/2006/main" xmlns:p="http://schemas.openxmlformats.org/presentationml/2006/main" xmlns:r="http://schemas.openxmlformats.org/officeDocument/2006/relationships">
+<p:notes xmlns:a="http://schemas.openxmlformats.org/drawingml/2006/main" xmlns:r="http://schemas.openxmlformats.org/officeDocument/2006/relationships" xmlns:p="http://schemas.openxmlformats.org/presentationml/2006/main">
   <p:cSld>
     <p:spTree>
       <p:nvGrpSpPr>
@@ -664,53 +460,53 @@
         <p:nvSpPr>
           <p:cNvPr id="2" name="Slide Image Placeholder 1"/>
           <p:cNvSpPr>
+            <a:spLocks noGrp="1" noRot="1" noChangeAspect="1"/>
+          </p:cNvSpPr>
+          <p:nvPr>
+            <p:ph type="sldImg" idx="2"/>
+          </p:nvPr>
+        </p:nvSpPr>
+        <p:spPr/>
+      </p:sp>
+      <p:sp>
+        <p:nvSpPr>
+          <p:cNvPr id="3" name="Notes Placeholder 2"/>
+          <p:cNvSpPr>
             <a:spLocks noGrp="1"/>
           </p:cNvSpPr>
           <p:nvPr>
-            <p:ph type="sldImg" idx="2"/>
-          </p:nvPr>
-        </p:nvSpPr>
-        <p:spPr/>
-      </p:sp>
-      <p:sp>
-        <p:nvSpPr>
-          <p:cNvPr id="3" name="Notes Placeholder 2"/>
+            <p:ph type="body" sz="quarter" idx="3"/>
+          </p:nvPr>
+        </p:nvSpPr>
+        <p:spPr/>
+        <p:txBody>
+          <a:bodyPr/>
+          <a:lstStyle/>
+          <a:p>
+            <a:r>
+              <a:t>Click into IRMDemoSG3. Point out the recovery plan section.</a:t>
+            </a:r>
+          </a:p>
+          <a:p>
+            <a:r>
+              <a:t>Highlight that ASR + recovery plan = zone-resilient status for VMs.</a:t>
+            </a:r>
+          </a:p>
+          <a:p>
+            <a:r>
+              <a:t>"Without the orchestrated plan, even ASR-protected VMs would be flagged." </a:t>
+            </a:r>
+          </a:p>
+        </p:txBody>
+      </p:sp>
+      <p:sp>
+        <p:nvSpPr>
+          <p:cNvPr id="4" name="Slide Number Placeholder 3"/>
           <p:cNvSpPr>
             <a:spLocks noGrp="1"/>
           </p:cNvSpPr>
           <p:nvPr>
-            <p:ph type="body" idx="3" sz="quarter"/>
-          </p:nvPr>
-        </p:nvSpPr>
-        <p:spPr/>
-        <p:txBody>
-          <a:bodyPr/>
-          <a:lstStyle/>
-          <a:p>
-            <a:r>
-              <a:t>Click into IRMDemoSG3. Point out the recovery plan section.</a:t>
-            </a:r>
-          </a:p>
-          <a:p>
-            <a:r>
-              <a:t>Highlight that ASR + recovery plan = zone-resilient status for VMs.</a:t>
-            </a:r>
-          </a:p>
-          <a:p>
-            <a:r>
-              <a:t>"Without the orchestrated plan, even ASR-protected VMs would be flagged." </a:t>
-            </a:r>
-          </a:p>
-        </p:txBody>
-      </p:sp>
-      <p:sp>
-        <p:nvSpPr>
-          <p:cNvPr id="4" name="Slide Number Placeholder 3"/>
-          <p:cNvSpPr>
-            <a:spLocks noGrp="1"/>
-          </p:cNvSpPr>
-          <p:nvPr>
-            <p:ph type="sldNum" idx="5" sz="quarter"/>
+            <p:ph type="sldNum" sz="quarter" idx="5"/>
           </p:nvPr>
         </p:nvSpPr>
         <p:spPr/>
@@ -724,7 +520,7 @@
 </file>
 
 <file path=ppt/notesSlides/notesSlide12.xml><?xml version="1.0" encoding="utf-8"?>
-<p:notes xmlns:a="http://schemas.openxmlformats.org/drawingml/2006/main" xmlns:p="http://schemas.openxmlformats.org/presentationml/2006/main" xmlns:r="http://schemas.openxmlformats.org/officeDocument/2006/relationships">
+<p:notes xmlns:a="http://schemas.openxmlformats.org/drawingml/2006/main" xmlns:r="http://schemas.openxmlformats.org/officeDocument/2006/relationships" xmlns:p="http://schemas.openxmlformats.org/presentationml/2006/main">
   <p:cSld>
     <p:spTree>
       <p:nvGrpSpPr>
@@ -744,48 +540,48 @@
         <p:nvSpPr>
           <p:cNvPr id="2" name="Slide Image Placeholder 1"/>
           <p:cNvSpPr>
+            <a:spLocks noGrp="1" noRot="1" noChangeAspect="1"/>
+          </p:cNvSpPr>
+          <p:nvPr>
+            <p:ph type="sldImg" idx="2"/>
+          </p:nvPr>
+        </p:nvSpPr>
+        <p:spPr/>
+      </p:sp>
+      <p:sp>
+        <p:nvSpPr>
+          <p:cNvPr id="3" name="Notes Placeholder 2"/>
+          <p:cNvSpPr>
             <a:spLocks noGrp="1"/>
           </p:cNvSpPr>
           <p:nvPr>
-            <p:ph type="sldImg" idx="2"/>
-          </p:nvPr>
-        </p:nvSpPr>
-        <p:spPr/>
-      </p:sp>
-      <p:sp>
-        <p:nvSpPr>
-          <p:cNvPr id="3" name="Notes Placeholder 2"/>
+            <p:ph type="body" sz="quarter" idx="3"/>
+          </p:nvPr>
+        </p:nvSpPr>
+        <p:spPr/>
+        <p:txBody>
+          <a:bodyPr/>
+          <a:lstStyle/>
+          <a:p>
+            <a:r>
+              <a:t>Pause slide — let the value proposition sink in.</a:t>
+            </a:r>
+          </a:p>
+          <a:p>
+            <a:r>
+              <a:t>Transition: "Now let's look at how we actually fix these gaps." </a:t>
+            </a:r>
+          </a:p>
+        </p:txBody>
+      </p:sp>
+      <p:sp>
+        <p:nvSpPr>
+          <p:cNvPr id="4" name="Slide Number Placeholder 3"/>
           <p:cNvSpPr>
             <a:spLocks noGrp="1"/>
           </p:cNvSpPr>
           <p:nvPr>
-            <p:ph type="body" idx="3" sz="quarter"/>
-          </p:nvPr>
-        </p:nvSpPr>
-        <p:spPr/>
-        <p:txBody>
-          <a:bodyPr/>
-          <a:lstStyle/>
-          <a:p>
-            <a:r>
-              <a:t>Pause slide — let the value proposition sink in.</a:t>
-            </a:r>
-          </a:p>
-          <a:p>
-            <a:r>
-              <a:t>Transition: "Now let's look at how we actually fix these gaps." </a:t>
-            </a:r>
-          </a:p>
-        </p:txBody>
-      </p:sp>
-      <p:sp>
-        <p:nvSpPr>
-          <p:cNvPr id="4" name="Slide Number Placeholder 3"/>
-          <p:cNvSpPr>
-            <a:spLocks noGrp="1"/>
-          </p:cNvSpPr>
-          <p:nvPr>
-            <p:ph type="sldNum" idx="5" sz="quarter"/>
+            <p:ph type="sldNum" sz="quarter" idx="5"/>
           </p:nvPr>
         </p:nvSpPr>
         <p:spPr/>
@@ -799,7 +595,7 @@
 </file>
 
 <file path=ppt/notesSlides/notesSlide13.xml><?xml version="1.0" encoding="utf-8"?>
-<p:notes xmlns:a="http://schemas.openxmlformats.org/drawingml/2006/main" xmlns:p="http://schemas.openxmlformats.org/presentationml/2006/main" xmlns:r="http://schemas.openxmlformats.org/officeDocument/2006/relationships">
+<p:notes xmlns:a="http://schemas.openxmlformats.org/drawingml/2006/main" xmlns:r="http://schemas.openxmlformats.org/officeDocument/2006/relationships" xmlns:p="http://schemas.openxmlformats.org/presentationml/2006/main">
   <p:cSld>
     <p:spTree>
       <p:nvGrpSpPr>
@@ -819,48 +615,48 @@
         <p:nvSpPr>
           <p:cNvPr id="2" name="Slide Image Placeholder 1"/>
           <p:cNvSpPr>
+            <a:spLocks noGrp="1" noRot="1" noChangeAspect="1"/>
+          </p:cNvSpPr>
+          <p:nvPr>
+            <p:ph type="sldImg" idx="2"/>
+          </p:nvPr>
+        </p:nvSpPr>
+        <p:spPr/>
+      </p:sp>
+      <p:sp>
+        <p:nvSpPr>
+          <p:cNvPr id="3" name="Notes Placeholder 2"/>
+          <p:cNvSpPr>
             <a:spLocks noGrp="1"/>
           </p:cNvSpPr>
           <p:nvPr>
-            <p:ph type="sldImg" idx="2"/>
-          </p:nvPr>
-        </p:nvSpPr>
-        <p:spPr/>
-      </p:sp>
-      <p:sp>
-        <p:nvSpPr>
-          <p:cNvPr id="3" name="Notes Placeholder 2"/>
+            <p:ph type="body" sz="quarter" idx="3"/>
+          </p:nvPr>
+        </p:nvSpPr>
+        <p:spPr/>
+        <p:txBody>
+          <a:bodyPr/>
+          <a:lstStyle/>
+          <a:p>
+            <a:r>
+              <a:t>Transition: "IRM told us what's wrong. Now let's fix it."</a:t>
+            </a:r>
+          </a:p>
+          <a:p>
+            <a:r>
+              <a:t>Stay in portal for this section — you'll demo the Copilot Resolve feature.</a:t>
+            </a:r>
+          </a:p>
+        </p:txBody>
+      </p:sp>
+      <p:sp>
+        <p:nvSpPr>
+          <p:cNvPr id="4" name="Slide Number Placeholder 3"/>
           <p:cNvSpPr>
             <a:spLocks noGrp="1"/>
           </p:cNvSpPr>
           <p:nvPr>
-            <p:ph type="body" idx="3" sz="quarter"/>
-          </p:nvPr>
-        </p:nvSpPr>
-        <p:spPr/>
-        <p:txBody>
-          <a:bodyPr/>
-          <a:lstStyle/>
-          <a:p>
-            <a:r>
-              <a:t>Transition: "IRM told us what's wrong. Now let's fix it."</a:t>
-            </a:r>
-          </a:p>
-          <a:p>
-            <a:r>
-              <a:t>Stay in portal for this section — you'll demo the Copilot Resolve feature.</a:t>
-            </a:r>
-          </a:p>
-        </p:txBody>
-      </p:sp>
-      <p:sp>
-        <p:nvSpPr>
-          <p:cNvPr id="4" name="Slide Number Placeholder 3"/>
-          <p:cNvSpPr>
-            <a:spLocks noGrp="1"/>
-          </p:cNvSpPr>
-          <p:nvPr>
-            <p:ph type="sldNum" idx="5" sz="quarter"/>
+            <p:ph type="sldNum" sz="quarter" idx="5"/>
           </p:nvPr>
         </p:nvSpPr>
         <p:spPr/>
@@ -874,7 +670,7 @@
 </file>
 
 <file path=ppt/notesSlides/notesSlide14.xml><?xml version="1.0" encoding="utf-8"?>
-<p:notes xmlns:a="http://schemas.openxmlformats.org/drawingml/2006/main" xmlns:p="http://schemas.openxmlformats.org/presentationml/2006/main" xmlns:r="http://schemas.openxmlformats.org/officeDocument/2006/relationships">
+<p:notes xmlns:a="http://schemas.openxmlformats.org/drawingml/2006/main" xmlns:r="http://schemas.openxmlformats.org/officeDocument/2006/relationships" xmlns:p="http://schemas.openxmlformats.org/presentationml/2006/main">
   <p:cSld>
     <p:spTree>
       <p:nvGrpSpPr>
@@ -894,48 +690,48 @@
         <p:nvSpPr>
           <p:cNvPr id="2" name="Slide Image Placeholder 1"/>
           <p:cNvSpPr>
+            <a:spLocks noGrp="1" noRot="1" noChangeAspect="1"/>
+          </p:cNvSpPr>
+          <p:nvPr>
+            <p:ph type="sldImg" idx="2"/>
+          </p:nvPr>
+        </p:nvSpPr>
+        <p:spPr/>
+      </p:sp>
+      <p:sp>
+        <p:nvSpPr>
+          <p:cNvPr id="3" name="Notes Placeholder 2"/>
+          <p:cNvSpPr>
             <a:spLocks noGrp="1"/>
           </p:cNvSpPr>
           <p:nvPr>
-            <p:ph type="sldImg" idx="2"/>
-          </p:nvPr>
-        </p:nvSpPr>
-        <p:spPr/>
-      </p:sp>
-      <p:sp>
-        <p:nvSpPr>
-          <p:cNvPr id="3" name="Notes Placeholder 2"/>
+            <p:ph type="body" sz="quarter" idx="3"/>
+          </p:nvPr>
+        </p:nvSpPr>
+        <p:spPr/>
+        <p:txBody>
+          <a:bodyPr/>
+          <a:lstStyle/>
+          <a:p>
+            <a:r>
+              <a:t>Show the recommendations list in the portal.</a:t>
+            </a:r>
+          </a:p>
+          <a:p>
+            <a:r>
+              <a:t>Click on one to expand details. Then proceed to demo Copilot Resolve.</a:t>
+            </a:r>
+          </a:p>
+        </p:txBody>
+      </p:sp>
+      <p:sp>
+        <p:nvSpPr>
+          <p:cNvPr id="4" name="Slide Number Placeholder 3"/>
           <p:cNvSpPr>
             <a:spLocks noGrp="1"/>
           </p:cNvSpPr>
           <p:nvPr>
-            <p:ph type="body" idx="3" sz="quarter"/>
-          </p:nvPr>
-        </p:nvSpPr>
-        <p:spPr/>
-        <p:txBody>
-          <a:bodyPr/>
-          <a:lstStyle/>
-          <a:p>
-            <a:r>
-              <a:t>Show the recommendations list in the portal.</a:t>
-            </a:r>
-          </a:p>
-          <a:p>
-            <a:r>
-              <a:t>Click on one to expand details. Then proceed to demo Copilot Resolve.</a:t>
-            </a:r>
-          </a:p>
-        </p:txBody>
-      </p:sp>
-      <p:sp>
-        <p:nvSpPr>
-          <p:cNvPr id="4" name="Slide Number Placeholder 3"/>
-          <p:cNvSpPr>
-            <a:spLocks noGrp="1"/>
-          </p:cNvSpPr>
-          <p:nvPr>
-            <p:ph type="sldNum" idx="5" sz="quarter"/>
+            <p:ph type="sldNum" sz="quarter" idx="5"/>
           </p:nvPr>
         </p:nvSpPr>
         <p:spPr/>
@@ -949,7 +745,7 @@
 </file>
 
 <file path=ppt/notesSlides/notesSlide15.xml><?xml version="1.0" encoding="utf-8"?>
-<p:notes xmlns:a="http://schemas.openxmlformats.org/drawingml/2006/main" xmlns:p="http://schemas.openxmlformats.org/presentationml/2006/main" xmlns:r="http://schemas.openxmlformats.org/officeDocument/2006/relationships">
+<p:notes xmlns:a="http://schemas.openxmlformats.org/drawingml/2006/main" xmlns:r="http://schemas.openxmlformats.org/officeDocument/2006/relationships" xmlns:p="http://schemas.openxmlformats.org/presentationml/2006/main">
   <p:cSld>
     <p:spTree>
       <p:nvGrpSpPr>
@@ -969,58 +765,58 @@
         <p:nvSpPr>
           <p:cNvPr id="2" name="Slide Image Placeholder 1"/>
           <p:cNvSpPr>
+            <a:spLocks noGrp="1" noRot="1" noChangeAspect="1"/>
+          </p:cNvSpPr>
+          <p:nvPr>
+            <p:ph type="sldImg" idx="2"/>
+          </p:nvPr>
+        </p:nvSpPr>
+        <p:spPr/>
+      </p:sp>
+      <p:sp>
+        <p:nvSpPr>
+          <p:cNvPr id="3" name="Notes Placeholder 2"/>
+          <p:cNvSpPr>
             <a:spLocks noGrp="1"/>
           </p:cNvSpPr>
           <p:nvPr>
-            <p:ph type="sldImg" idx="2"/>
-          </p:nvPr>
-        </p:nvSpPr>
-        <p:spPr/>
-      </p:sp>
-      <p:sp>
-        <p:nvSpPr>
-          <p:cNvPr id="3" name="Notes Placeholder 2"/>
+            <p:ph type="body" sz="quarter" idx="3"/>
+          </p:nvPr>
+        </p:nvSpPr>
+        <p:spPr/>
+        <p:txBody>
+          <a:bodyPr/>
+          <a:lstStyle/>
+          <a:p>
+            <a:r>
+              <a:t>Click Resolve on the SQL Database recommendation.</a:t>
+            </a:r>
+          </a:p>
+          <a:p>
+            <a:r>
+              <a:t>Walk through the Copilot response — show the categorization.</a:t>
+            </a:r>
+          </a:p>
+          <a:p>
+            <a:r>
+              <a:t>If time allows, prompt: "Generate a Bicep template with zone redundancy enabled for this SQL database."</a:t>
+            </a:r>
+          </a:p>
+          <a:p>
+            <a:r>
+              <a:t>Show the IaC output.</a:t>
+            </a:r>
+          </a:p>
+        </p:txBody>
+      </p:sp>
+      <p:sp>
+        <p:nvSpPr>
+          <p:cNvPr id="4" name="Slide Number Placeholder 3"/>
           <p:cNvSpPr>
             <a:spLocks noGrp="1"/>
           </p:cNvSpPr>
           <p:nvPr>
-            <p:ph type="body" idx="3" sz="quarter"/>
-          </p:nvPr>
-        </p:nvSpPr>
-        <p:spPr/>
-        <p:txBody>
-          <a:bodyPr/>
-          <a:lstStyle/>
-          <a:p>
-            <a:r>
-              <a:t>Click Resolve on the SQL Database recommendation.</a:t>
-            </a:r>
-          </a:p>
-          <a:p>
-            <a:r>
-              <a:t>Walk through the Copilot response — show the categorization.</a:t>
-            </a:r>
-          </a:p>
-          <a:p>
-            <a:r>
-              <a:t>If time allows, prompt: "Generate a Bicep template with zone redundancy enabled for this SQL database."</a:t>
-            </a:r>
-          </a:p>
-          <a:p>
-            <a:r>
-              <a:t>Show the IaC output.</a:t>
-            </a:r>
-          </a:p>
-        </p:txBody>
-      </p:sp>
-      <p:sp>
-        <p:nvSpPr>
-          <p:cNvPr id="4" name="Slide Number Placeholder 3"/>
-          <p:cNvSpPr>
-            <a:spLocks noGrp="1"/>
-          </p:cNvSpPr>
-          <p:nvPr>
-            <p:ph type="sldNum" idx="5" sz="quarter"/>
+            <p:ph type="sldNum" sz="quarter" idx="5"/>
           </p:nvPr>
         </p:nvSpPr>
         <p:spPr/>
@@ -1034,7 +830,7 @@
 </file>
 
 <file path=ppt/notesSlides/notesSlide16.xml><?xml version="1.0" encoding="utf-8"?>
-<p:notes xmlns:a="http://schemas.openxmlformats.org/drawingml/2006/main" xmlns:p="http://schemas.openxmlformats.org/presentationml/2006/main" xmlns:r="http://schemas.openxmlformats.org/officeDocument/2006/relationships">
+<p:notes xmlns:a="http://schemas.openxmlformats.org/drawingml/2006/main" xmlns:r="http://schemas.openxmlformats.org/officeDocument/2006/relationships" xmlns:p="http://schemas.openxmlformats.org/presentationml/2006/main">
   <p:cSld>
     <p:spTree>
       <p:nvGrpSpPr>
@@ -1054,48 +850,48 @@
         <p:nvSpPr>
           <p:cNvPr id="2" name="Slide Image Placeholder 1"/>
           <p:cNvSpPr>
+            <a:spLocks noGrp="1" noRot="1" noChangeAspect="1"/>
+          </p:cNvSpPr>
+          <p:nvPr>
+            <p:ph type="sldImg" idx="2"/>
+          </p:nvPr>
+        </p:nvSpPr>
+        <p:spPr/>
+      </p:sp>
+      <p:sp>
+        <p:nvSpPr>
+          <p:cNvPr id="3" name="Notes Placeholder 2"/>
+          <p:cNvSpPr>
             <a:spLocks noGrp="1"/>
           </p:cNvSpPr>
           <p:nvPr>
-            <p:ph type="sldImg" idx="2"/>
-          </p:nvPr>
-        </p:nvSpPr>
-        <p:spPr/>
-      </p:sp>
-      <p:sp>
-        <p:nvSpPr>
-          <p:cNvPr id="3" name="Notes Placeholder 2"/>
+            <p:ph type="body" sz="quarter" idx="3"/>
+          </p:nvPr>
+        </p:nvSpPr>
+        <p:spPr/>
+        <p:txBody>
+          <a:bodyPr/>
+          <a:lstStyle/>
+          <a:p>
+            <a:r>
+              <a:t>Pause — let value land.</a:t>
+            </a:r>
+          </a:p>
+          <a:p>
+            <a:r>
+              <a:t>Transition: "Assessment done. Remediation planned. But how do we PROVE it works?" </a:t>
+            </a:r>
+          </a:p>
+        </p:txBody>
+      </p:sp>
+      <p:sp>
+        <p:nvSpPr>
+          <p:cNvPr id="4" name="Slide Number Placeholder 3"/>
           <p:cNvSpPr>
             <a:spLocks noGrp="1"/>
           </p:cNvSpPr>
           <p:nvPr>
-            <p:ph type="body" idx="3" sz="quarter"/>
-          </p:nvPr>
-        </p:nvSpPr>
-        <p:spPr/>
-        <p:txBody>
-          <a:bodyPr/>
-          <a:lstStyle/>
-          <a:p>
-            <a:r>
-              <a:t>Pause — let value land.</a:t>
-            </a:r>
-          </a:p>
-          <a:p>
-            <a:r>
-              <a:t>Transition: "Assessment done. Remediation planned. But how do we PROVE it works?" </a:t>
-            </a:r>
-          </a:p>
-        </p:txBody>
-      </p:sp>
-      <p:sp>
-        <p:nvSpPr>
-          <p:cNvPr id="4" name="Slide Number Placeholder 3"/>
-          <p:cNvSpPr>
-            <a:spLocks noGrp="1"/>
-          </p:cNvSpPr>
-          <p:nvPr>
-            <p:ph type="sldNum" idx="5" sz="quarter"/>
+            <p:ph type="sldNum" sz="quarter" idx="5"/>
           </p:nvPr>
         </p:nvSpPr>
         <p:spPr/>
@@ -1109,7 +905,7 @@
 </file>
 
 <file path=ppt/notesSlides/notesSlide17.xml><?xml version="1.0" encoding="utf-8"?>
-<p:notes xmlns:a="http://schemas.openxmlformats.org/drawingml/2006/main" xmlns:p="http://schemas.openxmlformats.org/presentationml/2006/main" xmlns:r="http://schemas.openxmlformats.org/officeDocument/2006/relationships">
+<p:notes xmlns:a="http://schemas.openxmlformats.org/drawingml/2006/main" xmlns:r="http://schemas.openxmlformats.org/officeDocument/2006/relationships" xmlns:p="http://schemas.openxmlformats.org/presentationml/2006/main">
   <p:cSld>
     <p:spTree>
       <p:nvGrpSpPr>
@@ -1129,54 +925,56 @@
         <p:nvSpPr>
           <p:cNvPr id="2" name="Slide Image Placeholder 1"/>
           <p:cNvSpPr>
+            <a:spLocks noGrp="1" noRot="1" noChangeAspect="1"/>
+          </p:cNvSpPr>
+          <p:nvPr>
+            <p:ph type="sldImg" idx="2"/>
+          </p:nvPr>
+        </p:nvSpPr>
+        <p:spPr/>
+      </p:sp>
+      <p:sp>
+        <p:nvSpPr>
+          <p:cNvPr id="3" name="Notes Placeholder 2"/>
+          <p:cNvSpPr>
             <a:spLocks noGrp="1"/>
           </p:cNvSpPr>
           <p:nvPr>
-            <p:ph type="sldImg" idx="2"/>
-          </p:nvPr>
-        </p:nvSpPr>
-        <p:spPr/>
-      </p:sp>
-      <p:sp>
-        <p:nvSpPr>
-          <p:cNvPr id="3" name="Notes Placeholder 2"/>
+            <p:ph type="body" sz="quarter" idx="3"/>
+          </p:nvPr>
+        </p:nvSpPr>
+        <p:spPr/>
+        <p:txBody>
+          <a:bodyPr/>
+          <a:lstStyle/>
+          <a:p>
+            <a:r>
+              <a:t>Transition: "This is the most impactful part of the demo.</a:t>
+            </a:r>
+          </a:p>
+          <a:p>
+            <a:r>
+              <a:t>We're going to simulate an actual zone failure and prove our apps survive."</a:t>
+            </a:r>
+          </a:p>
+          <a:p>
+            <a:endParaRPr/>
+          </a:p>
+          <a:p>
+            <a:r>
+              <a:t>Build anticipation — this is the 'wow' moment.</a:t>
+            </a:r>
+          </a:p>
+        </p:txBody>
+      </p:sp>
+      <p:sp>
+        <p:nvSpPr>
+          <p:cNvPr id="4" name="Slide Number Placeholder 3"/>
           <p:cNvSpPr>
             <a:spLocks noGrp="1"/>
           </p:cNvSpPr>
           <p:nvPr>
-            <p:ph type="body" idx="3" sz="quarter"/>
-          </p:nvPr>
-        </p:nvSpPr>
-        <p:spPr/>
-        <p:txBody>
-          <a:bodyPr/>
-          <a:lstStyle/>
-          <a:p>
-            <a:r>
-              <a:t>Transition: "This is the most impactful part of the demo.</a:t>
-            </a:r>
-          </a:p>
-          <a:p>
-            <a:r>
-              <a:t>We're going to simulate an actual zone failure and prove our apps survive."</a:t>
-            </a:r>
-          </a:p>
-          <a:p/>
-          <a:p>
-            <a:r>
-              <a:t>Build anticipation — this is the 'wow' moment.</a:t>
-            </a:r>
-          </a:p>
-        </p:txBody>
-      </p:sp>
-      <p:sp>
-        <p:nvSpPr>
-          <p:cNvPr id="4" name="Slide Number Placeholder 3"/>
-          <p:cNvSpPr>
-            <a:spLocks noGrp="1"/>
-          </p:cNvSpPr>
-          <p:nvPr>
-            <p:ph type="sldNum" idx="5" sz="quarter"/>
+            <p:ph type="sldNum" sz="quarter" idx="5"/>
           </p:nvPr>
         </p:nvSpPr>
         <p:spPr/>
@@ -1190,7 +988,7 @@
 </file>
 
 <file path=ppt/notesSlides/notesSlide18.xml><?xml version="1.0" encoding="utf-8"?>
-<p:notes xmlns:a="http://schemas.openxmlformats.org/drawingml/2006/main" xmlns:p="http://schemas.openxmlformats.org/presentationml/2006/main" xmlns:r="http://schemas.openxmlformats.org/officeDocument/2006/relationships">
+<p:notes xmlns:a="http://schemas.openxmlformats.org/drawingml/2006/main" xmlns:r="http://schemas.openxmlformats.org/officeDocument/2006/relationships" xmlns:p="http://schemas.openxmlformats.org/presentationml/2006/main">
   <p:cSld>
     <p:spTree>
       <p:nvGrpSpPr>
@@ -1210,53 +1008,53 @@
         <p:nvSpPr>
           <p:cNvPr id="2" name="Slide Image Placeholder 1"/>
           <p:cNvSpPr>
+            <a:spLocks noGrp="1" noRot="1" noChangeAspect="1"/>
+          </p:cNvSpPr>
+          <p:nvPr>
+            <p:ph type="sldImg" idx="2"/>
+          </p:nvPr>
+        </p:nvSpPr>
+        <p:spPr/>
+      </p:sp>
+      <p:sp>
+        <p:nvSpPr>
+          <p:cNvPr id="3" name="Notes Placeholder 2"/>
+          <p:cNvSpPr>
             <a:spLocks noGrp="1"/>
           </p:cNvSpPr>
           <p:nvPr>
-            <p:ph type="sldImg" idx="2"/>
-          </p:nvPr>
-        </p:nvSpPr>
-        <p:spPr/>
-      </p:sp>
-      <p:sp>
-        <p:nvSpPr>
-          <p:cNvPr id="3" name="Notes Placeholder 2"/>
+            <p:ph type="body" sz="quarter" idx="3"/>
+          </p:nvPr>
+        </p:nvSpPr>
+        <p:spPr/>
+        <p:txBody>
+          <a:bodyPr/>
+          <a:lstStyle/>
+          <a:p>
+            <a:r>
+              <a:t>Navigate to IRMDemoSG2 drills. Show the fault designer.</a:t>
+            </a:r>
+          </a:p>
+          <a:p>
+            <a:r>
+              <a:t>Point out which resources are in scope and which are excluded.</a:t>
+            </a:r>
+          </a:p>
+          <a:p>
+            <a:r>
+              <a:t>Explain the philosophy: validate what should work, exclude known gaps.</a:t>
+            </a:r>
+          </a:p>
+        </p:txBody>
+      </p:sp>
+      <p:sp>
+        <p:nvSpPr>
+          <p:cNvPr id="4" name="Slide Number Placeholder 3"/>
           <p:cNvSpPr>
             <a:spLocks noGrp="1"/>
           </p:cNvSpPr>
           <p:nvPr>
-            <p:ph type="body" idx="3" sz="quarter"/>
-          </p:nvPr>
-        </p:nvSpPr>
-        <p:spPr/>
-        <p:txBody>
-          <a:bodyPr/>
-          <a:lstStyle/>
-          <a:p>
-            <a:r>
-              <a:t>Navigate to IRMDemoSG2 drills. Show the fault designer.</a:t>
-            </a:r>
-          </a:p>
-          <a:p>
-            <a:r>
-              <a:t>Point out which resources are in scope and which are excluded.</a:t>
-            </a:r>
-          </a:p>
-          <a:p>
-            <a:r>
-              <a:t>Explain the philosophy: validate what should work, exclude known gaps.</a:t>
-            </a:r>
-          </a:p>
-        </p:txBody>
-      </p:sp>
-      <p:sp>
-        <p:nvSpPr>
-          <p:cNvPr id="4" name="Slide Number Placeholder 3"/>
-          <p:cNvSpPr>
-            <a:spLocks noGrp="1"/>
-          </p:cNvSpPr>
-          <p:nvPr>
-            <p:ph type="sldNum" idx="5" sz="quarter"/>
+            <p:ph type="sldNum" sz="quarter" idx="5"/>
           </p:nvPr>
         </p:nvSpPr>
         <p:spPr/>
@@ -1270,7 +1068,7 @@
 </file>
 
 <file path=ppt/notesSlides/notesSlide19.xml><?xml version="1.0" encoding="utf-8"?>
-<p:notes xmlns:a="http://schemas.openxmlformats.org/drawingml/2006/main" xmlns:p="http://schemas.openxmlformats.org/presentationml/2006/main" xmlns:r="http://schemas.openxmlformats.org/officeDocument/2006/relationships">
+<p:notes xmlns:a="http://schemas.openxmlformats.org/drawingml/2006/main" xmlns:r="http://schemas.openxmlformats.org/officeDocument/2006/relationships" xmlns:p="http://schemas.openxmlformats.org/presentationml/2006/main">
   <p:cSld>
     <p:spTree>
       <p:nvGrpSpPr>
@@ -1290,58 +1088,58 @@
         <p:nvSpPr>
           <p:cNvPr id="2" name="Slide Image Placeholder 1"/>
           <p:cNvSpPr>
+            <a:spLocks noGrp="1" noRot="1" noChangeAspect="1"/>
+          </p:cNvSpPr>
+          <p:nvPr>
+            <p:ph type="sldImg" idx="2"/>
+          </p:nvPr>
+        </p:nvSpPr>
+        <p:spPr/>
+      </p:sp>
+      <p:sp>
+        <p:nvSpPr>
+          <p:cNvPr id="3" name="Notes Placeholder 2"/>
+          <p:cNvSpPr>
             <a:spLocks noGrp="1"/>
           </p:cNvSpPr>
           <p:nvPr>
-            <p:ph type="sldImg" idx="2"/>
-          </p:nvPr>
-        </p:nvSpPr>
-        <p:spPr/>
-      </p:sp>
-      <p:sp>
-        <p:nvSpPr>
-          <p:cNvPr id="3" name="Notes Placeholder 2"/>
+            <p:ph type="body" sz="quarter" idx="3"/>
+          </p:nvPr>
+        </p:nvSpPr>
+        <p:spPr/>
+        <p:txBody>
+          <a:bodyPr/>
+          <a:lstStyle/>
+          <a:p>
+            <a:r>
+              <a:t>Execute the drill in portal (or show a pre-recorded execution if time-constrained).</a:t>
+            </a:r>
+          </a:p>
+          <a:p>
+            <a:r>
+              <a:t>Switch to browser — refresh the app to show it's still serving.</a:t>
+            </a:r>
+          </a:p>
+          <a:p>
+            <a:r>
+              <a:t>"The app stayed up because AKS has nodes in other zones. The LB handled rerouting automatically."</a:t>
+            </a:r>
+          </a:p>
+          <a:p>
+            <a:r>
+              <a:t>Back to portal to show drill metrics/results.</a:t>
+            </a:r>
+          </a:p>
+        </p:txBody>
+      </p:sp>
+      <p:sp>
+        <p:nvSpPr>
+          <p:cNvPr id="4" name="Slide Number Placeholder 3"/>
           <p:cNvSpPr>
             <a:spLocks noGrp="1"/>
           </p:cNvSpPr>
           <p:nvPr>
-            <p:ph type="body" idx="3" sz="quarter"/>
-          </p:nvPr>
-        </p:nvSpPr>
-        <p:spPr/>
-        <p:txBody>
-          <a:bodyPr/>
-          <a:lstStyle/>
-          <a:p>
-            <a:r>
-              <a:t>Execute the drill in portal (or show a pre-recorded execution if time-constrained).</a:t>
-            </a:r>
-          </a:p>
-          <a:p>
-            <a:r>
-              <a:t>Switch to browser — refresh the app to show it's still serving.</a:t>
-            </a:r>
-          </a:p>
-          <a:p>
-            <a:r>
-              <a:t>"The app stayed up because AKS has nodes in other zones. The LB handled rerouting automatically."</a:t>
-            </a:r>
-          </a:p>
-          <a:p>
-            <a:r>
-              <a:t>Back to portal to show drill metrics/results.</a:t>
-            </a:r>
-          </a:p>
-        </p:txBody>
-      </p:sp>
-      <p:sp>
-        <p:nvSpPr>
-          <p:cNvPr id="4" name="Slide Number Placeholder 3"/>
-          <p:cNvSpPr>
-            <a:spLocks noGrp="1"/>
-          </p:cNvSpPr>
-          <p:nvPr>
-            <p:ph type="sldNum" idx="5" sz="quarter"/>
+            <p:ph type="sldNum" sz="quarter" idx="5"/>
           </p:nvPr>
         </p:nvSpPr>
         <p:spPr/>
@@ -1355,7 +1153,7 @@
 </file>
 
 <file path=ppt/notesSlides/notesSlide2.xml><?xml version="1.0" encoding="utf-8"?>
-<p:notes xmlns:a="http://schemas.openxmlformats.org/drawingml/2006/main" xmlns:p="http://schemas.openxmlformats.org/presentationml/2006/main" xmlns:r="http://schemas.openxmlformats.org/officeDocument/2006/relationships">
+<p:notes xmlns:a="http://schemas.openxmlformats.org/drawingml/2006/main" xmlns:r="http://schemas.openxmlformats.org/officeDocument/2006/relationships" xmlns:p="http://schemas.openxmlformats.org/presentationml/2006/main">
   <p:cSld>
     <p:spTree>
       <p:nvGrpSpPr>
@@ -1375,49 +1173,51 @@
         <p:nvSpPr>
           <p:cNvPr id="2" name="Slide Image Placeholder 1"/>
           <p:cNvSpPr>
+            <a:spLocks noGrp="1" noRot="1" noChangeAspect="1"/>
+          </p:cNvSpPr>
+          <p:nvPr>
+            <p:ph type="sldImg" idx="2"/>
+          </p:nvPr>
+        </p:nvSpPr>
+        <p:spPr/>
+      </p:sp>
+      <p:sp>
+        <p:nvSpPr>
+          <p:cNvPr id="3" name="Notes Placeholder 2"/>
+          <p:cNvSpPr>
             <a:spLocks noGrp="1"/>
           </p:cNvSpPr>
           <p:nvPr>
-            <p:ph type="sldImg" idx="2"/>
-          </p:nvPr>
-        </p:nvSpPr>
-        <p:spPr/>
-      </p:sp>
-      <p:sp>
-        <p:nvSpPr>
-          <p:cNvPr id="3" name="Notes Placeholder 2"/>
+            <p:ph type="body" sz="quarter" idx="3"/>
+          </p:nvPr>
+        </p:nvSpPr>
+        <p:spPr/>
+        <p:txBody>
+          <a:bodyPr/>
+          <a:lstStyle/>
+          <a:p>
+            <a:r>
+              <a:t>Agenda overview. Keep this brief — 30 seconds max.</a:t>
+            </a:r>
+          </a:p>
+          <a:p>
+            <a:r>
+              <a:t>- "Four acts, each building on the last. We start by understanding the apps, then assess them, fix gaps, and finally prove it all works with live drills."</a:t>
+            </a:r>
+          </a:p>
+          <a:p>
+            <a:endParaRPr/>
+          </a:p>
+        </p:txBody>
+      </p:sp>
+      <p:sp>
+        <p:nvSpPr>
+          <p:cNvPr id="4" name="Slide Number Placeholder 3"/>
           <p:cNvSpPr>
             <a:spLocks noGrp="1"/>
           </p:cNvSpPr>
           <p:nvPr>
-            <p:ph type="body" idx="3" sz="quarter"/>
-          </p:nvPr>
-        </p:nvSpPr>
-        <p:spPr/>
-        <p:txBody>
-          <a:bodyPr/>
-          <a:lstStyle/>
-          <a:p>
-            <a:r>
-              <a:t>Agenda overview. Keep this brief — 30 seconds max.</a:t>
-            </a:r>
-          </a:p>
-          <a:p>
-            <a:r>
-              <a:t>- "Four acts, each building on the last. We start by understanding the apps, then assess them, fix gaps, and finally prove it all works with live drills."</a:t>
-            </a:r>
-          </a:p>
-          <a:p/>
-        </p:txBody>
-      </p:sp>
-      <p:sp>
-        <p:nvSpPr>
-          <p:cNvPr id="4" name="Slide Number Placeholder 3"/>
-          <p:cNvSpPr>
-            <a:spLocks noGrp="1"/>
-          </p:cNvSpPr>
-          <p:nvPr>
-            <p:ph type="sldNum" idx="5" sz="quarter"/>
+            <p:ph type="sldNum" sz="quarter" idx="5"/>
           </p:nvPr>
         </p:nvSpPr>
         <p:spPr/>
@@ -1431,7 +1231,7 @@
 </file>
 
 <file path=ppt/notesSlides/notesSlide20.xml><?xml version="1.0" encoding="utf-8"?>
-<p:notes xmlns:a="http://schemas.openxmlformats.org/drawingml/2006/main" xmlns:p="http://schemas.openxmlformats.org/presentationml/2006/main" xmlns:r="http://schemas.openxmlformats.org/officeDocument/2006/relationships">
+<p:notes xmlns:a="http://schemas.openxmlformats.org/drawingml/2006/main" xmlns:r="http://schemas.openxmlformats.org/officeDocument/2006/relationships" xmlns:p="http://schemas.openxmlformats.org/presentationml/2006/main">
   <p:cSld>
     <p:spTree>
       <p:nvGrpSpPr>
@@ -1451,48 +1251,48 @@
         <p:nvSpPr>
           <p:cNvPr id="2" name="Slide Image Placeholder 1"/>
           <p:cNvSpPr>
+            <a:spLocks noGrp="1" noRot="1" noChangeAspect="1"/>
+          </p:cNvSpPr>
+          <p:nvPr>
+            <p:ph type="sldImg" idx="2"/>
+          </p:nvPr>
+        </p:nvSpPr>
+        <p:spPr/>
+      </p:sp>
+      <p:sp>
+        <p:nvSpPr>
+          <p:cNvPr id="3" name="Notes Placeholder 2"/>
+          <p:cNvSpPr>
             <a:spLocks noGrp="1"/>
           </p:cNvSpPr>
           <p:nvPr>
-            <p:ph type="sldImg" idx="2"/>
-          </p:nvPr>
-        </p:nvSpPr>
-        <p:spPr/>
-      </p:sp>
-      <p:sp>
-        <p:nvSpPr>
-          <p:cNvPr id="3" name="Notes Placeholder 2"/>
+            <p:ph type="body" sz="quarter" idx="3"/>
+          </p:nvPr>
+        </p:nvSpPr>
+        <p:spPr/>
+        <p:txBody>
+          <a:bodyPr/>
+          <a:lstStyle/>
+          <a:p>
+            <a:r>
+              <a:t>Pause. Then transition:</a:t>
+            </a:r>
+          </a:p>
+          <a:p>
+            <a:r>
+              <a:t>"Now let's look at the VM scenario — this is more dramatic because the app actually goes DOWN." </a:t>
+            </a:r>
+          </a:p>
+        </p:txBody>
+      </p:sp>
+      <p:sp>
+        <p:nvSpPr>
+          <p:cNvPr id="4" name="Slide Number Placeholder 3"/>
           <p:cNvSpPr>
             <a:spLocks noGrp="1"/>
           </p:cNvSpPr>
           <p:nvPr>
-            <p:ph type="body" idx="3" sz="quarter"/>
-          </p:nvPr>
-        </p:nvSpPr>
-        <p:spPr/>
-        <p:txBody>
-          <a:bodyPr/>
-          <a:lstStyle/>
-          <a:p>
-            <a:r>
-              <a:t>Pause. Then transition:</a:t>
-            </a:r>
-          </a:p>
-          <a:p>
-            <a:r>
-              <a:t>"Now let's look at the VM scenario — this is more dramatic because the app actually goes DOWN." </a:t>
-            </a:r>
-          </a:p>
-        </p:txBody>
-      </p:sp>
-      <p:sp>
-        <p:nvSpPr>
-          <p:cNvPr id="4" name="Slide Number Placeholder 3"/>
-          <p:cNvSpPr>
-            <a:spLocks noGrp="1"/>
-          </p:cNvSpPr>
-          <p:nvPr>
-            <p:ph type="sldNum" idx="5" sz="quarter"/>
+            <p:ph type="sldNum" sz="quarter" idx="5"/>
           </p:nvPr>
         </p:nvSpPr>
         <p:spPr/>
@@ -1506,7 +1306,7 @@
 </file>
 
 <file path=ppt/notesSlides/notesSlide21.xml><?xml version="1.0" encoding="utf-8"?>
-<p:notes xmlns:a="http://schemas.openxmlformats.org/drawingml/2006/main" xmlns:p="http://schemas.openxmlformats.org/presentationml/2006/main" xmlns:r="http://schemas.openxmlformats.org/officeDocument/2006/relationships">
+<p:notes xmlns:a="http://schemas.openxmlformats.org/drawingml/2006/main" xmlns:r="http://schemas.openxmlformats.org/officeDocument/2006/relationships" xmlns:p="http://schemas.openxmlformats.org/presentationml/2006/main">
   <p:cSld>
     <p:spTree>
       <p:nvGrpSpPr>
@@ -1526,53 +1326,53 @@
         <p:nvSpPr>
           <p:cNvPr id="2" name="Slide Image Placeholder 1"/>
           <p:cNvSpPr>
+            <a:spLocks noGrp="1" noRot="1" noChangeAspect="1"/>
+          </p:cNvSpPr>
+          <p:nvPr>
+            <p:ph type="sldImg" idx="2"/>
+          </p:nvPr>
+        </p:nvSpPr>
+        <p:spPr/>
+      </p:sp>
+      <p:sp>
+        <p:nvSpPr>
+          <p:cNvPr id="3" name="Notes Placeholder 2"/>
+          <p:cNvSpPr>
             <a:spLocks noGrp="1"/>
           </p:cNvSpPr>
           <p:nvPr>
-            <p:ph type="sldImg" idx="2"/>
-          </p:nvPr>
-        </p:nvSpPr>
-        <p:spPr/>
-      </p:sp>
-      <p:sp>
-        <p:nvSpPr>
-          <p:cNvPr id="3" name="Notes Placeholder 2"/>
+            <p:ph type="body" sz="quarter" idx="3"/>
+          </p:nvPr>
+        </p:nvSpPr>
+        <p:spPr/>
+        <p:txBody>
+          <a:bodyPr/>
+          <a:lstStyle/>
+          <a:p>
+            <a:r>
+              <a:t>Navigate to IRMDemoSG3 drills. Show the recovery plan configuration.</a:t>
+            </a:r>
+          </a:p>
+          <a:p>
+            <a:r>
+              <a:t>Point out the sequencing: "Worker first, then main app. Order matters."</a:t>
+            </a:r>
+          </a:p>
+          <a:p>
+            <a:r>
+              <a:t>Execute the drill — or narrate what happens if time is tight.</a:t>
+            </a:r>
+          </a:p>
+        </p:txBody>
+      </p:sp>
+      <p:sp>
+        <p:nvSpPr>
+          <p:cNvPr id="4" name="Slide Number Placeholder 3"/>
           <p:cNvSpPr>
             <a:spLocks noGrp="1"/>
           </p:cNvSpPr>
           <p:nvPr>
-            <p:ph type="body" idx="3" sz="quarter"/>
-          </p:nvPr>
-        </p:nvSpPr>
-        <p:spPr/>
-        <p:txBody>
-          <a:bodyPr/>
-          <a:lstStyle/>
-          <a:p>
-            <a:r>
-              <a:t>Navigate to IRMDemoSG3 drills. Show the recovery plan configuration.</a:t>
-            </a:r>
-          </a:p>
-          <a:p>
-            <a:r>
-              <a:t>Point out the sequencing: "Worker first, then main app. Order matters."</a:t>
-            </a:r>
-          </a:p>
-          <a:p>
-            <a:r>
-              <a:t>Execute the drill — or narrate what happens if time is tight.</a:t>
-            </a:r>
-          </a:p>
-        </p:txBody>
-      </p:sp>
-      <p:sp>
-        <p:nvSpPr>
-          <p:cNvPr id="4" name="Slide Number Placeholder 3"/>
-          <p:cNvSpPr>
-            <a:spLocks noGrp="1"/>
-          </p:cNvSpPr>
-          <p:nvPr>
-            <p:ph type="sldNum" idx="5" sz="quarter"/>
+            <p:ph type="sldNum" sz="quarter" idx="5"/>
           </p:nvPr>
         </p:nvSpPr>
         <p:spPr/>
@@ -1586,7 +1386,7 @@
 </file>
 
 <file path=ppt/notesSlides/notesSlide22.xml><?xml version="1.0" encoding="utf-8"?>
-<p:notes xmlns:a="http://schemas.openxmlformats.org/drawingml/2006/main" xmlns:p="http://schemas.openxmlformats.org/presentationml/2006/main" xmlns:r="http://schemas.openxmlformats.org/officeDocument/2006/relationships">
+<p:notes xmlns:a="http://schemas.openxmlformats.org/drawingml/2006/main" xmlns:r="http://schemas.openxmlformats.org/officeDocument/2006/relationships" xmlns:p="http://schemas.openxmlformats.org/presentationml/2006/main">
   <p:cSld>
     <p:spTree>
       <p:nvGrpSpPr>
@@ -1606,58 +1406,58 @@
         <p:nvSpPr>
           <p:cNvPr id="2" name="Slide Image Placeholder 1"/>
           <p:cNvSpPr>
+            <a:spLocks noGrp="1" noRot="1" noChangeAspect="1"/>
+          </p:cNvSpPr>
+          <p:nvPr>
+            <p:ph type="sldImg" idx="2"/>
+          </p:nvPr>
+        </p:nvSpPr>
+        <p:spPr/>
+      </p:sp>
+      <p:sp>
+        <p:nvSpPr>
+          <p:cNvPr id="3" name="Notes Placeholder 2"/>
+          <p:cNvSpPr>
             <a:spLocks noGrp="1"/>
           </p:cNvSpPr>
           <p:nvPr>
-            <p:ph type="sldImg" idx="2"/>
-          </p:nvPr>
-        </p:nvSpPr>
-        <p:spPr/>
-      </p:sp>
-      <p:sp>
-        <p:nvSpPr>
-          <p:cNvPr id="3" name="Notes Placeholder 2"/>
+            <p:ph type="body" sz="quarter" idx="3"/>
+          </p:nvPr>
+        </p:nvSpPr>
+        <p:spPr/>
+        <p:txBody>
+          <a:bodyPr/>
+          <a:lstStyle/>
+          <a:p>
+            <a:r>
+              <a:t>This is the dramatic moment — the app actually goes down and comes back.</a:t>
+            </a:r>
+          </a:p>
+          <a:p>
+            <a:r>
+              <a:t>Show the recovery plan executing in portal.</a:t>
+            </a:r>
+          </a:p>
+          <a:p>
+            <a:r>
+              <a:t>Switch to browser once recovery completes to show app is live again.</a:t>
+            </a:r>
+          </a:p>
+          <a:p>
+            <a:r>
+              <a:t>Highlight the measured RTO in drill results.</a:t>
+            </a:r>
+          </a:p>
+        </p:txBody>
+      </p:sp>
+      <p:sp>
+        <p:nvSpPr>
+          <p:cNvPr id="4" name="Slide Number Placeholder 3"/>
           <p:cNvSpPr>
             <a:spLocks noGrp="1"/>
           </p:cNvSpPr>
           <p:nvPr>
-            <p:ph type="body" idx="3" sz="quarter"/>
-          </p:nvPr>
-        </p:nvSpPr>
-        <p:spPr/>
-        <p:txBody>
-          <a:bodyPr/>
-          <a:lstStyle/>
-          <a:p>
-            <a:r>
-              <a:t>This is the dramatic moment — the app actually goes down and comes back.</a:t>
-            </a:r>
-          </a:p>
-          <a:p>
-            <a:r>
-              <a:t>Show the recovery plan executing in portal.</a:t>
-            </a:r>
-          </a:p>
-          <a:p>
-            <a:r>
-              <a:t>Switch to browser once recovery completes to show app is live again.</a:t>
-            </a:r>
-          </a:p>
-          <a:p>
-            <a:r>
-              <a:t>Highlight the measured RTO in drill results.</a:t>
-            </a:r>
-          </a:p>
-        </p:txBody>
-      </p:sp>
-      <p:sp>
-        <p:nvSpPr>
-          <p:cNvPr id="4" name="Slide Number Placeholder 3"/>
-          <p:cNvSpPr>
-            <a:spLocks noGrp="1"/>
-          </p:cNvSpPr>
-          <p:nvPr>
-            <p:ph type="sldNum" idx="5" sz="quarter"/>
+            <p:ph type="sldNum" sz="quarter" idx="5"/>
           </p:nvPr>
         </p:nvSpPr>
         <p:spPr/>
@@ -1671,7 +1471,7 @@
 </file>
 
 <file path=ppt/notesSlides/notesSlide23.xml><?xml version="1.0" encoding="utf-8"?>
-<p:notes xmlns:a="http://schemas.openxmlformats.org/drawingml/2006/main" xmlns:p="http://schemas.openxmlformats.org/presentationml/2006/main" xmlns:r="http://schemas.openxmlformats.org/officeDocument/2006/relationships">
+<p:notes xmlns:a="http://schemas.openxmlformats.org/drawingml/2006/main" xmlns:r="http://schemas.openxmlformats.org/officeDocument/2006/relationships" xmlns:p="http://schemas.openxmlformats.org/presentationml/2006/main">
   <p:cSld>
     <p:spTree>
       <p:nvGrpSpPr>
@@ -1691,48 +1491,48 @@
         <p:nvSpPr>
           <p:cNvPr id="2" name="Slide Image Placeholder 1"/>
           <p:cNvSpPr>
+            <a:spLocks noGrp="1" noRot="1" noChangeAspect="1"/>
+          </p:cNvSpPr>
+          <p:nvPr>
+            <p:ph type="sldImg" idx="2"/>
+          </p:nvPr>
+        </p:nvSpPr>
+        <p:spPr/>
+      </p:sp>
+      <p:sp>
+        <p:nvSpPr>
+          <p:cNvPr id="3" name="Notes Placeholder 2"/>
+          <p:cNvSpPr>
             <a:spLocks noGrp="1"/>
           </p:cNvSpPr>
           <p:nvPr>
-            <p:ph type="sldImg" idx="2"/>
-          </p:nvPr>
-        </p:nvSpPr>
-        <p:spPr/>
-      </p:sp>
-      <p:sp>
-        <p:nvSpPr>
-          <p:cNvPr id="3" name="Notes Placeholder 2"/>
+            <p:ph type="body" sz="quarter" idx="3"/>
+          </p:nvPr>
+        </p:nvSpPr>
+        <p:spPr/>
+        <p:txBody>
+          <a:bodyPr/>
+          <a:lstStyle/>
+          <a:p>
+            <a:r>
+              <a:t>Let this land. This is the "aha" moment for VM-heavy customers.</a:t>
+            </a:r>
+          </a:p>
+          <a:p>
+            <a:r>
+              <a:t>"How many of your customers have ASR configured but have never tested the actual recovery sequence?" </a:t>
+            </a:r>
+          </a:p>
+        </p:txBody>
+      </p:sp>
+      <p:sp>
+        <p:nvSpPr>
+          <p:cNvPr id="4" name="Slide Number Placeholder 3"/>
           <p:cNvSpPr>
             <a:spLocks noGrp="1"/>
           </p:cNvSpPr>
           <p:nvPr>
-            <p:ph type="body" idx="3" sz="quarter"/>
-          </p:nvPr>
-        </p:nvSpPr>
-        <p:spPr/>
-        <p:txBody>
-          <a:bodyPr/>
-          <a:lstStyle/>
-          <a:p>
-            <a:r>
-              <a:t>Let this land. This is the "aha" moment for VM-heavy customers.</a:t>
-            </a:r>
-          </a:p>
-          <a:p>
-            <a:r>
-              <a:t>"How many of your customers have ASR configured but have never tested the actual recovery sequence?" </a:t>
-            </a:r>
-          </a:p>
-        </p:txBody>
-      </p:sp>
-      <p:sp>
-        <p:nvSpPr>
-          <p:cNvPr id="4" name="Slide Number Placeholder 3"/>
-          <p:cNvSpPr>
-            <a:spLocks noGrp="1"/>
-          </p:cNvSpPr>
-          <p:nvPr>
-            <p:ph type="sldNum" idx="5" sz="quarter"/>
+            <p:ph type="sldNum" sz="quarter" idx="5"/>
           </p:nvPr>
         </p:nvSpPr>
         <p:spPr/>
@@ -1746,7 +1546,7 @@
 </file>
 
 <file path=ppt/notesSlides/notesSlide24.xml><?xml version="1.0" encoding="utf-8"?>
-<p:notes xmlns:a="http://schemas.openxmlformats.org/drawingml/2006/main" xmlns:p="http://schemas.openxmlformats.org/presentationml/2006/main" xmlns:r="http://schemas.openxmlformats.org/officeDocument/2006/relationships">
+<p:notes xmlns:a="http://schemas.openxmlformats.org/drawingml/2006/main" xmlns:r="http://schemas.openxmlformats.org/officeDocument/2006/relationships" xmlns:p="http://schemas.openxmlformats.org/presentationml/2006/main">
   <p:cSld>
     <p:spTree>
       <p:nvGrpSpPr>
@@ -1766,58 +1566,58 @@
         <p:nvSpPr>
           <p:cNvPr id="2" name="Slide Image Placeholder 1"/>
           <p:cNvSpPr>
+            <a:spLocks noGrp="1" noRot="1" noChangeAspect="1"/>
+          </p:cNvSpPr>
+          <p:nvPr>
+            <p:ph type="sldImg" idx="2"/>
+          </p:nvPr>
+        </p:nvSpPr>
+        <p:spPr/>
+      </p:sp>
+      <p:sp>
+        <p:nvSpPr>
+          <p:cNvPr id="3" name="Notes Placeholder 2"/>
+          <p:cNvSpPr>
             <a:spLocks noGrp="1"/>
           </p:cNvSpPr>
           <p:nvPr>
-            <p:ph type="sldImg" idx="2"/>
-          </p:nvPr>
-        </p:nvSpPr>
-        <p:spPr/>
-      </p:sp>
-      <p:sp>
-        <p:nvSpPr>
-          <p:cNvPr id="3" name="Notes Placeholder 2"/>
+            <p:ph type="body" sz="quarter" idx="3"/>
+          </p:nvPr>
+        </p:nvSpPr>
+        <p:spPr/>
+        <p:txBody>
+          <a:bodyPr/>
+          <a:lstStyle/>
+          <a:p>
+            <a:r>
+              <a:t>Summary slide — quick recap.</a:t>
+            </a:r>
+          </a:p>
+          <a:p>
+            <a:r>
+              <a:t>"We went from understanding the architecture, to assessing posture at scale,</a:t>
+            </a:r>
+          </a:p>
+          <a:p>
+            <a:r>
+              <a:t>to getting AI-powered fix guidance, to actually proving it works in production.</a:t>
+            </a:r>
+          </a:p>
+          <a:p>
+            <a:r>
+              <a:t>That's the full IRM journey." </a:t>
+            </a:r>
+          </a:p>
+        </p:txBody>
+      </p:sp>
+      <p:sp>
+        <p:nvSpPr>
+          <p:cNvPr id="4" name="Slide Number Placeholder 3"/>
           <p:cNvSpPr>
             <a:spLocks noGrp="1"/>
           </p:cNvSpPr>
           <p:nvPr>
-            <p:ph type="body" idx="3" sz="quarter"/>
-          </p:nvPr>
-        </p:nvSpPr>
-        <p:spPr/>
-        <p:txBody>
-          <a:bodyPr/>
-          <a:lstStyle/>
-          <a:p>
-            <a:r>
-              <a:t>Summary slide — quick recap.</a:t>
-            </a:r>
-          </a:p>
-          <a:p>
-            <a:r>
-              <a:t>"We went from understanding the architecture, to assessing posture at scale,</a:t>
-            </a:r>
-          </a:p>
-          <a:p>
-            <a:r>
-              <a:t>to getting AI-powered fix guidance, to actually proving it works in production.</a:t>
-            </a:r>
-          </a:p>
-          <a:p>
-            <a:r>
-              <a:t>That's the full IRM journey." </a:t>
-            </a:r>
-          </a:p>
-        </p:txBody>
-      </p:sp>
-      <p:sp>
-        <p:nvSpPr>
-          <p:cNvPr id="4" name="Slide Number Placeholder 3"/>
-          <p:cNvSpPr>
-            <a:spLocks noGrp="1"/>
-          </p:cNvSpPr>
-          <p:nvPr>
-            <p:ph type="sldNum" idx="5" sz="quarter"/>
+            <p:ph type="sldNum" sz="quarter" idx="5"/>
           </p:nvPr>
         </p:nvSpPr>
         <p:spPr/>
@@ -1831,7 +1631,7 @@
 </file>
 
 <file path=ppt/notesSlides/notesSlide25.xml><?xml version="1.0" encoding="utf-8"?>
-<p:notes xmlns:a="http://schemas.openxmlformats.org/drawingml/2006/main" xmlns:p="http://schemas.openxmlformats.org/presentationml/2006/main" xmlns:r="http://schemas.openxmlformats.org/officeDocument/2006/relationships">
+<p:notes xmlns:a="http://schemas.openxmlformats.org/drawingml/2006/main" xmlns:r="http://schemas.openxmlformats.org/officeDocument/2006/relationships" xmlns:p="http://schemas.openxmlformats.org/presentationml/2006/main">
   <p:cSld>
     <p:spTree>
       <p:nvGrpSpPr>
@@ -1851,53 +1651,53 @@
         <p:nvSpPr>
           <p:cNvPr id="2" name="Slide Image Placeholder 1"/>
           <p:cNvSpPr>
+            <a:spLocks noGrp="1" noRot="1" noChangeAspect="1"/>
+          </p:cNvSpPr>
+          <p:nvPr>
+            <p:ph type="sldImg" idx="2"/>
+          </p:nvPr>
+        </p:nvSpPr>
+        <p:spPr/>
+      </p:sp>
+      <p:sp>
+        <p:nvSpPr>
+          <p:cNvPr id="3" name="Notes Placeholder 2"/>
+          <p:cNvSpPr>
             <a:spLocks noGrp="1"/>
           </p:cNvSpPr>
           <p:nvPr>
-            <p:ph type="sldImg" idx="2"/>
-          </p:nvPr>
-        </p:nvSpPr>
-        <p:spPr/>
-      </p:sp>
-      <p:sp>
-        <p:nvSpPr>
-          <p:cNvPr id="3" name="Notes Placeholder 2"/>
+            <p:ph type="body" sz="quarter" idx="3"/>
+          </p:nvPr>
+        </p:nvSpPr>
+        <p:spPr/>
+        <p:txBody>
+          <a:bodyPr/>
+          <a:lstStyle/>
+          <a:p>
+            <a:r>
+              <a:t>Close with actionable next steps.</a:t>
+            </a:r>
+          </a:p>
+          <a:p>
+            <a:r>
+              <a:t>Offer to help them set up their first service group and run their first drill.</a:t>
+            </a:r>
+          </a:p>
+          <a:p>
+            <a:r>
+              <a:t>Leave contact info on screen.</a:t>
+            </a:r>
+          </a:p>
+        </p:txBody>
+      </p:sp>
+      <p:sp>
+        <p:nvSpPr>
+          <p:cNvPr id="4" name="Slide Number Placeholder 3"/>
           <p:cNvSpPr>
             <a:spLocks noGrp="1"/>
           </p:cNvSpPr>
           <p:nvPr>
-            <p:ph type="body" idx="3" sz="quarter"/>
-          </p:nvPr>
-        </p:nvSpPr>
-        <p:spPr/>
-        <p:txBody>
-          <a:bodyPr/>
-          <a:lstStyle/>
-          <a:p>
-            <a:r>
-              <a:t>Close with actionable next steps.</a:t>
-            </a:r>
-          </a:p>
-          <a:p>
-            <a:r>
-              <a:t>Offer to help them set up their first service group and run their first drill.</a:t>
-            </a:r>
-          </a:p>
-          <a:p>
-            <a:r>
-              <a:t>Leave contact info on screen.</a:t>
-            </a:r>
-          </a:p>
-        </p:txBody>
-      </p:sp>
-      <p:sp>
-        <p:nvSpPr>
-          <p:cNvPr id="4" name="Slide Number Placeholder 3"/>
-          <p:cNvSpPr>
-            <a:spLocks noGrp="1"/>
-          </p:cNvSpPr>
-          <p:nvPr>
-            <p:ph type="sldNum" idx="5" sz="quarter"/>
+            <p:ph type="sldNum" sz="quarter" idx="5"/>
           </p:nvPr>
         </p:nvSpPr>
         <p:spPr/>
@@ -1911,7 +1711,7 @@
 </file>
 
 <file path=ppt/notesSlides/notesSlide26.xml><?xml version="1.0" encoding="utf-8"?>
-<p:notes xmlns:a="http://schemas.openxmlformats.org/drawingml/2006/main" xmlns:p="http://schemas.openxmlformats.org/presentationml/2006/main" xmlns:r="http://schemas.openxmlformats.org/officeDocument/2006/relationships">
+<p:notes xmlns:a="http://schemas.openxmlformats.org/drawingml/2006/main" xmlns:r="http://schemas.openxmlformats.org/officeDocument/2006/relationships" xmlns:p="http://schemas.openxmlformats.org/presentationml/2006/main">
   <p:cSld>
     <p:spTree>
       <p:nvGrpSpPr>
@@ -1931,48 +1731,48 @@
         <p:nvSpPr>
           <p:cNvPr id="2" name="Slide Image Placeholder 1"/>
           <p:cNvSpPr>
+            <a:spLocks noGrp="1" noRot="1" noChangeAspect="1"/>
+          </p:cNvSpPr>
+          <p:nvPr>
+            <p:ph type="sldImg" idx="2"/>
+          </p:nvPr>
+        </p:nvSpPr>
+        <p:spPr/>
+      </p:sp>
+      <p:sp>
+        <p:nvSpPr>
+          <p:cNvPr id="3" name="Notes Placeholder 2"/>
+          <p:cNvSpPr>
             <a:spLocks noGrp="1"/>
           </p:cNvSpPr>
           <p:nvPr>
-            <p:ph type="sldImg" idx="2"/>
-          </p:nvPr>
-        </p:nvSpPr>
-        <p:spPr/>
-      </p:sp>
-      <p:sp>
-        <p:nvSpPr>
-          <p:cNvPr id="3" name="Notes Placeholder 2"/>
+            <p:ph type="body" sz="quarter" idx="3"/>
+          </p:nvPr>
+        </p:nvSpPr>
+        <p:spPr/>
+        <p:txBody>
+          <a:bodyPr/>
+          <a:lstStyle/>
+          <a:p>
+            <a:r>
+              <a:t>Hidden slide for presenter prep only. Don't show this during the demo.</a:t>
+            </a:r>
+          </a:p>
+          <a:p>
+            <a:r>
+              <a:t>Run through this checklist 30 minutes before your session.</a:t>
+            </a:r>
+          </a:p>
+        </p:txBody>
+      </p:sp>
+      <p:sp>
+        <p:nvSpPr>
+          <p:cNvPr id="4" name="Slide Number Placeholder 3"/>
           <p:cNvSpPr>
             <a:spLocks noGrp="1"/>
           </p:cNvSpPr>
           <p:nvPr>
-            <p:ph type="body" idx="3" sz="quarter"/>
-          </p:nvPr>
-        </p:nvSpPr>
-        <p:spPr/>
-        <p:txBody>
-          <a:bodyPr/>
-          <a:lstStyle/>
-          <a:p>
-            <a:r>
-              <a:t>Hidden slide for presenter prep only. Don't show this during the demo.</a:t>
-            </a:r>
-          </a:p>
-          <a:p>
-            <a:r>
-              <a:t>Run through this checklist 30 minutes before your session.</a:t>
-            </a:r>
-          </a:p>
-        </p:txBody>
-      </p:sp>
-      <p:sp>
-        <p:nvSpPr>
-          <p:cNvPr id="4" name="Slide Number Placeholder 3"/>
-          <p:cNvSpPr>
-            <a:spLocks noGrp="1"/>
-          </p:cNvSpPr>
-          <p:nvPr>
-            <p:ph type="sldNum" idx="5" sz="quarter"/>
+            <p:ph type="sldNum" sz="quarter" idx="5"/>
           </p:nvPr>
         </p:nvSpPr>
         <p:spPr/>
@@ -1986,7 +1786,7 @@
 </file>
 
 <file path=ppt/notesSlides/notesSlide3.xml><?xml version="1.0" encoding="utf-8"?>
-<p:notes xmlns:a="http://schemas.openxmlformats.org/drawingml/2006/main" xmlns:p="http://schemas.openxmlformats.org/presentationml/2006/main" xmlns:r="http://schemas.openxmlformats.org/officeDocument/2006/relationships">
+<p:notes xmlns:a="http://schemas.openxmlformats.org/drawingml/2006/main" xmlns:r="http://schemas.openxmlformats.org/officeDocument/2006/relationships" xmlns:p="http://schemas.openxmlformats.org/presentationml/2006/main">
   <p:cSld>
     <p:spTree>
       <p:nvGrpSpPr>
@@ -2006,53 +1806,53 @@
         <p:nvSpPr>
           <p:cNvPr id="2" name="Slide Image Placeholder 1"/>
           <p:cNvSpPr>
+            <a:spLocks noGrp="1" noRot="1" noChangeAspect="1"/>
+          </p:cNvSpPr>
+          <p:nvPr>
+            <p:ph type="sldImg" idx="2"/>
+          </p:nvPr>
+        </p:nvSpPr>
+        <p:spPr/>
+      </p:sp>
+      <p:sp>
+        <p:nvSpPr>
+          <p:cNvPr id="3" name="Notes Placeholder 2"/>
+          <p:cNvSpPr>
             <a:spLocks noGrp="1"/>
           </p:cNvSpPr>
           <p:nvPr>
-            <p:ph type="sldImg" idx="2"/>
-          </p:nvPr>
-        </p:nvSpPr>
-        <p:spPr/>
-      </p:sp>
-      <p:sp>
-        <p:nvSpPr>
-          <p:cNvPr id="3" name="Notes Placeholder 2"/>
+            <p:ph type="body" sz="quarter" idx="3"/>
+          </p:nvPr>
+        </p:nvSpPr>
+        <p:spPr/>
+        <p:txBody>
+          <a:bodyPr/>
+          <a:lstStyle/>
+          <a:p>
+            <a:r>
+              <a:t>Reference slide — keep visible or memorize key URLs.</a:t>
+            </a:r>
+          </a:p>
+          <a:p>
+            <a:r>
+              <a:t>You'll open both app URLs in browser tabs before starting the demo.</a:t>
+            </a:r>
+          </a:p>
+          <a:p>
+            <a:r>
+              <a:t>Pre-open the IRM portal and navigate to the service groups list.</a:t>
+            </a:r>
+          </a:p>
+        </p:txBody>
+      </p:sp>
+      <p:sp>
+        <p:nvSpPr>
+          <p:cNvPr id="4" name="Slide Number Placeholder 3"/>
           <p:cNvSpPr>
             <a:spLocks noGrp="1"/>
           </p:cNvSpPr>
           <p:nvPr>
-            <p:ph type="body" idx="3" sz="quarter"/>
-          </p:nvPr>
-        </p:nvSpPr>
-        <p:spPr/>
-        <p:txBody>
-          <a:bodyPr/>
-          <a:lstStyle/>
-          <a:p>
-            <a:r>
-              <a:t>Reference slide — keep visible or memorize key URLs.</a:t>
-            </a:r>
-          </a:p>
-          <a:p>
-            <a:r>
-              <a:t>You'll open both app URLs in browser tabs before starting the demo.</a:t>
-            </a:r>
-          </a:p>
-          <a:p>
-            <a:r>
-              <a:t>Pre-open the IRM portal and navigate to the service groups list.</a:t>
-            </a:r>
-          </a:p>
-        </p:txBody>
-      </p:sp>
-      <p:sp>
-        <p:nvSpPr>
-          <p:cNvPr id="4" name="Slide Number Placeholder 3"/>
-          <p:cNvSpPr>
-            <a:spLocks noGrp="1"/>
-          </p:cNvSpPr>
-          <p:nvPr>
-            <p:ph type="sldNum" idx="5" sz="quarter"/>
+            <p:ph type="sldNum" sz="quarter" idx="5"/>
           </p:nvPr>
         </p:nvSpPr>
         <p:spPr/>
@@ -2066,7 +1866,7 @@
 </file>
 
 <file path=ppt/notesSlides/notesSlide4.xml><?xml version="1.0" encoding="utf-8"?>
-<p:notes xmlns:a="http://schemas.openxmlformats.org/drawingml/2006/main" xmlns:p="http://schemas.openxmlformats.org/presentationml/2006/main" xmlns:r="http://schemas.openxmlformats.org/officeDocument/2006/relationships">
+<p:notes xmlns:a="http://schemas.openxmlformats.org/drawingml/2006/main" xmlns:r="http://schemas.openxmlformats.org/officeDocument/2006/relationships" xmlns:p="http://schemas.openxmlformats.org/presentationml/2006/main">
   <p:cSld>
     <p:spTree>
       <p:nvGrpSpPr>
@@ -2086,49 +1886,51 @@
         <p:nvSpPr>
           <p:cNvPr id="2" name="Slide Image Placeholder 1"/>
           <p:cNvSpPr>
+            <a:spLocks noGrp="1" noRot="1" noChangeAspect="1"/>
+          </p:cNvSpPr>
+          <p:nvPr>
+            <p:ph type="sldImg" idx="2"/>
+          </p:nvPr>
+        </p:nvSpPr>
+        <p:spPr/>
+      </p:sp>
+      <p:sp>
+        <p:nvSpPr>
+          <p:cNvPr id="3" name="Notes Placeholder 2"/>
+          <p:cNvSpPr>
             <a:spLocks noGrp="1"/>
           </p:cNvSpPr>
           <p:nvPr>
-            <p:ph type="sldImg" idx="2"/>
-          </p:nvPr>
-        </p:nvSpPr>
-        <p:spPr/>
-      </p:sp>
-      <p:sp>
-        <p:nvSpPr>
-          <p:cNvPr id="3" name="Notes Placeholder 2"/>
+            <p:ph type="body" sz="quarter" idx="3"/>
+          </p:nvPr>
+        </p:nvSpPr>
+        <p:spPr/>
+        <p:txBody>
+          <a:bodyPr/>
+          <a:lstStyle/>
+          <a:p>
+            <a:r>
+              <a:t>Transition to Act 1.</a:t>
+            </a:r>
+          </a:p>
+          <a:p>
+            <a:r>
+              <a:t>"Let me introduce you to two applications that Contoso Retail runs in Azure. Both are live right now."</a:t>
+            </a:r>
+          </a:p>
+          <a:p>
+            <a:endParaRPr/>
+          </a:p>
+        </p:txBody>
+      </p:sp>
+      <p:sp>
+        <p:nvSpPr>
+          <p:cNvPr id="4" name="Slide Number Placeholder 3"/>
           <p:cNvSpPr>
             <a:spLocks noGrp="1"/>
           </p:cNvSpPr>
           <p:nvPr>
-            <p:ph type="body" idx="3" sz="quarter"/>
-          </p:nvPr>
-        </p:nvSpPr>
-        <p:spPr/>
-        <p:txBody>
-          <a:bodyPr/>
-          <a:lstStyle/>
-          <a:p>
-            <a:r>
-              <a:t>Transition to Act 1.</a:t>
-            </a:r>
-          </a:p>
-          <a:p>
-            <a:r>
-              <a:t>"Let me introduce you to two applications that Contoso Retail runs in Azure. Both are live right now."</a:t>
-            </a:r>
-          </a:p>
-          <a:p/>
-        </p:txBody>
-      </p:sp>
-      <p:sp>
-        <p:nvSpPr>
-          <p:cNvPr id="4" name="Slide Number Placeholder 3"/>
-          <p:cNvSpPr>
-            <a:spLocks noGrp="1"/>
-          </p:cNvSpPr>
-          <p:nvPr>
-            <p:ph type="sldNum" idx="5" sz="quarter"/>
+            <p:ph type="sldNum" sz="quarter" idx="5"/>
           </p:nvPr>
         </p:nvSpPr>
         <p:spPr/>
@@ -2142,7 +1944,7 @@
 </file>
 
 <file path=ppt/notesSlides/notesSlide5.xml><?xml version="1.0" encoding="utf-8"?>
-<p:notes xmlns:a="http://schemas.openxmlformats.org/drawingml/2006/main" xmlns:p="http://schemas.openxmlformats.org/presentationml/2006/main" xmlns:r="http://schemas.openxmlformats.org/officeDocument/2006/relationships">
+<p:notes xmlns:a="http://schemas.openxmlformats.org/drawingml/2006/main" xmlns:r="http://schemas.openxmlformats.org/officeDocument/2006/relationships" xmlns:p="http://schemas.openxmlformats.org/presentationml/2006/main">
   <p:cSld>
     <p:spTree>
       <p:nvGrpSpPr>
@@ -2162,59 +1964,61 @@
         <p:nvSpPr>
           <p:cNvPr id="2" name="Slide Image Placeholder 1"/>
           <p:cNvSpPr>
+            <a:spLocks noGrp="1" noRot="1" noChangeAspect="1"/>
+          </p:cNvSpPr>
+          <p:nvPr>
+            <p:ph type="sldImg" idx="2"/>
+          </p:nvPr>
+        </p:nvSpPr>
+        <p:spPr/>
+      </p:sp>
+      <p:sp>
+        <p:nvSpPr>
+          <p:cNvPr id="3" name="Notes Placeholder 2"/>
+          <p:cNvSpPr>
             <a:spLocks noGrp="1"/>
           </p:cNvSpPr>
           <p:nvPr>
-            <p:ph type="sldImg" idx="2"/>
-          </p:nvPr>
-        </p:nvSpPr>
-        <p:spPr/>
-      </p:sp>
-      <p:sp>
-        <p:nvSpPr>
-          <p:cNvPr id="3" name="Notes Placeholder 2"/>
+            <p:ph type="body" sz="quarter" idx="3"/>
+          </p:nvPr>
+        </p:nvSpPr>
+        <p:spPr/>
+        <p:txBody>
+          <a:bodyPr/>
+          <a:lstStyle/>
+          <a:p>
+            <a:r>
+              <a:t>Open the AKS app in browser. Show it's live.</a:t>
+            </a:r>
+          </a:p>
+          <a:p>
+            <a:r>
+              <a:t>Key point: "The compute layer looks resilient — nodes across 3 zones. But look at the dependencies:</a:t>
+            </a:r>
+          </a:p>
+          <a:p>
+            <a:r>
+              <a:t>SQL and Storage are NOT zone-redundant. If Zone 1 goes down, compute survives but data might not."</a:t>
+            </a:r>
+          </a:p>
+          <a:p>
+            <a:endParaRPr/>
+          </a:p>
+          <a:p>
+            <a:r>
+              <a:t>Let the audience absorb the gap between perceived and actual resilience.</a:t>
+            </a:r>
+          </a:p>
+        </p:txBody>
+      </p:sp>
+      <p:sp>
+        <p:nvSpPr>
+          <p:cNvPr id="4" name="Slide Number Placeholder 3"/>
           <p:cNvSpPr>
             <a:spLocks noGrp="1"/>
           </p:cNvSpPr>
           <p:nvPr>
-            <p:ph type="body" idx="3" sz="quarter"/>
-          </p:nvPr>
-        </p:nvSpPr>
-        <p:spPr/>
-        <p:txBody>
-          <a:bodyPr/>
-          <a:lstStyle/>
-          <a:p>
-            <a:r>
-              <a:t>Open the AKS app in browser. Show it's live.</a:t>
-            </a:r>
-          </a:p>
-          <a:p>
-            <a:r>
-              <a:t>Key point: "The compute layer looks resilient — nodes across 3 zones. But look at the dependencies:</a:t>
-            </a:r>
-          </a:p>
-          <a:p>
-            <a:r>
-              <a:t>SQL and Storage are NOT zone-redundant. If Zone 1 goes down, compute survives but data might not."</a:t>
-            </a:r>
-          </a:p>
-          <a:p/>
-          <a:p>
-            <a:r>
-              <a:t>Let the audience absorb the gap between perceived and actual resilience.</a:t>
-            </a:r>
-          </a:p>
-        </p:txBody>
-      </p:sp>
-      <p:sp>
-        <p:nvSpPr>
-          <p:cNvPr id="4" name="Slide Number Placeholder 3"/>
-          <p:cNvSpPr>
-            <a:spLocks noGrp="1"/>
-          </p:cNvSpPr>
-          <p:nvPr>
-            <p:ph type="sldNum" idx="5" sz="quarter"/>
+            <p:ph type="sldNum" sz="quarter" idx="5"/>
           </p:nvPr>
         </p:nvSpPr>
         <p:spPr/>
@@ -2228,7 +2032,7 @@
 </file>
 
 <file path=ppt/notesSlides/notesSlide6.xml><?xml version="1.0" encoding="utf-8"?>
-<p:notes xmlns:a="http://schemas.openxmlformats.org/drawingml/2006/main" xmlns:p="http://schemas.openxmlformats.org/presentationml/2006/main" xmlns:r="http://schemas.openxmlformats.org/officeDocument/2006/relationships">
+<p:notes xmlns:a="http://schemas.openxmlformats.org/drawingml/2006/main" xmlns:r="http://schemas.openxmlformats.org/officeDocument/2006/relationships" xmlns:p="http://schemas.openxmlformats.org/presentationml/2006/main">
   <p:cSld>
     <p:spTree>
       <p:nvGrpSpPr>
@@ -2248,64 +2052,66 @@
         <p:nvSpPr>
           <p:cNvPr id="2" name="Slide Image Placeholder 1"/>
           <p:cNvSpPr>
+            <a:spLocks noGrp="1" noRot="1" noChangeAspect="1"/>
+          </p:cNvSpPr>
+          <p:nvPr>
+            <p:ph type="sldImg" idx="2"/>
+          </p:nvPr>
+        </p:nvSpPr>
+        <p:spPr/>
+      </p:sp>
+      <p:sp>
+        <p:nvSpPr>
+          <p:cNvPr id="3" name="Notes Placeholder 2"/>
+          <p:cNvSpPr>
             <a:spLocks noGrp="1"/>
           </p:cNvSpPr>
           <p:nvPr>
-            <p:ph type="sldImg" idx="2"/>
-          </p:nvPr>
-        </p:nvSpPr>
-        <p:spPr/>
-      </p:sp>
-      <p:sp>
-        <p:nvSpPr>
-          <p:cNvPr id="3" name="Notes Placeholder 2"/>
+            <p:ph type="body" sz="quarter" idx="3"/>
+          </p:nvPr>
+        </p:nvSpPr>
+        <p:spPr/>
+        <p:txBody>
+          <a:bodyPr/>
+          <a:lstStyle/>
+          <a:p>
+            <a:r>
+              <a:t>Open the VM app in browser. Show it's live.</a:t>
+            </a:r>
+          </a:p>
+          <a:p>
+            <a:r>
+              <a:t>Key point: "ASR is configured — the VMs CAN recover to Zone 2. But has this ever been tested?</a:t>
+            </a:r>
+          </a:p>
+          <a:p>
+            <a:r>
+              <a:t>Can Contoso orchestrate recovery in the right order under real pressure?</a:t>
+            </a:r>
+          </a:p>
+          <a:p>
+            <a:r>
+              <a:t>The worker must come up before the main app. That sequencing matters."</a:t>
+            </a:r>
+          </a:p>
+          <a:p>
+            <a:endParaRPr/>
+          </a:p>
+          <a:p>
+            <a:r>
+              <a:t>Pause: "These are the questions Infrastructure Resiliency Manager answers." </a:t>
+            </a:r>
+          </a:p>
+        </p:txBody>
+      </p:sp>
+      <p:sp>
+        <p:nvSpPr>
+          <p:cNvPr id="4" name="Slide Number Placeholder 3"/>
           <p:cNvSpPr>
             <a:spLocks noGrp="1"/>
           </p:cNvSpPr>
           <p:nvPr>
-            <p:ph type="body" idx="3" sz="quarter"/>
-          </p:nvPr>
-        </p:nvSpPr>
-        <p:spPr/>
-        <p:txBody>
-          <a:bodyPr/>
-          <a:lstStyle/>
-          <a:p>
-            <a:r>
-              <a:t>Open the VM app in browser. Show it's live.</a:t>
-            </a:r>
-          </a:p>
-          <a:p>
-            <a:r>
-              <a:t>Key point: "ASR is configured — the VMs CAN recover to Zone 2. But has this ever been tested?</a:t>
-            </a:r>
-          </a:p>
-          <a:p>
-            <a:r>
-              <a:t>Can Contoso orchestrate recovery in the right order under real pressure?</a:t>
-            </a:r>
-          </a:p>
-          <a:p>
-            <a:r>
-              <a:t>The worker must come up before the main app. That sequencing matters."</a:t>
-            </a:r>
-          </a:p>
-          <a:p/>
-          <a:p>
-            <a:r>
-              <a:t>Pause: "These are the questions Infrastructure Resiliency Manager answers." </a:t>
-            </a:r>
-          </a:p>
-        </p:txBody>
-      </p:sp>
-      <p:sp>
-        <p:nvSpPr>
-          <p:cNvPr id="4" name="Slide Number Placeholder 3"/>
-          <p:cNvSpPr>
-            <a:spLocks noGrp="1"/>
-          </p:cNvSpPr>
-          <p:nvPr>
-            <p:ph type="sldNum" idx="5" sz="quarter"/>
+            <p:ph type="sldNum" sz="quarter" idx="5"/>
           </p:nvPr>
         </p:nvSpPr>
         <p:spPr/>
@@ -2319,7 +2125,7 @@
 </file>
 
 <file path=ppt/notesSlides/notesSlide7.xml><?xml version="1.0" encoding="utf-8"?>
-<p:notes xmlns:a="http://schemas.openxmlformats.org/drawingml/2006/main" xmlns:p="http://schemas.openxmlformats.org/presentationml/2006/main" xmlns:r="http://schemas.openxmlformats.org/officeDocument/2006/relationships">
+<p:notes xmlns:a="http://schemas.openxmlformats.org/drawingml/2006/main" xmlns:r="http://schemas.openxmlformats.org/officeDocument/2006/relationships" xmlns:p="http://schemas.openxmlformats.org/presentationml/2006/main">
   <p:cSld>
     <p:spTree>
       <p:nvGrpSpPr>
@@ -2339,48 +2145,48 @@
         <p:nvSpPr>
           <p:cNvPr id="2" name="Slide Image Placeholder 1"/>
           <p:cNvSpPr>
+            <a:spLocks noGrp="1" noRot="1" noChangeAspect="1"/>
+          </p:cNvSpPr>
+          <p:nvPr>
+            <p:ph type="sldImg" idx="2"/>
+          </p:nvPr>
+        </p:nvSpPr>
+        <p:spPr/>
+      </p:sp>
+      <p:sp>
+        <p:nvSpPr>
+          <p:cNvPr id="3" name="Notes Placeholder 2"/>
+          <p:cNvSpPr>
             <a:spLocks noGrp="1"/>
           </p:cNvSpPr>
           <p:nvPr>
-            <p:ph type="sldImg" idx="2"/>
-          </p:nvPr>
-        </p:nvSpPr>
-        <p:spPr/>
-      </p:sp>
-      <p:sp>
-        <p:nvSpPr>
-          <p:cNvPr id="3" name="Notes Placeholder 2"/>
+            <p:ph type="body" sz="quarter" idx="3"/>
+          </p:nvPr>
+        </p:nvSpPr>
+        <p:spPr/>
+        <p:txBody>
+          <a:bodyPr/>
+          <a:lstStyle/>
+          <a:p>
+            <a:r>
+              <a:t>Pause on this slide. Let the message land.</a:t>
+            </a:r>
+          </a:p>
+          <a:p>
+            <a:r>
+              <a:t>This frames the rest of the demo — IRM answers these exact questions.</a:t>
+            </a:r>
+          </a:p>
+        </p:txBody>
+      </p:sp>
+      <p:sp>
+        <p:nvSpPr>
+          <p:cNvPr id="4" name="Slide Number Placeholder 3"/>
           <p:cNvSpPr>
             <a:spLocks noGrp="1"/>
           </p:cNvSpPr>
           <p:nvPr>
-            <p:ph type="body" idx="3" sz="quarter"/>
-          </p:nvPr>
-        </p:nvSpPr>
-        <p:spPr/>
-        <p:txBody>
-          <a:bodyPr/>
-          <a:lstStyle/>
-          <a:p>
-            <a:r>
-              <a:t>Pause on this slide. Let the message land.</a:t>
-            </a:r>
-          </a:p>
-          <a:p>
-            <a:r>
-              <a:t>This frames the rest of the demo — IRM answers these exact questions.</a:t>
-            </a:r>
-          </a:p>
-        </p:txBody>
-      </p:sp>
-      <p:sp>
-        <p:nvSpPr>
-          <p:cNvPr id="4" name="Slide Number Placeholder 3"/>
-          <p:cNvSpPr>
-            <a:spLocks noGrp="1"/>
-          </p:cNvSpPr>
-          <p:nvPr>
-            <p:ph type="sldNum" idx="5" sz="quarter"/>
+            <p:ph type="sldNum" sz="quarter" idx="5"/>
           </p:nvPr>
         </p:nvSpPr>
         <p:spPr/>
@@ -2394,7 +2200,7 @@
 </file>
 
 <file path=ppt/notesSlides/notesSlide8.xml><?xml version="1.0" encoding="utf-8"?>
-<p:notes xmlns:a="http://schemas.openxmlformats.org/drawingml/2006/main" xmlns:p="http://schemas.openxmlformats.org/presentationml/2006/main" xmlns:r="http://schemas.openxmlformats.org/officeDocument/2006/relationships">
+<p:notes xmlns:a="http://schemas.openxmlformats.org/drawingml/2006/main" xmlns:r="http://schemas.openxmlformats.org/officeDocument/2006/relationships" xmlns:p="http://schemas.openxmlformats.org/presentationml/2006/main">
   <p:cSld>
     <p:spTree>
       <p:nvGrpSpPr>
@@ -2414,48 +2220,48 @@
         <p:nvSpPr>
           <p:cNvPr id="2" name="Slide Image Placeholder 1"/>
           <p:cNvSpPr>
+            <a:spLocks noGrp="1" noRot="1" noChangeAspect="1"/>
+          </p:cNvSpPr>
+          <p:nvPr>
+            <p:ph type="sldImg" idx="2"/>
+          </p:nvPr>
+        </p:nvSpPr>
+        <p:spPr/>
+      </p:sp>
+      <p:sp>
+        <p:nvSpPr>
+          <p:cNvPr id="3" name="Notes Placeholder 2"/>
+          <p:cNvSpPr>
             <a:spLocks noGrp="1"/>
           </p:cNvSpPr>
           <p:nvPr>
-            <p:ph type="sldImg" idx="2"/>
-          </p:nvPr>
-        </p:nvSpPr>
-        <p:spPr/>
-      </p:sp>
-      <p:sp>
-        <p:nvSpPr>
-          <p:cNvPr id="3" name="Notes Placeholder 2"/>
+            <p:ph type="body" sz="quarter" idx="3"/>
+          </p:nvPr>
+        </p:nvSpPr>
+        <p:spPr/>
+        <p:txBody>
+          <a:bodyPr/>
+          <a:lstStyle/>
+          <a:p>
+            <a:r>
+              <a:t>Transition: "Now let's see what IRM tells us about these applications."</a:t>
+            </a:r>
+          </a:p>
+          <a:p>
+            <a:r>
+              <a:t>Switch to the Azure Portal / IRM portal after this slide.</a:t>
+            </a:r>
+          </a:p>
+        </p:txBody>
+      </p:sp>
+      <p:sp>
+        <p:nvSpPr>
+          <p:cNvPr id="4" name="Slide Number Placeholder 3"/>
           <p:cNvSpPr>
             <a:spLocks noGrp="1"/>
           </p:cNvSpPr>
           <p:nvPr>
-            <p:ph type="body" idx="3" sz="quarter"/>
-          </p:nvPr>
-        </p:nvSpPr>
-        <p:spPr/>
-        <p:txBody>
-          <a:bodyPr/>
-          <a:lstStyle/>
-          <a:p>
-            <a:r>
-              <a:t>Transition: "Now let's see what IRM tells us about these applications."</a:t>
-            </a:r>
-          </a:p>
-          <a:p>
-            <a:r>
-              <a:t>Switch to the Azure Portal / IRM portal after this slide.</a:t>
-            </a:r>
-          </a:p>
-        </p:txBody>
-      </p:sp>
-      <p:sp>
-        <p:nvSpPr>
-          <p:cNvPr id="4" name="Slide Number Placeholder 3"/>
-          <p:cNvSpPr>
-            <a:spLocks noGrp="1"/>
-          </p:cNvSpPr>
-          <p:nvPr>
-            <p:ph type="sldNum" idx="5" sz="quarter"/>
+            <p:ph type="sldNum" sz="quarter" idx="5"/>
           </p:nvPr>
         </p:nvSpPr>
         <p:spPr/>
@@ -2469,7 +2275,7 @@
 </file>
 
 <file path=ppt/notesSlides/notesSlide9.xml><?xml version="1.0" encoding="utf-8"?>
-<p:notes xmlns:a="http://schemas.openxmlformats.org/drawingml/2006/main" xmlns:p="http://schemas.openxmlformats.org/presentationml/2006/main" xmlns:r="http://schemas.openxmlformats.org/officeDocument/2006/relationships">
+<p:notes xmlns:a="http://schemas.openxmlformats.org/drawingml/2006/main" xmlns:r="http://schemas.openxmlformats.org/officeDocument/2006/relationships" xmlns:p="http://schemas.openxmlformats.org/presentationml/2006/main">
   <p:cSld>
     <p:spTree>
       <p:nvGrpSpPr>
@@ -2489,53 +2295,53 @@
         <p:nvSpPr>
           <p:cNvPr id="2" name="Slide Image Placeholder 1"/>
           <p:cNvSpPr>
+            <a:spLocks noGrp="1" noRot="1" noChangeAspect="1"/>
+          </p:cNvSpPr>
+          <p:nvPr>
+            <p:ph type="sldImg" idx="2"/>
+          </p:nvPr>
+        </p:nvSpPr>
+        <p:spPr/>
+      </p:sp>
+      <p:sp>
+        <p:nvSpPr>
+          <p:cNvPr id="3" name="Notes Placeholder 2"/>
+          <p:cNvSpPr>
             <a:spLocks noGrp="1"/>
           </p:cNvSpPr>
           <p:nvPr>
-            <p:ph type="sldImg" idx="2"/>
-          </p:nvPr>
-        </p:nvSpPr>
-        <p:spPr/>
-      </p:sp>
-      <p:sp>
-        <p:nvSpPr>
-          <p:cNvPr id="3" name="Notes Placeholder 2"/>
+            <p:ph type="body" sz="quarter" idx="3"/>
+          </p:nvPr>
+        </p:nvSpPr>
+        <p:spPr/>
+        <p:txBody>
+          <a:bodyPr/>
+          <a:lstStyle/>
+          <a:p>
+            <a:r>
+              <a:t>Switch to portal now. Navigate to Resiliency Overview.</a:t>
+            </a:r>
+          </a:p>
+          <a:p>
+            <a:r>
+              <a:t>Point out the non-resilient service groups tile.</a:t>
+            </a:r>
+          </a:p>
+          <a:p>
+            <a:r>
+              <a:t>"Imagine you manage 50 applications — you need this single-pane view." </a:t>
+            </a:r>
+          </a:p>
+        </p:txBody>
+      </p:sp>
+      <p:sp>
+        <p:nvSpPr>
+          <p:cNvPr id="4" name="Slide Number Placeholder 3"/>
           <p:cNvSpPr>
             <a:spLocks noGrp="1"/>
           </p:cNvSpPr>
           <p:nvPr>
-            <p:ph type="body" idx="3" sz="quarter"/>
-          </p:nvPr>
-        </p:nvSpPr>
-        <p:spPr/>
-        <p:txBody>
-          <a:bodyPr/>
-          <a:lstStyle/>
-          <a:p>
-            <a:r>
-              <a:t>Switch to portal now. Navigate to Resiliency Overview.</a:t>
-            </a:r>
-          </a:p>
-          <a:p>
-            <a:r>
-              <a:t>Point out the non-resilient service groups tile.</a:t>
-            </a:r>
-          </a:p>
-          <a:p>
-            <a:r>
-              <a:t>"Imagine you manage 50 applications — you need this single-pane view." </a:t>
-            </a:r>
-          </a:p>
-        </p:txBody>
-      </p:sp>
-      <p:sp>
-        <p:nvSpPr>
-          <p:cNvPr id="4" name="Slide Number Placeholder 3"/>
-          <p:cNvSpPr>
-            <a:spLocks noGrp="1"/>
-          </p:cNvSpPr>
-          <p:nvPr>
-            <p:ph type="sldNum" idx="5" sz="quarter"/>
+            <p:ph type="sldNum" sz="quarter" idx="5"/>
           </p:nvPr>
         </p:nvSpPr>
         <p:spPr/>
@@ -2586,10 +2392,9 @@
           <a:lstStyle/>
           <a:p>
             <a:r>
-              <a:rPr lang="en-US" smtClean="0"/>
+              <a:rPr lang="en-US"/>
               <a:t>Click to edit Master title style</a:t>
             </a:r>
-            <a:endParaRPr lang="en-US"/>
           </a:p>
         </p:txBody>
       </p:sp>
@@ -2705,10 +2510,9 @@
           </a:lstStyle>
           <a:p>
             <a:r>
-              <a:rPr lang="en-US" smtClean="0"/>
+              <a:rPr lang="en-US"/>
               <a:t>Click to edit Master subtitle style</a:t>
             </a:r>
-            <a:endParaRPr lang="en-US"/>
           </a:p>
         </p:txBody>
       </p:sp>
@@ -2729,7 +2533,7 @@
           <a:p>
             <a:fld id="{5BCAD085-E8A6-8845-BD4E-CB4CCA059FC4}" type="datetimeFigureOut">
               <a:rPr lang="en-US" smtClean="0"/>
-              <a:t>1/27/13</a:t>
+              <a:t>7/21/2026</a:t>
             </a:fld>
             <a:endParaRPr lang="en-US"/>
           </a:p>
@@ -2823,10 +2627,9 @@
           <a:lstStyle/>
           <a:p>
             <a:r>
-              <a:rPr lang="en-US" smtClean="0"/>
+              <a:rPr lang="en-US"/>
               <a:t>Click to edit Master title style</a:t>
             </a:r>
-            <a:endParaRPr lang="en-US"/>
           </a:p>
         </p:txBody>
       </p:sp>
@@ -2847,38 +2650,37 @@
           <a:p>
             <a:pPr lvl="0"/>
             <a:r>
-              <a:rPr lang="en-US" smtClean="0"/>
+              <a:rPr lang="en-US"/>
               <a:t>Click to edit Master text styles</a:t>
             </a:r>
           </a:p>
           <a:p>
             <a:pPr lvl="1"/>
             <a:r>
-              <a:rPr lang="en-US" smtClean="0"/>
+              <a:rPr lang="en-US"/>
               <a:t>Second level</a:t>
             </a:r>
           </a:p>
           <a:p>
             <a:pPr lvl="2"/>
             <a:r>
-              <a:rPr lang="en-US" smtClean="0"/>
+              <a:rPr lang="en-US"/>
               <a:t>Third level</a:t>
             </a:r>
           </a:p>
           <a:p>
             <a:pPr lvl="3"/>
             <a:r>
-              <a:rPr lang="en-US" smtClean="0"/>
+              <a:rPr lang="en-US"/>
               <a:t>Fourth level</a:t>
             </a:r>
           </a:p>
           <a:p>
             <a:pPr lvl="4"/>
             <a:r>
-              <a:rPr lang="en-US" smtClean="0"/>
+              <a:rPr lang="en-US"/>
               <a:t>Fifth level</a:t>
             </a:r>
-            <a:endParaRPr lang="en-US"/>
           </a:p>
         </p:txBody>
       </p:sp>
@@ -2899,7 +2701,7 @@
           <a:p>
             <a:fld id="{5BCAD085-E8A6-8845-BD4E-CB4CCA059FC4}" type="datetimeFigureOut">
               <a:rPr lang="en-US" smtClean="0"/>
-              <a:t>1/27/13</a:t>
+              <a:t>7/21/2026</a:t>
             </a:fld>
             <a:endParaRPr lang="en-US"/>
           </a:p>
@@ -2998,10 +2800,9 @@
           <a:lstStyle/>
           <a:p>
             <a:r>
-              <a:rPr lang="en-US" smtClean="0"/>
+              <a:rPr lang="en-US"/>
               <a:t>Click to edit Master title style</a:t>
             </a:r>
-            <a:endParaRPr lang="en-US"/>
           </a:p>
         </p:txBody>
       </p:sp>
@@ -3027,38 +2828,37 @@
           <a:p>
             <a:pPr lvl="0"/>
             <a:r>
-              <a:rPr lang="en-US" smtClean="0"/>
+              <a:rPr lang="en-US"/>
               <a:t>Click to edit Master text styles</a:t>
             </a:r>
           </a:p>
           <a:p>
             <a:pPr lvl="1"/>
             <a:r>
-              <a:rPr lang="en-US" smtClean="0"/>
+              <a:rPr lang="en-US"/>
               <a:t>Second level</a:t>
             </a:r>
           </a:p>
           <a:p>
             <a:pPr lvl="2"/>
             <a:r>
-              <a:rPr lang="en-US" smtClean="0"/>
+              <a:rPr lang="en-US"/>
               <a:t>Third level</a:t>
             </a:r>
           </a:p>
           <a:p>
             <a:pPr lvl="3"/>
             <a:r>
-              <a:rPr lang="en-US" smtClean="0"/>
+              <a:rPr lang="en-US"/>
               <a:t>Fourth level</a:t>
             </a:r>
           </a:p>
           <a:p>
             <a:pPr lvl="4"/>
             <a:r>
-              <a:rPr lang="en-US" smtClean="0"/>
+              <a:rPr lang="en-US"/>
               <a:t>Fifth level</a:t>
             </a:r>
-            <a:endParaRPr lang="en-US"/>
           </a:p>
         </p:txBody>
       </p:sp>
@@ -3079,7 +2879,7 @@
           <a:p>
             <a:fld id="{5BCAD085-E8A6-8845-BD4E-CB4CCA059FC4}" type="datetimeFigureOut">
               <a:rPr lang="en-US" smtClean="0"/>
-              <a:t>1/27/13</a:t>
+              <a:t>7/21/2026</a:t>
             </a:fld>
             <a:endParaRPr lang="en-US"/>
           </a:p>
@@ -3173,10 +2973,9 @@
           <a:lstStyle/>
           <a:p>
             <a:r>
-              <a:rPr lang="en-US" smtClean="0"/>
+              <a:rPr lang="en-US"/>
               <a:t>Click to edit Master title style</a:t>
             </a:r>
-            <a:endParaRPr lang="en-US"/>
           </a:p>
         </p:txBody>
       </p:sp>
@@ -3197,38 +2996,37 @@
           <a:p>
             <a:pPr lvl="0"/>
             <a:r>
-              <a:rPr lang="en-US" smtClean="0"/>
+              <a:rPr lang="en-US"/>
               <a:t>Click to edit Master text styles</a:t>
             </a:r>
           </a:p>
           <a:p>
             <a:pPr lvl="1"/>
             <a:r>
-              <a:rPr lang="en-US" smtClean="0"/>
+              <a:rPr lang="en-US"/>
               <a:t>Second level</a:t>
             </a:r>
           </a:p>
           <a:p>
             <a:pPr lvl="2"/>
             <a:r>
-              <a:rPr lang="en-US" smtClean="0"/>
+              <a:rPr lang="en-US"/>
               <a:t>Third level</a:t>
             </a:r>
           </a:p>
           <a:p>
             <a:pPr lvl="3"/>
             <a:r>
-              <a:rPr lang="en-US" smtClean="0"/>
+              <a:rPr lang="en-US"/>
               <a:t>Fourth level</a:t>
             </a:r>
           </a:p>
           <a:p>
             <a:pPr lvl="4"/>
             <a:r>
-              <a:rPr lang="en-US" smtClean="0"/>
+              <a:rPr lang="en-US"/>
               <a:t>Fifth level</a:t>
             </a:r>
-            <a:endParaRPr lang="en-US"/>
           </a:p>
         </p:txBody>
       </p:sp>
@@ -3249,7 +3047,7 @@
           <a:p>
             <a:fld id="{5BCAD085-E8A6-8845-BD4E-CB4CCA059FC4}" type="datetimeFigureOut">
               <a:rPr lang="en-US" smtClean="0"/>
-              <a:t>1/27/13</a:t>
+              <a:t>7/21/2026</a:t>
             </a:fld>
             <a:endParaRPr lang="en-US"/>
           </a:p>
@@ -3352,10 +3150,9 @@
           </a:lstStyle>
           <a:p>
             <a:r>
-              <a:rPr lang="en-US" smtClean="0"/>
+              <a:rPr lang="en-US"/>
               <a:t>Click to edit Master title style</a:t>
             </a:r>
-            <a:endParaRPr lang="en-US"/>
           </a:p>
         </p:txBody>
       </p:sp>
@@ -3472,7 +3269,7 @@
           <a:p>
             <a:pPr lvl="0"/>
             <a:r>
-              <a:rPr lang="en-US" smtClean="0"/>
+              <a:rPr lang="en-US"/>
               <a:t>Click to edit Master text styles</a:t>
             </a:r>
           </a:p>
@@ -3495,7 +3292,7 @@
           <a:p>
             <a:fld id="{5BCAD085-E8A6-8845-BD4E-CB4CCA059FC4}" type="datetimeFigureOut">
               <a:rPr lang="en-US" smtClean="0"/>
-              <a:t>1/27/13</a:t>
+              <a:t>7/21/2026</a:t>
             </a:fld>
             <a:endParaRPr lang="en-US"/>
           </a:p>
@@ -3589,10 +3386,9 @@
           <a:lstStyle/>
           <a:p>
             <a:r>
-              <a:rPr lang="en-US" smtClean="0"/>
+              <a:rPr lang="en-US"/>
               <a:t>Click to edit Master title style</a:t>
             </a:r>
-            <a:endParaRPr lang="en-US"/>
           </a:p>
         </p:txBody>
       </p:sp>
@@ -3646,38 +3442,37 @@
           <a:p>
             <a:pPr lvl="0"/>
             <a:r>
-              <a:rPr lang="en-US" smtClean="0"/>
+              <a:rPr lang="en-US"/>
               <a:t>Click to edit Master text styles</a:t>
             </a:r>
           </a:p>
           <a:p>
             <a:pPr lvl="1"/>
             <a:r>
-              <a:rPr lang="en-US" smtClean="0"/>
+              <a:rPr lang="en-US"/>
               <a:t>Second level</a:t>
             </a:r>
           </a:p>
           <a:p>
             <a:pPr lvl="2"/>
             <a:r>
-              <a:rPr lang="en-US" smtClean="0"/>
+              <a:rPr lang="en-US"/>
               <a:t>Third level</a:t>
             </a:r>
           </a:p>
           <a:p>
             <a:pPr lvl="3"/>
             <a:r>
-              <a:rPr lang="en-US" smtClean="0"/>
+              <a:rPr lang="en-US"/>
               <a:t>Fourth level</a:t>
             </a:r>
           </a:p>
           <a:p>
             <a:pPr lvl="4"/>
             <a:r>
-              <a:rPr lang="en-US" smtClean="0"/>
+              <a:rPr lang="en-US"/>
               <a:t>Fifth level</a:t>
             </a:r>
-            <a:endParaRPr lang="en-US"/>
           </a:p>
         </p:txBody>
       </p:sp>
@@ -3731,38 +3526,37 @@
           <a:p>
             <a:pPr lvl="0"/>
             <a:r>
-              <a:rPr lang="en-US" smtClean="0"/>
+              <a:rPr lang="en-US"/>
               <a:t>Click to edit Master text styles</a:t>
             </a:r>
           </a:p>
           <a:p>
             <a:pPr lvl="1"/>
             <a:r>
-              <a:rPr lang="en-US" smtClean="0"/>
+              <a:rPr lang="en-US"/>
               <a:t>Second level</a:t>
             </a:r>
           </a:p>
           <a:p>
             <a:pPr lvl="2"/>
             <a:r>
-              <a:rPr lang="en-US" smtClean="0"/>
+              <a:rPr lang="en-US"/>
               <a:t>Third level</a:t>
             </a:r>
           </a:p>
           <a:p>
             <a:pPr lvl="3"/>
             <a:r>
-              <a:rPr lang="en-US" smtClean="0"/>
+              <a:rPr lang="en-US"/>
               <a:t>Fourth level</a:t>
             </a:r>
           </a:p>
           <a:p>
             <a:pPr lvl="4"/>
             <a:r>
-              <a:rPr lang="en-US" smtClean="0"/>
+              <a:rPr lang="en-US"/>
               <a:t>Fifth level</a:t>
             </a:r>
-            <a:endParaRPr lang="en-US"/>
           </a:p>
         </p:txBody>
       </p:sp>
@@ -3783,7 +3577,7 @@
           <a:p>
             <a:fld id="{5BCAD085-E8A6-8845-BD4E-CB4CCA059FC4}" type="datetimeFigureOut">
               <a:rPr lang="en-US" smtClean="0"/>
-              <a:t>1/27/13</a:t>
+              <a:t>7/21/2026</a:t>
             </a:fld>
             <a:endParaRPr lang="en-US"/>
           </a:p>
@@ -3881,10 +3675,9 @@
           </a:lstStyle>
           <a:p>
             <a:r>
-              <a:rPr lang="en-US" smtClean="0"/>
+              <a:rPr lang="en-US"/>
               <a:t>Click to edit Master title style</a:t>
             </a:r>
-            <a:endParaRPr lang="en-US"/>
           </a:p>
         </p:txBody>
       </p:sp>
@@ -3947,7 +3740,7 @@
           <a:p>
             <a:pPr lvl="0"/>
             <a:r>
-              <a:rPr lang="en-US" smtClean="0"/>
+              <a:rPr lang="en-US"/>
               <a:t>Click to edit Master text styles</a:t>
             </a:r>
           </a:p>
@@ -4003,38 +3796,37 @@
           <a:p>
             <a:pPr lvl="0"/>
             <a:r>
-              <a:rPr lang="en-US" smtClean="0"/>
+              <a:rPr lang="en-US"/>
               <a:t>Click to edit Master text styles</a:t>
             </a:r>
           </a:p>
           <a:p>
             <a:pPr lvl="1"/>
             <a:r>
-              <a:rPr lang="en-US" smtClean="0"/>
+              <a:rPr lang="en-US"/>
               <a:t>Second level</a:t>
             </a:r>
           </a:p>
           <a:p>
             <a:pPr lvl="2"/>
             <a:r>
-              <a:rPr lang="en-US" smtClean="0"/>
+              <a:rPr lang="en-US"/>
               <a:t>Third level</a:t>
             </a:r>
           </a:p>
           <a:p>
             <a:pPr lvl="3"/>
             <a:r>
-              <a:rPr lang="en-US" smtClean="0"/>
+              <a:rPr lang="en-US"/>
               <a:t>Fourth level</a:t>
             </a:r>
           </a:p>
           <a:p>
             <a:pPr lvl="4"/>
             <a:r>
-              <a:rPr lang="en-US" smtClean="0"/>
+              <a:rPr lang="en-US"/>
               <a:t>Fifth level</a:t>
             </a:r>
-            <a:endParaRPr lang="en-US"/>
           </a:p>
         </p:txBody>
       </p:sp>
@@ -4097,7 +3889,7 @@
           <a:p>
             <a:pPr lvl="0"/>
             <a:r>
-              <a:rPr lang="en-US" smtClean="0"/>
+              <a:rPr lang="en-US"/>
               <a:t>Click to edit Master text styles</a:t>
             </a:r>
           </a:p>
@@ -4153,38 +3945,37 @@
           <a:p>
             <a:pPr lvl="0"/>
             <a:r>
-              <a:rPr lang="en-US" smtClean="0"/>
+              <a:rPr lang="en-US"/>
               <a:t>Click to edit Master text styles</a:t>
             </a:r>
           </a:p>
           <a:p>
             <a:pPr lvl="1"/>
             <a:r>
-              <a:rPr lang="en-US" smtClean="0"/>
+              <a:rPr lang="en-US"/>
               <a:t>Second level</a:t>
             </a:r>
           </a:p>
           <a:p>
             <a:pPr lvl="2"/>
             <a:r>
-              <a:rPr lang="en-US" smtClean="0"/>
+              <a:rPr lang="en-US"/>
               <a:t>Third level</a:t>
             </a:r>
           </a:p>
           <a:p>
             <a:pPr lvl="3"/>
             <a:r>
-              <a:rPr lang="en-US" smtClean="0"/>
+              <a:rPr lang="en-US"/>
               <a:t>Fourth level</a:t>
             </a:r>
           </a:p>
           <a:p>
             <a:pPr lvl="4"/>
             <a:r>
-              <a:rPr lang="en-US" smtClean="0"/>
+              <a:rPr lang="en-US"/>
               <a:t>Fifth level</a:t>
             </a:r>
-            <a:endParaRPr lang="en-US"/>
           </a:p>
         </p:txBody>
       </p:sp>
@@ -4205,7 +3996,7 @@
           <a:p>
             <a:fld id="{5BCAD085-E8A6-8845-BD4E-CB4CCA059FC4}" type="datetimeFigureOut">
               <a:rPr lang="en-US" smtClean="0"/>
-              <a:t>1/27/13</a:t>
+              <a:t>7/21/2026</a:t>
             </a:fld>
             <a:endParaRPr lang="en-US"/>
           </a:p>
@@ -4299,10 +4090,9 @@
           <a:lstStyle/>
           <a:p>
             <a:r>
-              <a:rPr lang="en-US" smtClean="0"/>
+              <a:rPr lang="en-US"/>
               <a:t>Click to edit Master title style</a:t>
             </a:r>
-            <a:endParaRPr lang="en-US"/>
           </a:p>
         </p:txBody>
       </p:sp>
@@ -4323,7 +4113,7 @@
           <a:p>
             <a:fld id="{5BCAD085-E8A6-8845-BD4E-CB4CCA059FC4}" type="datetimeFigureOut">
               <a:rPr lang="en-US" smtClean="0"/>
-              <a:t>1/27/13</a:t>
+              <a:t>7/21/2026</a:t>
             </a:fld>
             <a:endParaRPr lang="en-US"/>
           </a:p>
@@ -4418,7 +4208,7 @@
           <a:p>
             <a:fld id="{5BCAD085-E8A6-8845-BD4E-CB4CCA059FC4}" type="datetimeFigureOut">
               <a:rPr lang="en-US" smtClean="0"/>
-              <a:t>1/27/13</a:t>
+              <a:t>7/21/2026</a:t>
             </a:fld>
             <a:endParaRPr lang="en-US"/>
           </a:p>
@@ -4521,10 +4311,9 @@
           </a:lstStyle>
           <a:p>
             <a:r>
-              <a:rPr lang="en-US" smtClean="0"/>
+              <a:rPr lang="en-US"/>
               <a:t>Click to edit Master title style</a:t>
             </a:r>
-            <a:endParaRPr lang="en-US"/>
           </a:p>
         </p:txBody>
       </p:sp>
@@ -4578,38 +4367,37 @@
           <a:p>
             <a:pPr lvl="0"/>
             <a:r>
-              <a:rPr lang="en-US" smtClean="0"/>
+              <a:rPr lang="en-US"/>
               <a:t>Click to edit Master text styles</a:t>
             </a:r>
           </a:p>
           <a:p>
             <a:pPr lvl="1"/>
             <a:r>
-              <a:rPr lang="en-US" smtClean="0"/>
+              <a:rPr lang="en-US"/>
               <a:t>Second level</a:t>
             </a:r>
           </a:p>
           <a:p>
             <a:pPr lvl="2"/>
             <a:r>
-              <a:rPr lang="en-US" smtClean="0"/>
+              <a:rPr lang="en-US"/>
               <a:t>Third level</a:t>
             </a:r>
           </a:p>
           <a:p>
             <a:pPr lvl="3"/>
             <a:r>
-              <a:rPr lang="en-US" smtClean="0"/>
+              <a:rPr lang="en-US"/>
               <a:t>Fourth level</a:t>
             </a:r>
           </a:p>
           <a:p>
             <a:pPr lvl="4"/>
             <a:r>
-              <a:rPr lang="en-US" smtClean="0"/>
+              <a:rPr lang="en-US"/>
               <a:t>Fifth level</a:t>
             </a:r>
-            <a:endParaRPr lang="en-US"/>
           </a:p>
         </p:txBody>
       </p:sp>
@@ -4672,7 +4460,7 @@
           <a:p>
             <a:pPr lvl="0"/>
             <a:r>
-              <a:rPr lang="en-US" smtClean="0"/>
+              <a:rPr lang="en-US"/>
               <a:t>Click to edit Master text styles</a:t>
             </a:r>
           </a:p>
@@ -4695,7 +4483,7 @@
           <a:p>
             <a:fld id="{5BCAD085-E8A6-8845-BD4E-CB4CCA059FC4}" type="datetimeFigureOut">
               <a:rPr lang="en-US" smtClean="0"/>
-              <a:t>1/27/13</a:t>
+              <a:t>7/21/2026</a:t>
             </a:fld>
             <a:endParaRPr lang="en-US"/>
           </a:p>
@@ -4798,10 +4586,9 @@
           </a:lstStyle>
           <a:p>
             <a:r>
-              <a:rPr lang="en-US" smtClean="0"/>
+              <a:rPr lang="en-US"/>
               <a:t>Click to edit Master title style</a:t>
             </a:r>
-            <a:endParaRPr lang="en-US"/>
           </a:p>
         </p:txBody>
       </p:sp>
@@ -4925,7 +4712,7 @@
           <a:p>
             <a:pPr lvl="0"/>
             <a:r>
-              <a:rPr lang="en-US" smtClean="0"/>
+              <a:rPr lang="en-US"/>
               <a:t>Click to edit Master text styles</a:t>
             </a:r>
           </a:p>
@@ -4948,7 +4735,7 @@
           <a:p>
             <a:fld id="{5BCAD085-E8A6-8845-BD4E-CB4CCA059FC4}" type="datetimeFigureOut">
               <a:rPr lang="en-US" smtClean="0"/>
-              <a:t>1/27/13</a:t>
+              <a:t>7/21/2026</a:t>
             </a:fld>
             <a:endParaRPr lang="en-US"/>
           </a:p>
@@ -5057,10 +4844,9 @@
           <a:lstStyle/>
           <a:p>
             <a:r>
-              <a:rPr lang="en-US" smtClean="0"/>
+              <a:rPr lang="en-US"/>
               <a:t>Click to edit Master title style</a:t>
             </a:r>
-            <a:endParaRPr lang="en-US"/>
           </a:p>
         </p:txBody>
       </p:sp>
@@ -5091,38 +4877,37 @@
           <a:p>
             <a:pPr lvl="0"/>
             <a:r>
-              <a:rPr lang="en-US" smtClean="0"/>
+              <a:rPr lang="en-US"/>
               <a:t>Click to edit Master text styles</a:t>
             </a:r>
           </a:p>
           <a:p>
             <a:pPr lvl="1"/>
             <a:r>
-              <a:rPr lang="en-US" smtClean="0"/>
+              <a:rPr lang="en-US"/>
               <a:t>Second level</a:t>
             </a:r>
           </a:p>
           <a:p>
             <a:pPr lvl="2"/>
             <a:r>
-              <a:rPr lang="en-US" smtClean="0"/>
+              <a:rPr lang="en-US"/>
               <a:t>Third level</a:t>
             </a:r>
           </a:p>
           <a:p>
             <a:pPr lvl="3"/>
             <a:r>
-              <a:rPr lang="en-US" smtClean="0"/>
+              <a:rPr lang="en-US"/>
               <a:t>Fourth level</a:t>
             </a:r>
           </a:p>
           <a:p>
             <a:pPr lvl="4"/>
             <a:r>
-              <a:rPr lang="en-US" smtClean="0"/>
+              <a:rPr lang="en-US"/>
               <a:t>Fifth level</a:t>
             </a:r>
-            <a:endParaRPr lang="en-US"/>
           </a:p>
         </p:txBody>
       </p:sp>
@@ -5161,7 +4946,7 @@
           <a:p>
             <a:fld id="{5BCAD085-E8A6-8845-BD4E-CB4CCA059FC4}" type="datetimeFigureOut">
               <a:rPr lang="en-US" smtClean="0"/>
-              <a:t>1/27/13</a:t>
+              <a:t>7/21/2026</a:t>
             </a:fld>
             <a:endParaRPr lang="en-US"/>
           </a:p>
@@ -5520,7 +5305,7 @@
 </file>
 
 <file path=ppt/slides/slide1.xml><?xml version="1.0" encoding="utf-8"?>
-<p:sld xmlns:a="http://schemas.openxmlformats.org/drawingml/2006/main" xmlns:p="http://schemas.openxmlformats.org/presentationml/2006/main" xmlns:r="http://schemas.openxmlformats.org/officeDocument/2006/relationships">
+<p:sld xmlns:a="http://schemas.openxmlformats.org/drawingml/2006/main" xmlns:r="http://schemas.openxmlformats.org/officeDocument/2006/relationships" xmlns:p="http://schemas.openxmlformats.org/presentationml/2006/main">
   <p:cSld>
     <p:spTree>
       <p:nvGrpSpPr>
@@ -5528,7 +5313,14 @@
         <p:cNvGrpSpPr/>
         <p:nvPr/>
       </p:nvGrpSpPr>
-      <p:grpSpPr/>
+      <p:grpSpPr>
+        <a:xfrm>
+          <a:off x="0" y="0"/>
+          <a:ext cx="0" cy="0"/>
+          <a:chOff x="0" y="0"/>
+          <a:chExt cx="0" cy="0"/>
+        </a:xfrm>
+      </p:grpSpPr>
       <p:sp>
         <p:nvSpPr>
           <p:cNvPr id="2" name="Title 1"/>
@@ -5543,7 +5335,9 @@
         <p:txBody>
           <a:bodyPr/>
           <a:lstStyle/>
-          <a:p/>
+          <a:p>
+            <a:endParaRPr/>
+          </a:p>
         </p:txBody>
       </p:sp>
       <p:sp>
@@ -5586,6 +5380,7 @@
           <a:lstStyle/>
           <a:p>
             <a:pPr algn="ctr"/>
+            <a:endParaRPr/>
           </a:p>
         </p:txBody>
       </p:sp>
@@ -5738,7 +5533,7 @@
 </file>
 
 <file path=ppt/slides/slide10.xml><?xml version="1.0" encoding="utf-8"?>
-<p:sld xmlns:a="http://schemas.openxmlformats.org/drawingml/2006/main" xmlns:p="http://schemas.openxmlformats.org/presentationml/2006/main" xmlns:r="http://schemas.openxmlformats.org/officeDocument/2006/relationships">
+<p:sld xmlns:a="http://schemas.openxmlformats.org/drawingml/2006/main" xmlns:r="http://schemas.openxmlformats.org/officeDocument/2006/relationships" xmlns:p="http://schemas.openxmlformats.org/presentationml/2006/main">
   <p:cSld>
     <p:spTree>
       <p:nvGrpSpPr>
@@ -5746,24 +5541,14 @@
         <p:cNvGrpSpPr/>
         <p:nvPr/>
       </p:nvGrpSpPr>
-      <p:grpSpPr/>
-      <p:sp>
-        <p:nvSpPr>
-          <p:cNvPr id="2" name="Title 1"/>
-          <p:cNvSpPr>
-            <a:spLocks noGrp="1"/>
-          </p:cNvSpPr>
-          <p:nvPr>
-            <p:ph type="title"/>
-          </p:nvPr>
-        </p:nvSpPr>
-        <p:spPr/>
-        <p:txBody>
-          <a:bodyPr/>
-          <a:lstStyle/>
-          <a:p/>
-        </p:txBody>
-      </p:sp>
+      <p:grpSpPr>
+        <a:xfrm>
+          <a:off x="0" y="0"/>
+          <a:ext cx="0" cy="0"/>
+          <a:chOff x="0" y="0"/>
+          <a:chExt cx="0" cy="0"/>
+        </a:xfrm>
+      </p:grpSpPr>
       <p:sp>
         <p:nvSpPr>
           <p:cNvPr id="3" name="TextBox 2"/>
@@ -5846,6 +5631,7 @@
                 </a:solidFill>
               </a:defRPr>
             </a:pPr>
+            <a:endParaRPr/>
           </a:p>
           <a:p>
             <a:pPr>
@@ -5903,6 +5689,7 @@
                 </a:solidFill>
               </a:defRPr>
             </a:pPr>
+            <a:endParaRPr/>
           </a:p>
           <a:p>
             <a:pPr>
@@ -5960,6 +5747,7 @@
                 </a:solidFill>
               </a:defRPr>
             </a:pPr>
+            <a:endParaRPr/>
           </a:p>
           <a:p>
             <a:pPr>
@@ -6084,7 +5872,7 @@
 </file>
 
 <file path=ppt/slides/slide11.xml><?xml version="1.0" encoding="utf-8"?>
-<p:sld xmlns:a="http://schemas.openxmlformats.org/drawingml/2006/main" xmlns:p="http://schemas.openxmlformats.org/presentationml/2006/main" xmlns:r="http://schemas.openxmlformats.org/officeDocument/2006/relationships">
+<p:sld xmlns:a="http://schemas.openxmlformats.org/drawingml/2006/main" xmlns:r="http://schemas.openxmlformats.org/officeDocument/2006/relationships" xmlns:p="http://schemas.openxmlformats.org/presentationml/2006/main">
   <p:cSld>
     <p:spTree>
       <p:nvGrpSpPr>
@@ -6092,24 +5880,14 @@
         <p:cNvGrpSpPr/>
         <p:nvPr/>
       </p:nvGrpSpPr>
-      <p:grpSpPr/>
-      <p:sp>
-        <p:nvSpPr>
-          <p:cNvPr id="2" name="Title 1"/>
-          <p:cNvSpPr>
-            <a:spLocks noGrp="1"/>
-          </p:cNvSpPr>
-          <p:nvPr>
-            <p:ph type="title"/>
-          </p:nvPr>
-        </p:nvSpPr>
-        <p:spPr/>
-        <p:txBody>
-          <a:bodyPr/>
-          <a:lstStyle/>
-          <a:p/>
-        </p:txBody>
-      </p:sp>
+      <p:grpSpPr>
+        <a:xfrm>
+          <a:off x="0" y="0"/>
+          <a:ext cx="0" cy="0"/>
+          <a:chOff x="0" y="0"/>
+          <a:chExt cx="0" cy="0"/>
+        </a:xfrm>
+      </p:grpSpPr>
       <p:sp>
         <p:nvSpPr>
           <p:cNvPr id="3" name="TextBox 2"/>
@@ -6192,6 +5970,7 @@
                 </a:solidFill>
               </a:defRPr>
             </a:pPr>
+            <a:endParaRPr/>
           </a:p>
           <a:p>
             <a:pPr>
@@ -6249,6 +6028,7 @@
                 </a:solidFill>
               </a:defRPr>
             </a:pPr>
+            <a:endParaRPr/>
           </a:p>
           <a:p>
             <a:pPr>
@@ -6306,6 +6086,7 @@
                 </a:solidFill>
               </a:defRPr>
             </a:pPr>
+            <a:endParaRPr/>
           </a:p>
           <a:p>
             <a:pPr>
@@ -6430,7 +6211,7 @@
 </file>
 
 <file path=ppt/slides/slide12.xml><?xml version="1.0" encoding="utf-8"?>
-<p:sld xmlns:a="http://schemas.openxmlformats.org/drawingml/2006/main" xmlns:p="http://schemas.openxmlformats.org/presentationml/2006/main" xmlns:r="http://schemas.openxmlformats.org/officeDocument/2006/relationships">
+<p:sld xmlns:a="http://schemas.openxmlformats.org/drawingml/2006/main" xmlns:r="http://schemas.openxmlformats.org/officeDocument/2006/relationships" xmlns:p="http://schemas.openxmlformats.org/presentationml/2006/main">
   <p:cSld>
     <p:spTree>
       <p:nvGrpSpPr>
@@ -6438,24 +6219,14 @@
         <p:cNvGrpSpPr/>
         <p:nvPr/>
       </p:nvGrpSpPr>
-      <p:grpSpPr/>
-      <p:sp>
-        <p:nvSpPr>
-          <p:cNvPr id="2" name="Title 1"/>
-          <p:cNvSpPr>
-            <a:spLocks noGrp="1"/>
-          </p:cNvSpPr>
-          <p:nvPr>
-            <p:ph type="title"/>
-          </p:nvPr>
-        </p:nvSpPr>
-        <p:spPr/>
-        <p:txBody>
-          <a:bodyPr/>
-          <a:lstStyle/>
-          <a:p/>
-        </p:txBody>
-      </p:sp>
+      <p:grpSpPr>
+        <a:xfrm>
+          <a:off x="0" y="0"/>
+          <a:ext cx="0" cy="0"/>
+          <a:chOff x="0" y="0"/>
+          <a:chExt cx="0" cy="0"/>
+        </a:xfrm>
+      </p:grpSpPr>
       <p:sp>
         <p:nvSpPr>
           <p:cNvPr id="3" name="TextBox 2"/>
@@ -6568,6 +6339,7 @@
                 </a:solidFill>
               </a:defRPr>
             </a:pPr>
+            <a:endParaRPr/>
           </a:p>
           <a:p>
             <a:pPr>
@@ -6595,6 +6367,7 @@
                 </a:solidFill>
               </a:defRPr>
             </a:pPr>
+            <a:endParaRPr/>
           </a:p>
           <a:p>
             <a:pPr>
@@ -6652,6 +6425,7 @@
                 </a:solidFill>
               </a:defRPr>
             </a:pPr>
+            <a:endParaRPr/>
           </a:p>
           <a:p>
             <a:pPr>
@@ -6679,6 +6453,7 @@
                 </a:solidFill>
               </a:defRPr>
             </a:pPr>
+            <a:endParaRPr/>
           </a:p>
         </p:txBody>
       </p:sp>
@@ -6691,7 +6466,7 @@
 </file>
 
 <file path=ppt/slides/slide13.xml><?xml version="1.0" encoding="utf-8"?>
-<p:sld xmlns:a="http://schemas.openxmlformats.org/drawingml/2006/main" xmlns:p="http://schemas.openxmlformats.org/presentationml/2006/main" xmlns:r="http://schemas.openxmlformats.org/officeDocument/2006/relationships">
+<p:sld xmlns:a="http://schemas.openxmlformats.org/drawingml/2006/main" xmlns:r="http://schemas.openxmlformats.org/officeDocument/2006/relationships" xmlns:p="http://schemas.openxmlformats.org/presentationml/2006/main">
   <p:cSld>
     <p:spTree>
       <p:nvGrpSpPr>
@@ -6699,7 +6474,14 @@
         <p:cNvGrpSpPr/>
         <p:nvPr/>
       </p:nvGrpSpPr>
-      <p:grpSpPr/>
+      <p:grpSpPr>
+        <a:xfrm>
+          <a:off x="0" y="0"/>
+          <a:ext cx="0" cy="0"/>
+          <a:chOff x="0" y="0"/>
+          <a:chExt cx="0" cy="0"/>
+        </a:xfrm>
+      </p:grpSpPr>
       <p:sp>
         <p:nvSpPr>
           <p:cNvPr id="2" name="Title 1"/>
@@ -6714,7 +6496,9 @@
         <p:txBody>
           <a:bodyPr/>
           <a:lstStyle/>
-          <a:p/>
+          <a:p>
+            <a:endParaRPr/>
+          </a:p>
         </p:txBody>
       </p:sp>
       <p:sp>
@@ -6757,6 +6541,7 @@
           <a:lstStyle/>
           <a:p>
             <a:pPr algn="ctr"/>
+            <a:endParaRPr/>
           </a:p>
         </p:txBody>
       </p:sp>
@@ -6874,7 +6659,7 @@
 </file>
 
 <file path=ppt/slides/slide14.xml><?xml version="1.0" encoding="utf-8"?>
-<p:sld xmlns:a="http://schemas.openxmlformats.org/drawingml/2006/main" xmlns:p="http://schemas.openxmlformats.org/presentationml/2006/main" xmlns:r="http://schemas.openxmlformats.org/officeDocument/2006/relationships">
+<p:sld xmlns:a="http://schemas.openxmlformats.org/drawingml/2006/main" xmlns:r="http://schemas.openxmlformats.org/officeDocument/2006/relationships" xmlns:p="http://schemas.openxmlformats.org/presentationml/2006/main">
   <p:cSld>
     <p:spTree>
       <p:nvGrpSpPr>
@@ -6882,24 +6667,14 @@
         <p:cNvGrpSpPr/>
         <p:nvPr/>
       </p:nvGrpSpPr>
-      <p:grpSpPr/>
-      <p:sp>
-        <p:nvSpPr>
-          <p:cNvPr id="2" name="Title 1"/>
-          <p:cNvSpPr>
-            <a:spLocks noGrp="1"/>
-          </p:cNvSpPr>
-          <p:nvPr>
-            <p:ph type="title"/>
-          </p:nvPr>
-        </p:nvSpPr>
-        <p:spPr/>
-        <p:txBody>
-          <a:bodyPr/>
-          <a:lstStyle/>
-          <a:p/>
-        </p:txBody>
-      </p:sp>
+      <p:grpSpPr>
+        <a:xfrm>
+          <a:off x="0" y="0"/>
+          <a:ext cx="0" cy="0"/>
+          <a:chOff x="0" y="0"/>
+          <a:chExt cx="0" cy="0"/>
+        </a:xfrm>
+      </p:grpSpPr>
       <p:sp>
         <p:nvSpPr>
           <p:cNvPr id="3" name="TextBox 2"/>
@@ -6968,6 +6743,7 @@
               </a:defRPr>
             </a:pPr>
             <a:r>
+              <a:rPr dirty="0"/>
               <a:t>Resource                    Recommendation              Cost     Effort</a:t>
             </a:r>
           </a:p>
@@ -6983,6 +6759,7 @@
               </a:defRPr>
             </a:pPr>
             <a:r>
+              <a:rPr dirty="0"/>
               <a:t>─────────────────────────────────────────────────────────────────────────</a:t>
             </a:r>
           </a:p>
@@ -6998,6 +6775,7 @@
               </a:defRPr>
             </a:pPr>
             <a:r>
+              <a:rPr dirty="0"/>
               <a:t>Azure SQL Database          Enable zone redundancy      Medium   Low</a:t>
             </a:r>
           </a:p>
@@ -7013,6 +6791,7 @@
               </a:defRPr>
             </a:pPr>
             <a:r>
+              <a:rPr dirty="0"/>
               <a:t>(both apps)                                                      (portal toggle)</a:t>
             </a:r>
           </a:p>
@@ -7027,19 +6806,21 @@
                 </a:solidFill>
               </a:defRPr>
             </a:pPr>
-          </a:p>
-          <a:p>
-            <a:pPr>
-              <a:spcAft>
-                <a:spcPts val="600"/>
-              </a:spcAft>
-              <a:defRPr sz="1700">
-                <a:solidFill>
-                  <a:srgbClr val="000000"/>
-                </a:solidFill>
-              </a:defRPr>
-            </a:pPr>
-            <a:r>
+            <a:endParaRPr dirty="0"/>
+          </a:p>
+          <a:p>
+            <a:pPr>
+              <a:spcAft>
+                <a:spcPts val="600"/>
+              </a:spcAft>
+              <a:defRPr sz="1700">
+                <a:solidFill>
+                  <a:srgbClr val="000000"/>
+                </a:solidFill>
+              </a:defRPr>
+            </a:pPr>
+            <a:r>
+              <a:rPr dirty="0"/>
               <a:t>Storage Accounts            Convert LRS → ZRS           Low      Medium</a:t>
             </a:r>
           </a:p>
@@ -7055,6 +6836,7 @@
               </a:defRPr>
             </a:pPr>
             <a:r>
+              <a:rPr dirty="0"/>
               <a:t>(both apps)                                                      (may need support)</a:t>
             </a:r>
           </a:p>
@@ -7069,19 +6851,21 @@
                 </a:solidFill>
               </a:defRPr>
             </a:pPr>
-          </a:p>
-          <a:p>
-            <a:pPr>
-              <a:spcAft>
-                <a:spcPts val="600"/>
-              </a:spcAft>
-              <a:defRPr sz="1700">
-                <a:solidFill>
-                  <a:srgbClr val="000000"/>
-                </a:solidFill>
-              </a:defRPr>
-            </a:pPr>
-            <a:r>
+            <a:endParaRPr dirty="0"/>
+          </a:p>
+          <a:p>
+            <a:pPr>
+              <a:spcAft>
+                <a:spcPts val="600"/>
+              </a:spcAft>
+              <a:defRPr sz="1700">
+                <a:solidFill>
+                  <a:srgbClr val="000000"/>
+                </a:solidFill>
+              </a:defRPr>
+            </a:pPr>
+            <a:r>
+              <a:rPr dirty="0"/>
               <a:t>These are surfaced automatically for every non-compliant resource.</a:t>
             </a:r>
           </a:p>
@@ -7097,6 +6881,7 @@
               </a:defRPr>
             </a:pPr>
             <a:r>
+              <a:rPr dirty="0"/>
               <a:t>Each includes a qualitative cost indicator so teams can prioritize.</a:t>
             </a:r>
           </a:p>
@@ -7163,7 +6948,7 @@
 </file>
 
 <file path=ppt/slides/slide15.xml><?xml version="1.0" encoding="utf-8"?>
-<p:sld xmlns:a="http://schemas.openxmlformats.org/drawingml/2006/main" xmlns:p="http://schemas.openxmlformats.org/presentationml/2006/main" xmlns:r="http://schemas.openxmlformats.org/officeDocument/2006/relationships">
+<p:sld xmlns:a="http://schemas.openxmlformats.org/drawingml/2006/main" xmlns:r="http://schemas.openxmlformats.org/officeDocument/2006/relationships" xmlns:p="http://schemas.openxmlformats.org/presentationml/2006/main">
   <p:cSld>
     <p:spTree>
       <p:nvGrpSpPr>
@@ -7171,7 +6956,14 @@
         <p:cNvGrpSpPr/>
         <p:nvPr/>
       </p:nvGrpSpPr>
-      <p:grpSpPr/>
+      <p:grpSpPr>
+        <a:xfrm>
+          <a:off x="0" y="0"/>
+          <a:ext cx="0" cy="0"/>
+          <a:chOff x="0" y="0"/>
+          <a:chExt cx="0" cy="0"/>
+        </a:xfrm>
+      </p:grpSpPr>
       <p:sp>
         <p:nvSpPr>
           <p:cNvPr id="2" name="Title 1"/>
@@ -7186,7 +6978,9 @@
         <p:txBody>
           <a:bodyPr/>
           <a:lstStyle/>
-          <a:p/>
+          <a:p>
+            <a:endParaRPr/>
+          </a:p>
         </p:txBody>
       </p:sp>
       <p:sp>
@@ -7286,6 +7080,7 @@
                 </a:solidFill>
               </a:defRPr>
             </a:pPr>
+            <a:endParaRPr/>
           </a:p>
           <a:p>
             <a:pPr>
@@ -7313,6 +7108,7 @@
                 </a:solidFill>
               </a:defRPr>
             </a:pPr>
+            <a:endParaRPr/>
           </a:p>
           <a:p>
             <a:pPr>
@@ -7355,6 +7151,7 @@
                 </a:solidFill>
               </a:defRPr>
             </a:pPr>
+            <a:endParaRPr/>
           </a:p>
           <a:p>
             <a:pPr>
@@ -7397,6 +7194,7 @@
                 </a:solidFill>
               </a:defRPr>
             </a:pPr>
+            <a:endParaRPr/>
           </a:p>
           <a:p>
             <a:pPr>
@@ -7439,6 +7237,7 @@
                 </a:solidFill>
               </a:defRPr>
             </a:pPr>
+            <a:endParaRPr/>
           </a:p>
           <a:p>
             <a:pPr>
@@ -7548,7 +7347,7 @@
 </file>
 
 <file path=ppt/slides/slide16.xml><?xml version="1.0" encoding="utf-8"?>
-<p:sld xmlns:a="http://schemas.openxmlformats.org/drawingml/2006/main" xmlns:p="http://schemas.openxmlformats.org/presentationml/2006/main" xmlns:r="http://schemas.openxmlformats.org/officeDocument/2006/relationships">
+<p:sld xmlns:a="http://schemas.openxmlformats.org/drawingml/2006/main" xmlns:r="http://schemas.openxmlformats.org/officeDocument/2006/relationships" xmlns:p="http://schemas.openxmlformats.org/presentationml/2006/main">
   <p:cSld>
     <p:spTree>
       <p:nvGrpSpPr>
@@ -7556,7 +7355,14 @@
         <p:cNvGrpSpPr/>
         <p:nvPr/>
       </p:nvGrpSpPr>
-      <p:grpSpPr/>
+      <p:grpSpPr>
+        <a:xfrm>
+          <a:off x="0" y="0"/>
+          <a:ext cx="0" cy="0"/>
+          <a:chOff x="0" y="0"/>
+          <a:chExt cx="0" cy="0"/>
+        </a:xfrm>
+      </p:grpSpPr>
       <p:sp>
         <p:nvSpPr>
           <p:cNvPr id="2" name="Title 1"/>
@@ -7571,7 +7377,9 @@
         <p:txBody>
           <a:bodyPr/>
           <a:lstStyle/>
-          <a:p/>
+          <a:p>
+            <a:endParaRPr/>
+          </a:p>
         </p:txBody>
       </p:sp>
       <p:sp>
@@ -7716,6 +7524,7 @@
                 </a:solidFill>
               </a:defRPr>
             </a:pPr>
+            <a:endParaRPr/>
           </a:p>
         </p:txBody>
       </p:sp>
@@ -7728,7 +7537,7 @@
 </file>
 
 <file path=ppt/slides/slide17.xml><?xml version="1.0" encoding="utf-8"?>
-<p:sld xmlns:a="http://schemas.openxmlformats.org/drawingml/2006/main" xmlns:p="http://schemas.openxmlformats.org/presentationml/2006/main" xmlns:r="http://schemas.openxmlformats.org/officeDocument/2006/relationships">
+<p:sld xmlns:a="http://schemas.openxmlformats.org/drawingml/2006/main" xmlns:r="http://schemas.openxmlformats.org/officeDocument/2006/relationships" xmlns:p="http://schemas.openxmlformats.org/presentationml/2006/main">
   <p:cSld>
     <p:spTree>
       <p:nvGrpSpPr>
@@ -7736,7 +7545,14 @@
         <p:cNvGrpSpPr/>
         <p:nvPr/>
       </p:nvGrpSpPr>
-      <p:grpSpPr/>
+      <p:grpSpPr>
+        <a:xfrm>
+          <a:off x="0" y="0"/>
+          <a:ext cx="0" cy="0"/>
+          <a:chOff x="0" y="0"/>
+          <a:chExt cx="0" cy="0"/>
+        </a:xfrm>
+      </p:grpSpPr>
       <p:sp>
         <p:nvSpPr>
           <p:cNvPr id="2" name="Title 1"/>
@@ -7751,7 +7567,9 @@
         <p:txBody>
           <a:bodyPr/>
           <a:lstStyle/>
-          <a:p/>
+          <a:p>
+            <a:endParaRPr/>
+          </a:p>
         </p:txBody>
       </p:sp>
       <p:sp>
@@ -7794,6 +7612,7 @@
           <a:lstStyle/>
           <a:p>
             <a:pPr algn="ctr"/>
+            <a:endParaRPr/>
           </a:p>
         </p:txBody>
       </p:sp>
@@ -7911,7 +7730,7 @@
 </file>
 
 <file path=ppt/slides/slide18.xml><?xml version="1.0" encoding="utf-8"?>
-<p:sld xmlns:a="http://schemas.openxmlformats.org/drawingml/2006/main" xmlns:p="http://schemas.openxmlformats.org/presentationml/2006/main" xmlns:r="http://schemas.openxmlformats.org/officeDocument/2006/relationships">
+<p:sld xmlns:a="http://schemas.openxmlformats.org/drawingml/2006/main" xmlns:r="http://schemas.openxmlformats.org/officeDocument/2006/relationships" xmlns:p="http://schemas.openxmlformats.org/presentationml/2006/main">
   <p:cSld>
     <p:spTree>
       <p:nvGrpSpPr>
@@ -7919,7 +7738,14 @@
         <p:cNvGrpSpPr/>
         <p:nvPr/>
       </p:nvGrpSpPr>
-      <p:grpSpPr/>
+      <p:grpSpPr>
+        <a:xfrm>
+          <a:off x="0" y="0"/>
+          <a:ext cx="0" cy="0"/>
+          <a:chOff x="0" y="0"/>
+          <a:chExt cx="0" cy="0"/>
+        </a:xfrm>
+      </p:grpSpPr>
       <p:sp>
         <p:nvSpPr>
           <p:cNvPr id="2" name="Title 1"/>
@@ -7934,7 +7760,9 @@
         <p:txBody>
           <a:bodyPr/>
           <a:lstStyle/>
-          <a:p/>
+          <a:p>
+            <a:endParaRPr/>
+          </a:p>
         </p:txBody>
       </p:sp>
       <p:sp>
@@ -8019,6 +7847,7 @@
                 </a:solidFill>
               </a:defRPr>
             </a:pPr>
+            <a:endParaRPr/>
           </a:p>
           <a:p>
             <a:pPr>
@@ -8046,6 +7875,7 @@
                 </a:solidFill>
               </a:defRPr>
             </a:pPr>
+            <a:endParaRPr/>
           </a:p>
           <a:p>
             <a:pPr>
@@ -8133,6 +7963,7 @@
                 </a:solidFill>
               </a:defRPr>
             </a:pPr>
+            <a:endParaRPr/>
           </a:p>
           <a:p>
             <a:pPr>
@@ -8190,6 +8021,7 @@
                 </a:solidFill>
               </a:defRPr>
             </a:pPr>
+            <a:endParaRPr/>
           </a:p>
         </p:txBody>
       </p:sp>
@@ -8254,7 +8086,7 @@
 </file>
 
 <file path=ppt/slides/slide19.xml><?xml version="1.0" encoding="utf-8"?>
-<p:sld xmlns:a="http://schemas.openxmlformats.org/drawingml/2006/main" xmlns:p="http://schemas.openxmlformats.org/presentationml/2006/main" xmlns:r="http://schemas.openxmlformats.org/officeDocument/2006/relationships">
+<p:sld xmlns:a="http://schemas.openxmlformats.org/drawingml/2006/main" xmlns:r="http://schemas.openxmlformats.org/officeDocument/2006/relationships" xmlns:p="http://schemas.openxmlformats.org/presentationml/2006/main">
   <p:cSld>
     <p:spTree>
       <p:nvGrpSpPr>
@@ -8262,7 +8094,14 @@
         <p:cNvGrpSpPr/>
         <p:nvPr/>
       </p:nvGrpSpPr>
-      <p:grpSpPr/>
+      <p:grpSpPr>
+        <a:xfrm>
+          <a:off x="0" y="0"/>
+          <a:ext cx="0" cy="0"/>
+          <a:chOff x="0" y="0"/>
+          <a:chExt cx="0" cy="0"/>
+        </a:xfrm>
+      </p:grpSpPr>
       <p:sp>
         <p:nvSpPr>
           <p:cNvPr id="2" name="Title 1"/>
@@ -8277,7 +8116,9 @@
         <p:txBody>
           <a:bodyPr/>
           <a:lstStyle/>
-          <a:p/>
+          <a:p>
+            <a:endParaRPr/>
+          </a:p>
         </p:txBody>
       </p:sp>
       <p:sp>
@@ -8362,6 +8203,7 @@
                 </a:solidFill>
               </a:defRPr>
             </a:pPr>
+            <a:endParaRPr/>
           </a:p>
           <a:p>
             <a:pPr>
@@ -8434,6 +8276,7 @@
                 </a:solidFill>
               </a:defRPr>
             </a:pPr>
+            <a:endParaRPr/>
           </a:p>
           <a:p>
             <a:pPr>
@@ -8506,6 +8349,7 @@
                 </a:solidFill>
               </a:defRPr>
             </a:pPr>
+            <a:endParaRPr/>
           </a:p>
           <a:p>
             <a:pPr>
@@ -8585,7 +8429,7 @@
 </file>
 
 <file path=ppt/slides/slide2.xml><?xml version="1.0" encoding="utf-8"?>
-<p:sld xmlns:a="http://schemas.openxmlformats.org/drawingml/2006/main" xmlns:p="http://schemas.openxmlformats.org/presentationml/2006/main" xmlns:r="http://schemas.openxmlformats.org/officeDocument/2006/relationships">
+<p:sld xmlns:a="http://schemas.openxmlformats.org/drawingml/2006/main" xmlns:r="http://schemas.openxmlformats.org/officeDocument/2006/relationships" xmlns:p="http://schemas.openxmlformats.org/presentationml/2006/main">
   <p:cSld>
     <p:spTree>
       <p:nvGrpSpPr>
@@ -8593,24 +8437,14 @@
         <p:cNvGrpSpPr/>
         <p:nvPr/>
       </p:nvGrpSpPr>
-      <p:grpSpPr/>
-      <p:sp>
-        <p:nvSpPr>
-          <p:cNvPr id="2" name="Title 1"/>
-          <p:cNvSpPr>
-            <a:spLocks noGrp="1"/>
-          </p:cNvSpPr>
-          <p:nvPr>
-            <p:ph type="title"/>
-          </p:nvPr>
-        </p:nvSpPr>
-        <p:spPr/>
-        <p:txBody>
-          <a:bodyPr/>
-          <a:lstStyle/>
-          <a:p/>
-        </p:txBody>
-      </p:sp>
+      <p:grpSpPr>
+        <a:xfrm>
+          <a:off x="0" y="0"/>
+          <a:ext cx="0" cy="0"/>
+          <a:chOff x="0" y="0"/>
+          <a:chExt cx="0" cy="0"/>
+        </a:xfrm>
+      </p:grpSpPr>
       <p:sp>
         <p:nvSpPr>
           <p:cNvPr id="3" name="TextBox 2"/>
@@ -8708,6 +8542,7 @@
                 </a:solidFill>
               </a:defRPr>
             </a:pPr>
+            <a:endParaRPr/>
           </a:p>
           <a:p>
             <a:pPr>
@@ -8750,6 +8585,7 @@
                 </a:solidFill>
               </a:defRPr>
             </a:pPr>
+            <a:endParaRPr/>
           </a:p>
           <a:p>
             <a:pPr>
@@ -8792,6 +8628,7 @@
                 </a:solidFill>
               </a:defRPr>
             </a:pPr>
+            <a:endParaRPr/>
           </a:p>
           <a:p>
             <a:pPr>
@@ -8834,7 +8671,7 @@
 </file>
 
 <file path=ppt/slides/slide20.xml><?xml version="1.0" encoding="utf-8"?>
-<p:sld xmlns:a="http://schemas.openxmlformats.org/drawingml/2006/main" xmlns:p="http://schemas.openxmlformats.org/presentationml/2006/main" xmlns:r="http://schemas.openxmlformats.org/officeDocument/2006/relationships">
+<p:sld xmlns:a="http://schemas.openxmlformats.org/drawingml/2006/main" xmlns:r="http://schemas.openxmlformats.org/officeDocument/2006/relationships" xmlns:p="http://schemas.openxmlformats.org/presentationml/2006/main">
   <p:cSld>
     <p:spTree>
       <p:nvGrpSpPr>
@@ -8842,7 +8679,14 @@
         <p:cNvGrpSpPr/>
         <p:nvPr/>
       </p:nvGrpSpPr>
-      <p:grpSpPr/>
+      <p:grpSpPr>
+        <a:xfrm>
+          <a:off x="0" y="0"/>
+          <a:ext cx="0" cy="0"/>
+          <a:chOff x="0" y="0"/>
+          <a:chExt cx="0" cy="0"/>
+        </a:xfrm>
+      </p:grpSpPr>
       <p:sp>
         <p:nvSpPr>
           <p:cNvPr id="2" name="Title 1"/>
@@ -8857,7 +8701,9 @@
         <p:txBody>
           <a:bodyPr/>
           <a:lstStyle/>
-          <a:p/>
+          <a:p>
+            <a:endParaRPr/>
+          </a:p>
         </p:txBody>
       </p:sp>
       <p:sp>
@@ -8957,6 +8803,7 @@
                 </a:solidFill>
               </a:defRPr>
             </a:pPr>
+            <a:endParaRPr/>
           </a:p>
           <a:p>
             <a:pPr>
@@ -8984,6 +8831,7 @@
                 </a:solidFill>
               </a:defRPr>
             </a:pPr>
+            <a:endParaRPr/>
           </a:p>
           <a:p>
             <a:pPr>
@@ -9026,6 +8874,7 @@
                 </a:solidFill>
               </a:defRPr>
             </a:pPr>
+            <a:endParaRPr/>
           </a:p>
         </p:txBody>
       </p:sp>
@@ -9038,7 +8887,7 @@
 </file>
 
 <file path=ppt/slides/slide21.xml><?xml version="1.0" encoding="utf-8"?>
-<p:sld xmlns:a="http://schemas.openxmlformats.org/drawingml/2006/main" xmlns:p="http://schemas.openxmlformats.org/presentationml/2006/main" xmlns:r="http://schemas.openxmlformats.org/officeDocument/2006/relationships">
+<p:sld xmlns:a="http://schemas.openxmlformats.org/drawingml/2006/main" xmlns:r="http://schemas.openxmlformats.org/officeDocument/2006/relationships" xmlns:p="http://schemas.openxmlformats.org/presentationml/2006/main">
   <p:cSld>
     <p:spTree>
       <p:nvGrpSpPr>
@@ -9046,7 +8895,14 @@
         <p:cNvGrpSpPr/>
         <p:nvPr/>
       </p:nvGrpSpPr>
-      <p:grpSpPr/>
+      <p:grpSpPr>
+        <a:xfrm>
+          <a:off x="0" y="0"/>
+          <a:ext cx="0" cy="0"/>
+          <a:chOff x="0" y="0"/>
+          <a:chExt cx="0" cy="0"/>
+        </a:xfrm>
+      </p:grpSpPr>
       <p:sp>
         <p:nvSpPr>
           <p:cNvPr id="2" name="Title 1"/>
@@ -9061,7 +8917,9 @@
         <p:txBody>
           <a:bodyPr/>
           <a:lstStyle/>
-          <a:p/>
+          <a:p>
+            <a:endParaRPr/>
+          </a:p>
         </p:txBody>
       </p:sp>
       <p:sp>
@@ -9161,6 +9019,7 @@
                 </a:solidFill>
               </a:defRPr>
             </a:pPr>
+            <a:endParaRPr/>
           </a:p>
           <a:p>
             <a:pPr>
@@ -9188,6 +9047,7 @@
                 </a:solidFill>
               </a:defRPr>
             </a:pPr>
+            <a:endParaRPr/>
           </a:p>
           <a:p>
             <a:pPr>
@@ -9290,6 +9150,7 @@
                 </a:solidFill>
               </a:defRPr>
             </a:pPr>
+            <a:endParaRPr/>
           </a:p>
           <a:p>
             <a:pPr>
@@ -9399,7 +9260,7 @@
 </file>
 
 <file path=ppt/slides/slide22.xml><?xml version="1.0" encoding="utf-8"?>
-<p:sld xmlns:a="http://schemas.openxmlformats.org/drawingml/2006/main" xmlns:p="http://schemas.openxmlformats.org/presentationml/2006/main" xmlns:r="http://schemas.openxmlformats.org/officeDocument/2006/relationships">
+<p:sld xmlns:a="http://schemas.openxmlformats.org/drawingml/2006/main" xmlns:r="http://schemas.openxmlformats.org/officeDocument/2006/relationships" xmlns:p="http://schemas.openxmlformats.org/presentationml/2006/main">
   <p:cSld>
     <p:spTree>
       <p:nvGrpSpPr>
@@ -9407,7 +9268,14 @@
         <p:cNvGrpSpPr/>
         <p:nvPr/>
       </p:nvGrpSpPr>
-      <p:grpSpPr/>
+      <p:grpSpPr>
+        <a:xfrm>
+          <a:off x="0" y="0"/>
+          <a:ext cx="0" cy="0"/>
+          <a:chOff x="0" y="0"/>
+          <a:chExt cx="0" cy="0"/>
+        </a:xfrm>
+      </p:grpSpPr>
       <p:sp>
         <p:nvSpPr>
           <p:cNvPr id="2" name="Title 1"/>
@@ -9422,7 +9290,9 @@
         <p:txBody>
           <a:bodyPr/>
           <a:lstStyle/>
-          <a:p/>
+          <a:p>
+            <a:endParaRPr/>
+          </a:p>
         </p:txBody>
       </p:sp>
       <p:sp>
@@ -9522,6 +9392,7 @@
                 </a:solidFill>
               </a:defRPr>
             </a:pPr>
+            <a:endParaRPr/>
           </a:p>
           <a:p>
             <a:pPr>
@@ -9594,6 +9465,7 @@
                 </a:solidFill>
               </a:defRPr>
             </a:pPr>
+            <a:endParaRPr/>
           </a:p>
           <a:p>
             <a:pPr>
@@ -9666,6 +9538,7 @@
                 </a:solidFill>
               </a:defRPr>
             </a:pPr>
+            <a:endParaRPr/>
           </a:p>
           <a:p>
             <a:pPr>
@@ -9760,7 +9633,7 @@
 </file>
 
 <file path=ppt/slides/slide23.xml><?xml version="1.0" encoding="utf-8"?>
-<p:sld xmlns:a="http://schemas.openxmlformats.org/drawingml/2006/main" xmlns:p="http://schemas.openxmlformats.org/presentationml/2006/main" xmlns:r="http://schemas.openxmlformats.org/officeDocument/2006/relationships">
+<p:sld xmlns:a="http://schemas.openxmlformats.org/drawingml/2006/main" xmlns:r="http://schemas.openxmlformats.org/officeDocument/2006/relationships" xmlns:p="http://schemas.openxmlformats.org/presentationml/2006/main">
   <p:cSld>
     <p:spTree>
       <p:nvGrpSpPr>
@@ -9768,7 +9641,14 @@
         <p:cNvGrpSpPr/>
         <p:nvPr/>
       </p:nvGrpSpPr>
-      <p:grpSpPr/>
+      <p:grpSpPr>
+        <a:xfrm>
+          <a:off x="0" y="0"/>
+          <a:ext cx="0" cy="0"/>
+          <a:chOff x="0" y="0"/>
+          <a:chExt cx="0" cy="0"/>
+        </a:xfrm>
+      </p:grpSpPr>
       <p:sp>
         <p:nvSpPr>
           <p:cNvPr id="2" name="Title 1"/>
@@ -9783,7 +9663,9 @@
         <p:txBody>
           <a:bodyPr/>
           <a:lstStyle/>
-          <a:p/>
+          <a:p>
+            <a:endParaRPr/>
+          </a:p>
         </p:txBody>
       </p:sp>
       <p:sp>
@@ -9898,6 +9780,7 @@
                 </a:solidFill>
               </a:defRPr>
             </a:pPr>
+            <a:endParaRPr/>
           </a:p>
           <a:p>
             <a:pPr>
@@ -9940,6 +9823,7 @@
                 </a:solidFill>
               </a:defRPr>
             </a:pPr>
+            <a:endParaRPr/>
           </a:p>
           <a:p>
             <a:pPr>
@@ -9982,6 +9866,7 @@
                 </a:solidFill>
               </a:defRPr>
             </a:pPr>
+            <a:endParaRPr/>
           </a:p>
         </p:txBody>
       </p:sp>
@@ -9994,7 +9879,7 @@
 </file>
 
 <file path=ppt/slides/slide24.xml><?xml version="1.0" encoding="utf-8"?>
-<p:sld xmlns:a="http://schemas.openxmlformats.org/drawingml/2006/main" xmlns:p="http://schemas.openxmlformats.org/presentationml/2006/main" xmlns:r="http://schemas.openxmlformats.org/officeDocument/2006/relationships">
+<p:sld xmlns:a="http://schemas.openxmlformats.org/drawingml/2006/main" xmlns:r="http://schemas.openxmlformats.org/officeDocument/2006/relationships" xmlns:p="http://schemas.openxmlformats.org/presentationml/2006/main">
   <p:cSld>
     <p:spTree>
       <p:nvGrpSpPr>
@@ -10002,7 +9887,14 @@
         <p:cNvGrpSpPr/>
         <p:nvPr/>
       </p:nvGrpSpPr>
-      <p:grpSpPr/>
+      <p:grpSpPr>
+        <a:xfrm>
+          <a:off x="0" y="0"/>
+          <a:ext cx="0" cy="0"/>
+          <a:chOff x="0" y="0"/>
+          <a:chExt cx="0" cy="0"/>
+        </a:xfrm>
+      </p:grpSpPr>
       <p:sp>
         <p:nvSpPr>
           <p:cNvPr id="2" name="Title 1"/>
@@ -10017,7 +9909,9 @@
         <p:txBody>
           <a:bodyPr/>
           <a:lstStyle/>
-          <a:p/>
+          <a:p>
+            <a:endParaRPr/>
+          </a:p>
         </p:txBody>
       </p:sp>
       <p:sp>
@@ -10132,6 +10026,7 @@
                 </a:solidFill>
               </a:defRPr>
             </a:pPr>
+            <a:endParaRPr/>
           </a:p>
           <a:p>
             <a:pPr>
@@ -10159,6 +10054,7 @@
                 </a:solidFill>
               </a:defRPr>
             </a:pPr>
+            <a:endParaRPr/>
           </a:p>
           <a:p>
             <a:pPr>
@@ -10201,6 +10097,7 @@
                 </a:solidFill>
               </a:defRPr>
             </a:pPr>
+            <a:endParaRPr/>
           </a:p>
           <a:p>
             <a:pPr>
@@ -10243,6 +10140,7 @@
                 </a:solidFill>
               </a:defRPr>
             </a:pPr>
+            <a:endParaRPr/>
           </a:p>
           <a:p>
             <a:pPr>
@@ -10285,7 +10183,7 @@
 </file>
 
 <file path=ppt/slides/slide25.xml><?xml version="1.0" encoding="utf-8"?>
-<p:sld xmlns:a="http://schemas.openxmlformats.org/drawingml/2006/main" xmlns:p="http://schemas.openxmlformats.org/presentationml/2006/main" xmlns:r="http://schemas.openxmlformats.org/officeDocument/2006/relationships">
+<p:sld xmlns:a="http://schemas.openxmlformats.org/drawingml/2006/main" xmlns:r="http://schemas.openxmlformats.org/officeDocument/2006/relationships" xmlns:p="http://schemas.openxmlformats.org/presentationml/2006/main">
   <p:cSld>
     <p:spTree>
       <p:nvGrpSpPr>
@@ -10293,7 +10191,14 @@
         <p:cNvGrpSpPr/>
         <p:nvPr/>
       </p:nvGrpSpPr>
-      <p:grpSpPr/>
+      <p:grpSpPr>
+        <a:xfrm>
+          <a:off x="0" y="0"/>
+          <a:ext cx="0" cy="0"/>
+          <a:chOff x="0" y="0"/>
+          <a:chExt cx="0" cy="0"/>
+        </a:xfrm>
+      </p:grpSpPr>
       <p:sp>
         <p:nvSpPr>
           <p:cNvPr id="2" name="Title 1"/>
@@ -10308,7 +10213,9 @@
         <p:txBody>
           <a:bodyPr/>
           <a:lstStyle/>
-          <a:p/>
+          <a:p>
+            <a:endParaRPr/>
+          </a:p>
         </p:txBody>
       </p:sp>
       <p:sp>
@@ -10351,6 +10258,7 @@
           <a:lstStyle/>
           <a:p>
             <a:pPr algn="ctr"/>
+            <a:endParaRPr/>
           </a:p>
         </p:txBody>
       </p:sp>
@@ -10436,6 +10344,7 @@
                 </a:solidFill>
               </a:defRPr>
             </a:pPr>
+            <a:endParaRPr/>
           </a:p>
           <a:p>
             <a:pPr lvl="1">
@@ -10463,6 +10372,7 @@
                 </a:solidFill>
               </a:defRPr>
             </a:pPr>
+            <a:endParaRPr/>
           </a:p>
           <a:p>
             <a:pPr lvl="1">
@@ -10490,6 +10400,7 @@
                 </a:solidFill>
               </a:defRPr>
             </a:pPr>
+            <a:endParaRPr/>
           </a:p>
           <a:p>
             <a:pPr lvl="1">
@@ -10552,7 +10463,7 @@
 </file>
 
 <file path=ppt/slides/slide26.xml><?xml version="1.0" encoding="utf-8"?>
-<p:sld xmlns:a="http://schemas.openxmlformats.org/drawingml/2006/main" xmlns:p="http://schemas.openxmlformats.org/presentationml/2006/main" xmlns:r="http://schemas.openxmlformats.org/officeDocument/2006/relationships">
+<p:sld xmlns:a="http://schemas.openxmlformats.org/drawingml/2006/main" xmlns:r="http://schemas.openxmlformats.org/officeDocument/2006/relationships" xmlns:p="http://schemas.openxmlformats.org/presentationml/2006/main">
   <p:cSld>
     <p:spTree>
       <p:nvGrpSpPr>
@@ -10560,7 +10471,14 @@
         <p:cNvGrpSpPr/>
         <p:nvPr/>
       </p:nvGrpSpPr>
-      <p:grpSpPr/>
+      <p:grpSpPr>
+        <a:xfrm>
+          <a:off x="0" y="0"/>
+          <a:ext cx="0" cy="0"/>
+          <a:chOff x="0" y="0"/>
+          <a:chExt cx="0" cy="0"/>
+        </a:xfrm>
+      </p:grpSpPr>
       <p:sp>
         <p:nvSpPr>
           <p:cNvPr id="2" name="Title 1"/>
@@ -10575,7 +10493,9 @@
         <p:txBody>
           <a:bodyPr/>
           <a:lstStyle/>
-          <a:p/>
+          <a:p>
+            <a:endParaRPr/>
+          </a:p>
         </p:txBody>
       </p:sp>
       <p:sp>
@@ -10660,6 +10580,7 @@
                 </a:solidFill>
               </a:defRPr>
             </a:pPr>
+            <a:endParaRPr/>
           </a:p>
           <a:p>
             <a:pPr>
@@ -10762,6 +10683,7 @@
                 </a:solidFill>
               </a:defRPr>
             </a:pPr>
+            <a:endParaRPr/>
           </a:p>
           <a:p>
             <a:pPr>
@@ -10819,6 +10741,7 @@
                 </a:solidFill>
               </a:defRPr>
             </a:pPr>
+            <a:endParaRPr/>
           </a:p>
           <a:p>
             <a:pPr>
@@ -10876,7 +10799,7 @@
 </file>
 
 <file path=ppt/slides/slide3.xml><?xml version="1.0" encoding="utf-8"?>
-<p:sld xmlns:a="http://schemas.openxmlformats.org/drawingml/2006/main" xmlns:p="http://schemas.openxmlformats.org/presentationml/2006/main" xmlns:r="http://schemas.openxmlformats.org/officeDocument/2006/relationships">
+<p:sld xmlns:a="http://schemas.openxmlformats.org/drawingml/2006/main" xmlns:r="http://schemas.openxmlformats.org/officeDocument/2006/relationships" xmlns:p="http://schemas.openxmlformats.org/presentationml/2006/main">
   <p:cSld>
     <p:spTree>
       <p:nvGrpSpPr>
@@ -10884,24 +10807,14 @@
         <p:cNvGrpSpPr/>
         <p:nvPr/>
       </p:nvGrpSpPr>
-      <p:grpSpPr/>
-      <p:sp>
-        <p:nvSpPr>
-          <p:cNvPr id="2" name="Title 1"/>
-          <p:cNvSpPr>
-            <a:spLocks noGrp="1"/>
-          </p:cNvSpPr>
-          <p:nvPr>
-            <p:ph type="title"/>
-          </p:nvPr>
-        </p:nvSpPr>
-        <p:spPr/>
-        <p:txBody>
-          <a:bodyPr/>
-          <a:lstStyle/>
-          <a:p/>
-        </p:txBody>
-      </p:sp>
+      <p:grpSpPr>
+        <a:xfrm>
+          <a:off x="0" y="0"/>
+          <a:ext cx="0" cy="0"/>
+          <a:chOff x="0" y="0"/>
+          <a:chExt cx="0" cy="0"/>
+        </a:xfrm>
+      </p:grpSpPr>
       <p:sp>
         <p:nvSpPr>
           <p:cNvPr id="3" name="TextBox 2"/>
@@ -10999,6 +10912,7 @@
                 </a:solidFill>
               </a:defRPr>
             </a:pPr>
+            <a:endParaRPr/>
           </a:p>
           <a:p>
             <a:pPr>
@@ -11041,6 +10955,7 @@
                 </a:solidFill>
               </a:defRPr>
             </a:pPr>
+            <a:endParaRPr/>
           </a:p>
           <a:p>
             <a:pPr>
@@ -11083,6 +10998,7 @@
                 </a:solidFill>
               </a:defRPr>
             </a:pPr>
+            <a:endParaRPr/>
           </a:p>
           <a:p>
             <a:pPr>
@@ -11125,7 +11041,7 @@
 </file>
 
 <file path=ppt/slides/slide4.xml><?xml version="1.0" encoding="utf-8"?>
-<p:sld xmlns:a="http://schemas.openxmlformats.org/drawingml/2006/main" xmlns:p="http://schemas.openxmlformats.org/presentationml/2006/main" xmlns:r="http://schemas.openxmlformats.org/officeDocument/2006/relationships">
+<p:sld xmlns:a="http://schemas.openxmlformats.org/drawingml/2006/main" xmlns:r="http://schemas.openxmlformats.org/officeDocument/2006/relationships" xmlns:p="http://schemas.openxmlformats.org/presentationml/2006/main">
   <p:cSld>
     <p:spTree>
       <p:nvGrpSpPr>
@@ -11133,7 +11049,14 @@
         <p:cNvGrpSpPr/>
         <p:nvPr/>
       </p:nvGrpSpPr>
-      <p:grpSpPr/>
+      <p:grpSpPr>
+        <a:xfrm>
+          <a:off x="0" y="0"/>
+          <a:ext cx="0" cy="0"/>
+          <a:chOff x="0" y="0"/>
+          <a:chExt cx="0" cy="0"/>
+        </a:xfrm>
+      </p:grpSpPr>
       <p:sp>
         <p:nvSpPr>
           <p:cNvPr id="2" name="Title 1"/>
@@ -11148,7 +11071,9 @@
         <p:txBody>
           <a:bodyPr/>
           <a:lstStyle/>
-          <a:p/>
+          <a:p>
+            <a:endParaRPr/>
+          </a:p>
         </p:txBody>
       </p:sp>
       <p:sp>
@@ -11191,6 +11116,7 @@
           <a:lstStyle/>
           <a:p>
             <a:pPr algn="ctr"/>
+            <a:endParaRPr/>
           </a:p>
         </p:txBody>
       </p:sp>
@@ -11308,7 +11234,7 @@
 </file>
 
 <file path=ppt/slides/slide5.xml><?xml version="1.0" encoding="utf-8"?>
-<p:sld xmlns:a="http://schemas.openxmlformats.org/drawingml/2006/main" xmlns:p="http://schemas.openxmlformats.org/presentationml/2006/main" xmlns:r="http://schemas.openxmlformats.org/officeDocument/2006/relationships">
+<p:sld xmlns:a="http://schemas.openxmlformats.org/drawingml/2006/main" xmlns:r="http://schemas.openxmlformats.org/officeDocument/2006/relationships" xmlns:p="http://schemas.openxmlformats.org/presentationml/2006/main">
   <p:cSld>
     <p:spTree>
       <p:nvGrpSpPr>
@@ -11316,24 +11242,14 @@
         <p:cNvGrpSpPr/>
         <p:nvPr/>
       </p:nvGrpSpPr>
-      <p:grpSpPr/>
-      <p:sp>
-        <p:nvSpPr>
-          <p:cNvPr id="2" name="Title 1"/>
-          <p:cNvSpPr>
-            <a:spLocks noGrp="1"/>
-          </p:cNvSpPr>
-          <p:nvPr>
-            <p:ph type="title"/>
-          </p:nvPr>
-        </p:nvSpPr>
-        <p:spPr/>
-        <p:txBody>
-          <a:bodyPr/>
-          <a:lstStyle/>
-          <a:p/>
-        </p:txBody>
-      </p:sp>
+      <p:grpSpPr>
+        <a:xfrm>
+          <a:off x="0" y="0"/>
+          <a:ext cx="0" cy="0"/>
+          <a:chOff x="0" y="0"/>
+          <a:chExt cx="0" cy="0"/>
+        </a:xfrm>
+      </p:grpSpPr>
       <p:sp>
         <p:nvSpPr>
           <p:cNvPr id="3" name="TextBox 2"/>
@@ -11476,6 +11392,7 @@
                 </a:solidFill>
               </a:defRPr>
             </a:pPr>
+            <a:endParaRPr/>
           </a:p>
           <a:p>
             <a:pPr>
@@ -11615,7 +11532,7 @@
 </file>
 
 <file path=ppt/slides/slide6.xml><?xml version="1.0" encoding="utf-8"?>
-<p:sld xmlns:a="http://schemas.openxmlformats.org/drawingml/2006/main" xmlns:p="http://schemas.openxmlformats.org/presentationml/2006/main" xmlns:r="http://schemas.openxmlformats.org/officeDocument/2006/relationships">
+<p:sld xmlns:a="http://schemas.openxmlformats.org/drawingml/2006/main" xmlns:r="http://schemas.openxmlformats.org/officeDocument/2006/relationships" xmlns:p="http://schemas.openxmlformats.org/presentationml/2006/main">
   <p:cSld>
     <p:spTree>
       <p:nvGrpSpPr>
@@ -11623,24 +11540,14 @@
         <p:cNvGrpSpPr/>
         <p:nvPr/>
       </p:nvGrpSpPr>
-      <p:grpSpPr/>
-      <p:sp>
-        <p:nvSpPr>
-          <p:cNvPr id="2" name="Title 1"/>
-          <p:cNvSpPr>
-            <a:spLocks noGrp="1"/>
-          </p:cNvSpPr>
-          <p:nvPr>
-            <p:ph type="title"/>
-          </p:nvPr>
-        </p:nvSpPr>
-        <p:spPr/>
-        <p:txBody>
-          <a:bodyPr/>
-          <a:lstStyle/>
-          <a:p/>
-        </p:txBody>
-      </p:sp>
+      <p:grpSpPr>
+        <a:xfrm>
+          <a:off x="0" y="0"/>
+          <a:ext cx="0" cy="0"/>
+          <a:chOff x="0" y="0"/>
+          <a:chExt cx="0" cy="0"/>
+        </a:xfrm>
+      </p:grpSpPr>
       <p:sp>
         <p:nvSpPr>
           <p:cNvPr id="3" name="TextBox 2"/>
@@ -11768,6 +11675,7 @@
                 </a:solidFill>
               </a:defRPr>
             </a:pPr>
+            <a:endParaRPr/>
           </a:p>
           <a:p>
             <a:pPr>
@@ -11937,7 +11845,7 @@
 </file>
 
 <file path=ppt/slides/slide7.xml><?xml version="1.0" encoding="utf-8"?>
-<p:sld xmlns:a="http://schemas.openxmlformats.org/drawingml/2006/main" xmlns:p="http://schemas.openxmlformats.org/presentationml/2006/main" xmlns:r="http://schemas.openxmlformats.org/officeDocument/2006/relationships">
+<p:sld xmlns:a="http://schemas.openxmlformats.org/drawingml/2006/main" xmlns:r="http://schemas.openxmlformats.org/officeDocument/2006/relationships" xmlns:p="http://schemas.openxmlformats.org/presentationml/2006/main">
   <p:cSld>
     <p:spTree>
       <p:nvGrpSpPr>
@@ -11945,24 +11853,14 @@
         <p:cNvGrpSpPr/>
         <p:nvPr/>
       </p:nvGrpSpPr>
-      <p:grpSpPr/>
-      <p:sp>
-        <p:nvSpPr>
-          <p:cNvPr id="2" name="Title 1"/>
-          <p:cNvSpPr>
-            <a:spLocks noGrp="1"/>
-          </p:cNvSpPr>
-          <p:nvPr>
-            <p:ph type="title"/>
-          </p:nvPr>
-        </p:nvSpPr>
-        <p:spPr/>
-        <p:txBody>
-          <a:bodyPr/>
-          <a:lstStyle/>
-          <a:p/>
-        </p:txBody>
-      </p:sp>
+      <p:grpSpPr>
+        <a:xfrm>
+          <a:off x="0" y="0"/>
+          <a:ext cx="0" cy="0"/>
+          <a:chOff x="0" y="0"/>
+          <a:chExt cx="0" cy="0"/>
+        </a:xfrm>
+      </p:grpSpPr>
       <p:sp>
         <p:nvSpPr>
           <p:cNvPr id="3" name="TextBox 2"/>
@@ -12075,6 +11973,7 @@
                 </a:solidFill>
               </a:defRPr>
             </a:pPr>
+            <a:endParaRPr/>
           </a:p>
           <a:p>
             <a:pPr>
@@ -12132,6 +12031,7 @@
                 </a:solidFill>
               </a:defRPr>
             </a:pPr>
+            <a:endParaRPr/>
           </a:p>
           <a:p>
             <a:pPr>
@@ -12159,6 +12059,7 @@
                 </a:solidFill>
               </a:defRPr>
             </a:pPr>
+            <a:endParaRPr/>
           </a:p>
           <a:p>
             <a:pPr>
@@ -12186,6 +12087,7 @@
                 </a:solidFill>
               </a:defRPr>
             </a:pPr>
+            <a:endParaRPr/>
           </a:p>
         </p:txBody>
       </p:sp>
@@ -12198,7 +12100,7 @@
 </file>
 
 <file path=ppt/slides/slide8.xml><?xml version="1.0" encoding="utf-8"?>
-<p:sld xmlns:a="http://schemas.openxmlformats.org/drawingml/2006/main" xmlns:p="http://schemas.openxmlformats.org/presentationml/2006/main" xmlns:r="http://schemas.openxmlformats.org/officeDocument/2006/relationships">
+<p:sld xmlns:a="http://schemas.openxmlformats.org/drawingml/2006/main" xmlns:r="http://schemas.openxmlformats.org/officeDocument/2006/relationships" xmlns:p="http://schemas.openxmlformats.org/presentationml/2006/main">
   <p:cSld>
     <p:spTree>
       <p:nvGrpSpPr>
@@ -12206,7 +12108,14 @@
         <p:cNvGrpSpPr/>
         <p:nvPr/>
       </p:nvGrpSpPr>
-      <p:grpSpPr/>
+      <p:grpSpPr>
+        <a:xfrm>
+          <a:off x="0" y="0"/>
+          <a:ext cx="0" cy="0"/>
+          <a:chOff x="0" y="0"/>
+          <a:chExt cx="0" cy="0"/>
+        </a:xfrm>
+      </p:grpSpPr>
       <p:sp>
         <p:nvSpPr>
           <p:cNvPr id="2" name="Title 1"/>
@@ -12221,7 +12130,9 @@
         <p:txBody>
           <a:bodyPr/>
           <a:lstStyle/>
-          <a:p/>
+          <a:p>
+            <a:endParaRPr/>
+          </a:p>
         </p:txBody>
       </p:sp>
       <p:sp>
@@ -12264,6 +12175,7 @@
           <a:lstStyle/>
           <a:p>
             <a:pPr algn="ctr"/>
+            <a:endParaRPr/>
           </a:p>
         </p:txBody>
       </p:sp>
@@ -12381,7 +12293,7 @@
 </file>
 
 <file path=ppt/slides/slide9.xml><?xml version="1.0" encoding="utf-8"?>
-<p:sld xmlns:a="http://schemas.openxmlformats.org/drawingml/2006/main" xmlns:p="http://schemas.openxmlformats.org/presentationml/2006/main" xmlns:r="http://schemas.openxmlformats.org/officeDocument/2006/relationships">
+<p:sld xmlns:a="http://schemas.openxmlformats.org/drawingml/2006/main" xmlns:r="http://schemas.openxmlformats.org/officeDocument/2006/relationships" xmlns:p="http://schemas.openxmlformats.org/presentationml/2006/main">
   <p:cSld>
     <p:spTree>
       <p:nvGrpSpPr>
@@ -12389,24 +12301,14 @@
         <p:cNvGrpSpPr/>
         <p:nvPr/>
       </p:nvGrpSpPr>
-      <p:grpSpPr/>
-      <p:sp>
-        <p:nvSpPr>
-          <p:cNvPr id="2" name="Title 1"/>
-          <p:cNvSpPr>
-            <a:spLocks noGrp="1"/>
-          </p:cNvSpPr>
-          <p:nvPr>
-            <p:ph type="title"/>
-          </p:nvPr>
-        </p:nvSpPr>
-        <p:spPr/>
-        <p:txBody>
-          <a:bodyPr/>
-          <a:lstStyle/>
-          <a:p/>
-        </p:txBody>
-      </p:sp>
+      <p:grpSpPr>
+        <a:xfrm>
+          <a:off x="0" y="0"/>
+          <a:ext cx="0" cy="0"/>
+          <a:chOff x="0" y="0"/>
+          <a:chExt cx="0" cy="0"/>
+        </a:xfrm>
+      </p:grpSpPr>
       <p:sp>
         <p:nvSpPr>
           <p:cNvPr id="3" name="TextBox 2"/>
@@ -12489,6 +12391,7 @@
                 </a:solidFill>
               </a:defRPr>
             </a:pPr>
+            <a:endParaRPr/>
           </a:p>
           <a:p>
             <a:pPr>
@@ -12561,6 +12464,7 @@
                 </a:solidFill>
               </a:defRPr>
             </a:pPr>
+            <a:endParaRPr/>
           </a:p>
           <a:p>
             <a:pPr>
@@ -12633,6 +12537,7 @@
                 </a:solidFill>
               </a:defRPr>
             </a:pPr>
+            <a:endParaRPr/>
           </a:p>
           <a:p>
             <a:pPr>
@@ -12728,6 +12633,7 @@
               </a:defRPr>
             </a:pPr>
             <a:r>
+              <a:rPr dirty="0"/>
               <a:t>▶  SWITCH TO PORTAL → IRM: Resiliency Overview (at-scale view)</a:t>
             </a:r>
           </a:p>
@@ -13072,44 +12978,44 @@
         <a:sysClr val="window" lastClr="FFFFFF"/>
       </a:lt1>
       <a:dk2>
-        <a:srgbClr val="1F497D"/>
+        <a:srgbClr val="0E2841"/>
       </a:dk2>
       <a:lt2>
-        <a:srgbClr val="EEECE1"/>
+        <a:srgbClr val="E8E8E8"/>
       </a:lt2>
       <a:accent1>
-        <a:srgbClr val="4F81BD"/>
+        <a:srgbClr val="156082"/>
       </a:accent1>
       <a:accent2>
-        <a:srgbClr val="C0504D"/>
+        <a:srgbClr val="E97132"/>
       </a:accent2>
       <a:accent3>
-        <a:srgbClr val="9BBB59"/>
+        <a:srgbClr val="196B24"/>
       </a:accent3>
       <a:accent4>
-        <a:srgbClr val="8064A2"/>
+        <a:srgbClr val="0F9ED5"/>
       </a:accent4>
       <a:accent5>
-        <a:srgbClr val="4BACC6"/>
+        <a:srgbClr val="A02B93"/>
       </a:accent5>
       <a:accent6>
-        <a:srgbClr val="F79646"/>
+        <a:srgbClr val="4EA72E"/>
       </a:accent6>
       <a:hlink>
-        <a:srgbClr val="0000FF"/>
+        <a:srgbClr val="467886"/>
       </a:hlink>
       <a:folHlink>
-        <a:srgbClr val="800080"/>
+        <a:srgbClr val="96607D"/>
       </a:folHlink>
     </a:clrScheme>
     <a:fontScheme name="Office">
       <a:majorFont>
-        <a:latin typeface="Calibri"/>
+        <a:latin typeface="Aptos Display" panose="02110004020202020204"/>
         <a:ea typeface=""/>
         <a:cs typeface=""/>
-        <a:font script="Jpan" typeface="ＭＳ Ｐゴシック"/>
+        <a:font script="Jpan" typeface="游ゴシック Light"/>
         <a:font script="Hang" typeface="맑은 고딕"/>
-        <a:font script="Hans" typeface="宋体"/>
+        <a:font script="Hans" typeface="等线 Light"/>
         <a:font script="Hant" typeface="新細明體"/>
         <a:font script="Arab" typeface="Times New Roman"/>
         <a:font script="Hebr" typeface="Times New Roman"/>
@@ -13137,14 +13043,31 @@
         <a:font script="Viet" typeface="Times New Roman"/>
         <a:font script="Uigh" typeface="Microsoft Uighur"/>
         <a:font script="Geor" typeface="Sylfaen"/>
+        <a:font script="Armn" typeface="Arial"/>
+        <a:font script="Bugi" typeface="Leelawadee UI"/>
+        <a:font script="Bopo" typeface="Microsoft JhengHei"/>
+        <a:font script="Java" typeface="Javanese Text"/>
+        <a:font script="Lisu" typeface="Segoe UI"/>
+        <a:font script="Mymr" typeface="Myanmar Text"/>
+        <a:font script="Nkoo" typeface="Ebrima"/>
+        <a:font script="Olck" typeface="Nirmala UI"/>
+        <a:font script="Osma" typeface="Ebrima"/>
+        <a:font script="Phag" typeface="Phagspa"/>
+        <a:font script="Syrn" typeface="Estrangelo Edessa"/>
+        <a:font script="Syrj" typeface="Estrangelo Edessa"/>
+        <a:font script="Syre" typeface="Estrangelo Edessa"/>
+        <a:font script="Sora" typeface="Nirmala UI"/>
+        <a:font script="Tale" typeface="Microsoft Tai Le"/>
+        <a:font script="Talu" typeface="Microsoft New Tai Lue"/>
+        <a:font script="Tfng" typeface="Ebrima"/>
       </a:majorFont>
       <a:minorFont>
-        <a:latin typeface="Calibri"/>
+        <a:latin typeface="Aptos" panose="02110004020202020204"/>
         <a:ea typeface=""/>
         <a:cs typeface=""/>
-        <a:font script="Jpan" typeface="ＭＳ Ｐゴシック"/>
+        <a:font script="Jpan" typeface="游ゴシック"/>
         <a:font script="Hang" typeface="맑은 고딕"/>
-        <a:font script="Hans" typeface="宋体"/>
+        <a:font script="Hans" typeface="等线"/>
         <a:font script="Hant" typeface="新細明體"/>
         <a:font script="Arab" typeface="Arial"/>
         <a:font script="Hebr" typeface="Arial"/>
@@ -13172,6 +13095,23 @@
         <a:font script="Viet" typeface="Arial"/>
         <a:font script="Uigh" typeface="Microsoft Uighur"/>
         <a:font script="Geor" typeface="Sylfaen"/>
+        <a:font script="Armn" typeface="Arial"/>
+        <a:font script="Bugi" typeface="Leelawadee UI"/>
+        <a:font script="Bopo" typeface="Microsoft JhengHei"/>
+        <a:font script="Java" typeface="Javanese Text"/>
+        <a:font script="Lisu" typeface="Segoe UI"/>
+        <a:font script="Mymr" typeface="Myanmar Text"/>
+        <a:font script="Nkoo" typeface="Ebrima"/>
+        <a:font script="Olck" typeface="Nirmala UI"/>
+        <a:font script="Osma" typeface="Ebrima"/>
+        <a:font script="Phag" typeface="Phagspa"/>
+        <a:font script="Syrn" typeface="Estrangelo Edessa"/>
+        <a:font script="Syrj" typeface="Estrangelo Edessa"/>
+        <a:font script="Syre" typeface="Estrangelo Edessa"/>
+        <a:font script="Sora" typeface="Nirmala UI"/>
+        <a:font script="Tale" typeface="Microsoft Tai Le"/>
+        <a:font script="Talu" typeface="Microsoft New Tai Lue"/>
+        <a:font script="Tfng" typeface="Ebrima"/>
       </a:minorFont>
     </a:fontScheme>
     <a:fmtScheme name="Office">
@@ -13183,180 +13123,136 @@
           <a:gsLst>
             <a:gs pos="0">
               <a:schemeClr val="phClr">
-                <a:tint val="50000"/>
-                <a:satMod val="300000"/>
+                <a:lumMod val="110000"/>
+                <a:satMod val="105000"/>
+                <a:tint val="67000"/>
               </a:schemeClr>
             </a:gs>
-            <a:gs pos="35000">
+            <a:gs pos="50000">
               <a:schemeClr val="phClr">
-                <a:tint val="37000"/>
-                <a:satMod val="300000"/>
+                <a:lumMod val="105000"/>
+                <a:satMod val="103000"/>
+                <a:tint val="73000"/>
               </a:schemeClr>
             </a:gs>
             <a:gs pos="100000">
               <a:schemeClr val="phClr">
-                <a:tint val="15000"/>
-                <a:satMod val="350000"/>
+                <a:lumMod val="105000"/>
+                <a:satMod val="109000"/>
+                <a:tint val="81000"/>
               </a:schemeClr>
             </a:gs>
           </a:gsLst>
-          <a:lin ang="16200000" scaled="1"/>
+          <a:lin ang="5400000" scaled="0"/>
         </a:gradFill>
         <a:gradFill rotWithShape="1">
           <a:gsLst>
             <a:gs pos="0">
               <a:schemeClr val="phClr">
-                <a:tint val="100000"/>
+                <a:satMod val="103000"/>
+                <a:lumMod val="102000"/>
+                <a:tint val="94000"/>
+              </a:schemeClr>
+            </a:gs>
+            <a:gs pos="50000">
+              <a:schemeClr val="phClr">
+                <a:satMod val="110000"/>
+                <a:lumMod val="100000"/>
                 <a:shade val="100000"/>
-                <a:satMod val="130000"/>
               </a:schemeClr>
             </a:gs>
             <a:gs pos="100000">
               <a:schemeClr val="phClr">
-                <a:tint val="50000"/>
-                <a:shade val="100000"/>
-                <a:satMod val="350000"/>
+                <a:lumMod val="99000"/>
+                <a:satMod val="120000"/>
+                <a:shade val="78000"/>
               </a:schemeClr>
             </a:gs>
           </a:gsLst>
-          <a:lin ang="16200000" scaled="0"/>
+          <a:lin ang="5400000" scaled="0"/>
         </a:gradFill>
       </a:fillStyleLst>
       <a:lnStyleLst>
-        <a:ln w="9525" cap="flat" cmpd="sng" algn="ctr">
+        <a:ln w="12700" cap="flat" cmpd="sng" algn="ctr">
           <a:solidFill>
-            <a:schemeClr val="phClr">
-              <a:shade val="95000"/>
-              <a:satMod val="105000"/>
-            </a:schemeClr>
+            <a:schemeClr val="phClr"/>
           </a:solidFill>
           <a:prstDash val="solid"/>
+          <a:miter lim="800000"/>
+        </a:ln>
+        <a:ln w="19050" cap="flat" cmpd="sng" algn="ctr">
+          <a:solidFill>
+            <a:schemeClr val="phClr"/>
+          </a:solidFill>
+          <a:prstDash val="solid"/>
+          <a:miter lim="800000"/>
         </a:ln>
         <a:ln w="25400" cap="flat" cmpd="sng" algn="ctr">
           <a:solidFill>
             <a:schemeClr val="phClr"/>
           </a:solidFill>
           <a:prstDash val="solid"/>
-        </a:ln>
-        <a:ln w="38100" cap="flat" cmpd="sng" algn="ctr">
-          <a:solidFill>
-            <a:schemeClr val="phClr"/>
-          </a:solidFill>
-          <a:prstDash val="solid"/>
+          <a:miter lim="800000"/>
         </a:ln>
       </a:lnStyleLst>
       <a:effectStyleLst>
         <a:effectStyle>
+          <a:effectLst/>
+        </a:effectStyle>
+        <a:effectStyle>
+          <a:effectLst/>
+        </a:effectStyle>
+        <a:effectStyle>
           <a:effectLst>
-            <a:outerShdw blurRad="40000" dist="20000" dir="5400000" rotWithShape="0">
+            <a:outerShdw blurRad="57150" dist="19050" dir="5400000" algn="ctr" rotWithShape="0">
               <a:srgbClr val="000000">
-                <a:alpha val="38000"/>
+                <a:alpha val="63000"/>
               </a:srgbClr>
             </a:outerShdw>
           </a:effectLst>
-        </a:effectStyle>
-        <a:effectStyle>
-          <a:effectLst>
-            <a:outerShdw blurRad="40000" dist="23000" dir="5400000" rotWithShape="0">
-              <a:srgbClr val="000000">
-                <a:alpha val="35000"/>
-              </a:srgbClr>
-            </a:outerShdw>
-          </a:effectLst>
-        </a:effectStyle>
-        <a:effectStyle>
-          <a:effectLst>
-            <a:outerShdw blurRad="40000" dist="23000" dir="5400000" rotWithShape="0">
-              <a:srgbClr val="000000">
-                <a:alpha val="35000"/>
-              </a:srgbClr>
-            </a:outerShdw>
-          </a:effectLst>
-          <a:scene3d>
-            <a:camera prst="orthographicFront">
-              <a:rot lat="0" lon="0" rev="0"/>
-            </a:camera>
-            <a:lightRig rig="threePt" dir="t">
-              <a:rot lat="0" lon="0" rev="1200000"/>
-            </a:lightRig>
-          </a:scene3d>
-          <a:sp3d>
-            <a:bevelT w="63500" h="25400"/>
-          </a:sp3d>
         </a:effectStyle>
       </a:effectStyleLst>
       <a:bgFillStyleLst>
         <a:solidFill>
           <a:schemeClr val="phClr"/>
         </a:solidFill>
+        <a:solidFill>
+          <a:schemeClr val="phClr">
+            <a:tint val="95000"/>
+            <a:satMod val="170000"/>
+          </a:schemeClr>
+        </a:solidFill>
         <a:gradFill rotWithShape="1">
           <a:gsLst>
             <a:gs pos="0">
               <a:schemeClr val="phClr">
-                <a:tint val="40000"/>
-                <a:satMod val="350000"/>
+                <a:tint val="93000"/>
+                <a:satMod val="150000"/>
+                <a:shade val="98000"/>
+                <a:lumMod val="102000"/>
               </a:schemeClr>
             </a:gs>
-            <a:gs pos="40000">
+            <a:gs pos="50000">
               <a:schemeClr val="phClr">
-                <a:tint val="45000"/>
-                <a:shade val="99000"/>
-                <a:satMod val="350000"/>
+                <a:tint val="98000"/>
+                <a:satMod val="130000"/>
+                <a:shade val="90000"/>
+                <a:lumMod val="103000"/>
               </a:schemeClr>
             </a:gs>
             <a:gs pos="100000">
               <a:schemeClr val="phClr">
-                <a:shade val="20000"/>
-                <a:satMod val="255000"/>
+                <a:shade val="63000"/>
+                <a:satMod val="120000"/>
               </a:schemeClr>
             </a:gs>
           </a:gsLst>
-          <a:path path="circle">
-            <a:fillToRect l="50000" t="-80000" r="50000" b="180000"/>
-          </a:path>
-        </a:gradFill>
-        <a:gradFill rotWithShape="1">
-          <a:gsLst>
-            <a:gs pos="0">
-              <a:schemeClr val="phClr">
-                <a:tint val="80000"/>
-                <a:satMod val="300000"/>
-              </a:schemeClr>
-            </a:gs>
-            <a:gs pos="100000">
-              <a:schemeClr val="phClr">
-                <a:shade val="30000"/>
-                <a:satMod val="200000"/>
-              </a:schemeClr>
-            </a:gs>
-          </a:gsLst>
-          <a:path path="circle">
-            <a:fillToRect l="50000" t="50000" r="50000" b="50000"/>
-          </a:path>
+          <a:lin ang="5400000" scaled="0"/>
         </a:gradFill>
       </a:bgFillStyleLst>
     </a:fmtScheme>
   </a:themeElements>
   <a:objectDefaults>
-    <a:spDef>
-      <a:spPr/>
-      <a:bodyPr/>
-      <a:lstStyle/>
-      <a:style>
-        <a:lnRef idx="1">
-          <a:schemeClr val="accent1"/>
-        </a:lnRef>
-        <a:fillRef idx="3">
-          <a:schemeClr val="accent1"/>
-        </a:fillRef>
-        <a:effectRef idx="2">
-          <a:schemeClr val="accent1"/>
-        </a:effectRef>
-        <a:fontRef idx="minor">
-          <a:schemeClr val="lt1"/>
-        </a:fontRef>
-      </a:style>
-    </a:spDef>
     <a:lnDef>
       <a:spPr/>
       <a:bodyPr/>
@@ -13378,5 +13274,16 @@
     </a:lnDef>
   </a:objectDefaults>
   <a:extraClrSchemeLst/>
+  <a:extLst>
+    <a:ext uri="{05A4C25C-085E-4340-85A3-A5531E510DB2}">
+      <thm15:themeFamily xmlns:thm15="http://schemas.microsoft.com/office/thememl/2012/main" name="Office Theme" id="{2E142A2C-CD16-42D6-873A-C26D2A0506FA}" vid="{1BDDFF52-6CD6-40A5-AB3C-68EB2F1E4D0A}"/>
+    </a:ext>
+  </a:extLst>
 </a:theme>
+</file>
+
+<file path=docMetadata/LabelInfo.xml><?xml version="1.0" encoding="utf-8"?>
+<clbl:labelList xmlns:clbl="http://schemas.microsoft.com/office/2020/mipLabelMetadata">
+  <clbl:label id="{f42aa342-8706-4288-bd11-ebb85995028c}" enabled="1" method="Standard" siteId="{72f988bf-86f1-41af-91ab-2d7cd011db47}" contentBits="0" removed="0"/>
+</clbl:labelList>
 </file>